--- a/Sesion0_Presentacion.pptx
+++ b/Sesion0_Presentacion.pptx
@@ -115,6 +115,11 @@
       </a:defRPr>
     </a:lvl9pPr>
   </p:defaultTextStyle>
+  <p:extLst>
+    <p:ext uri="{EFAFB233-063F-42B5-8137-9DF3F51BA10A}">
+      <p15:sldGuideLst xmlns:p15="http://schemas.microsoft.com/office/powerpoint/2012/main"/>
+    </p:ext>
+  </p:extLst>
 </p:presentation>
 </file>
 
@@ -200,7 +205,7 @@
           <a:p>
             <a:fld id="{5282F153-3F37-0F45-9E97-73ACFA13230C}" type="datetimeFigureOut">
               <a:rPr lang="en-US"/>
-              <a:t>7/23/19</a:t>
+              <a:t>6/13/26</a:t>
             </a:fld>
             <a:endParaRPr lang="en-US"/>
           </a:p>
@@ -358,7 +363,7 @@
           <a:p>
             <a:fld id="{CE5E9CC1-C706-0F49-92D6-E571CC5EEA8F}" type="slidenum">
               <a:rPr lang="en-US"/>
-              <a:t>‹#›</a:t>
+              <a:t>‹Nº›</a:t>
             </a:fld>
             <a:endParaRPr lang="en-US"/>
           </a:p>
@@ -511,10 +516,6 @@
           <a:bodyPr/>
           <a:lstStyle/>
           <a:p>
-            <a:r>
-              <a:rPr lang="en-US" dirty="0"/>
-              <a:t/>
-            </a:r>
             <a:endParaRPr lang="en-US" dirty="0"/>
           </a:p>
         </p:txBody>
@@ -599,10 +600,6 @@
           <a:bodyPr/>
           <a:lstStyle/>
           <a:p>
-            <a:r>
-              <a:rPr lang="en-US" dirty="0"/>
-              <a:t/>
-            </a:r>
             <a:endParaRPr lang="en-US" dirty="0"/>
           </a:p>
         </p:txBody>
@@ -687,10 +684,6 @@
           <a:bodyPr/>
           <a:lstStyle/>
           <a:p>
-            <a:r>
-              <a:rPr lang="en-US" dirty="0"/>
-              <a:t/>
-            </a:r>
             <a:endParaRPr lang="en-US" dirty="0"/>
           </a:p>
         </p:txBody>
@@ -775,10 +768,6 @@
           <a:bodyPr/>
           <a:lstStyle/>
           <a:p>
-            <a:r>
-              <a:rPr lang="en-US" dirty="0"/>
-              <a:t/>
-            </a:r>
             <a:endParaRPr lang="en-US" dirty="0"/>
           </a:p>
         </p:txBody>
@@ -863,10 +852,6 @@
           <a:bodyPr/>
           <a:lstStyle/>
           <a:p>
-            <a:r>
-              <a:rPr lang="en-US" dirty="0"/>
-              <a:t/>
-            </a:r>
             <a:endParaRPr lang="en-US" dirty="0"/>
           </a:p>
         </p:txBody>
@@ -951,10 +936,6 @@
           <a:bodyPr/>
           <a:lstStyle/>
           <a:p>
-            <a:r>
-              <a:rPr lang="en-US" dirty="0"/>
-              <a:t/>
-            </a:r>
             <a:endParaRPr lang="en-US" dirty="0"/>
           </a:p>
         </p:txBody>
@@ -1039,10 +1020,6 @@
           <a:bodyPr/>
           <a:lstStyle/>
           <a:p>
-            <a:r>
-              <a:rPr lang="en-US" dirty="0"/>
-              <a:t/>
-            </a:r>
             <a:endParaRPr lang="en-US" dirty="0"/>
           </a:p>
         </p:txBody>
@@ -1127,10 +1104,6 @@
           <a:bodyPr/>
           <a:lstStyle/>
           <a:p>
-            <a:r>
-              <a:rPr lang="en-US" dirty="0"/>
-              <a:t/>
-            </a:r>
             <a:endParaRPr lang="en-US" dirty="0"/>
           </a:p>
         </p:txBody>
@@ -1215,10 +1188,6 @@
           <a:bodyPr/>
           <a:lstStyle/>
           <a:p>
-            <a:r>
-              <a:rPr lang="en-US" dirty="0"/>
-              <a:t/>
-            </a:r>
             <a:endParaRPr lang="en-US" dirty="0"/>
           </a:p>
         </p:txBody>
@@ -1303,10 +1272,6 @@
           <a:bodyPr/>
           <a:lstStyle/>
           <a:p>
-            <a:r>
-              <a:rPr lang="en-US" dirty="0"/>
-              <a:t/>
-            </a:r>
             <a:endParaRPr lang="en-US" dirty="0"/>
           </a:p>
         </p:txBody>
@@ -1391,10 +1356,6 @@
           <a:bodyPr/>
           <a:lstStyle/>
           <a:p>
-            <a:r>
-              <a:rPr lang="en-US" dirty="0"/>
-              <a:t/>
-            </a:r>
             <a:endParaRPr lang="en-US" dirty="0"/>
           </a:p>
         </p:txBody>
@@ -1479,10 +1440,6 @@
           <a:bodyPr/>
           <a:lstStyle/>
           <a:p>
-            <a:r>
-              <a:rPr lang="en-US" dirty="0"/>
-              <a:t/>
-            </a:r>
             <a:endParaRPr lang="en-US" dirty="0"/>
           </a:p>
         </p:txBody>
@@ -1556,6 +1513,11 @@
 <file path=ppt/slideMasters/slideMaster1.xml><?xml version="1.0" encoding="utf-8"?>
 <p:sldMaster xmlns:a="http://schemas.openxmlformats.org/drawingml/2006/main" xmlns:r="http://schemas.openxmlformats.org/officeDocument/2006/relationships" xmlns:p="http://schemas.openxmlformats.org/presentationml/2006/main">
   <p:cSld>
+    <p:bg>
+      <p:bgRef idx="1001">
+        <a:schemeClr val="bg1"/>
+      </p:bgRef>
+    </p:bg>
     <p:spTree>
       <p:nvGrpSpPr>
         <p:cNvPr id="1" name=""/>
@@ -1838,6 +1800,7 @@
         <a:solidFill>
           <a:srgbClr val="121B3A"/>
         </a:solidFill>
+        <a:effectLst/>
       </p:bgPr>
     </p:bg>
     <p:spTree>
@@ -1873,6 +1836,13 @@
           </a:solidFill>
           <a:ln/>
         </p:spPr>
+        <p:txBody>
+          <a:bodyPr/>
+          <a:lstStyle/>
+          <a:p>
+            <a:endParaRPr lang="es-PE"/>
+          </a:p>
+        </p:txBody>
       </p:sp>
       <p:sp>
         <p:nvSpPr>
@@ -1893,6 +1863,13 @@
           </a:solidFill>
           <a:ln/>
         </p:spPr>
+        <p:txBody>
+          <a:bodyPr/>
+          <a:lstStyle/>
+          <a:p>
+            <a:endParaRPr lang="es-PE"/>
+          </a:p>
+        </p:txBody>
       </p:sp>
       <p:sp>
         <p:nvSpPr>
@@ -1903,7 +1880,7 @@
         <p:spPr>
           <a:xfrm>
             <a:off x="10927080" y="320040"/>
-            <a:ext cx="1005840" cy="1005840"/>
+            <a:ext cx="1092322" cy="1024018"/>
           </a:xfrm>
           <a:prstGeom prst="ellipse">
             <a:avLst/>
@@ -1913,6 +1890,13 @@
           </a:solidFill>
           <a:ln/>
         </p:spPr>
+        <p:txBody>
+          <a:bodyPr/>
+          <a:lstStyle/>
+          <a:p>
+            <a:endParaRPr lang="es-PE"/>
+          </a:p>
+        </p:txBody>
       </p:sp>
       <p:pic>
         <p:nvPicPr>
@@ -1923,15 +1907,15 @@
           <p:nvPr/>
         </p:nvPicPr>
         <p:blipFill>
-          <a:blip r:embed="rId1"/>
+          <a:blip r:embed="rId3"/>
           <a:stretch>
             <a:fillRect/>
           </a:stretch>
         </p:blipFill>
         <p:spPr>
           <a:xfrm>
-            <a:off x="11045952" y="438912"/>
-            <a:ext cx="768096" cy="768096"/>
+            <a:off x="11101036" y="464911"/>
+            <a:ext cx="698029" cy="698029"/>
           </a:xfrm>
           <a:prstGeom prst="rect">
             <a:avLst/>
@@ -1959,11 +1943,11 @@
           <a:bodyPr wrap="square" lIns="0" tIns="0" rIns="0" bIns="0" rtlCol="0" anchor="ctr"/>
           <a:lstStyle/>
           <a:p>
-            <a:pPr indent="0" marL="0">
-              <a:buNone/>
-            </a:pPr>
-            <a:r>
-              <a:rPr lang="en-US" sz="1400" b="1" spc="300" kern="0" dirty="0">
+            <a:pPr marL="0" indent="0">
+              <a:buNone/>
+            </a:pPr>
+            <a:r>
+              <a:rPr lang="en-US" sz="1400" b="1" kern="0" spc="300" dirty="0">
                 <a:solidFill>
                   <a:srgbClr val="F5C842"/>
                 </a:solidFill>
@@ -1998,7 +1982,7 @@
           <a:bodyPr wrap="square" lIns="0" tIns="0" rIns="0" bIns="0" rtlCol="0" anchor="ctr"/>
           <a:lstStyle/>
           <a:p>
-            <a:pPr indent="0" marL="0">
+            <a:pPr marL="0" indent="0">
               <a:buNone/>
             </a:pPr>
             <a:r>
@@ -2037,7 +2021,7 @@
           <a:bodyPr wrap="square" lIns="0" tIns="0" rIns="0" bIns="0" rtlCol="0" anchor="ctr"/>
           <a:lstStyle/>
           <a:p>
-            <a:pPr indent="0" marL="0">
+            <a:pPr marL="0" indent="0">
               <a:buNone/>
             </a:pPr>
             <a:r>
@@ -2076,7 +2060,7 @@
           <a:bodyPr wrap="square" lIns="0" tIns="0" rIns="0" bIns="0" rtlCol="0" anchor="ctr"/>
           <a:lstStyle/>
           <a:p>
-            <a:pPr indent="0" marL="0">
+            <a:pPr marL="0" indent="0">
               <a:buNone/>
             </a:pPr>
             <a:r>
@@ -2113,6 +2097,13 @@
           </a:solidFill>
           <a:ln/>
         </p:spPr>
+        <p:txBody>
+          <a:bodyPr/>
+          <a:lstStyle/>
+          <a:p>
+            <a:endParaRPr lang="es-PE"/>
+          </a:p>
+        </p:txBody>
       </p:sp>
       <p:pic>
         <p:nvPicPr>
@@ -2123,7 +2114,7 @@
           <p:nvPr/>
         </p:nvPicPr>
         <p:blipFill>
-          <a:blip r:embed="rId2"/>
+          <a:blip r:embed="rId4"/>
           <a:stretch>
             <a:fillRect/>
           </a:stretch>
@@ -2159,7 +2150,7 @@
           <a:bodyPr wrap="square" lIns="0" tIns="0" rIns="0" bIns="0" rtlCol="0" anchor="ctr"/>
           <a:lstStyle/>
           <a:p>
-            <a:pPr indent="0" marL="0">
+            <a:pPr marL="0" indent="0">
               <a:buNone/>
             </a:pPr>
             <a:r>
@@ -2193,6 +2184,7 @@
         <a:solidFill>
           <a:srgbClr val="FFFFFF"/>
         </a:solidFill>
+        <a:effectLst/>
       </p:bgPr>
     </p:bg>
     <p:spTree>
@@ -2230,11 +2222,11 @@
           <a:bodyPr wrap="square" lIns="0" tIns="0" rIns="0" bIns="0" rtlCol="0" anchor="ctr"/>
           <a:lstStyle/>
           <a:p>
-            <a:pPr indent="0" marL="0">
-              <a:buNone/>
-            </a:pPr>
-            <a:r>
-              <a:rPr lang="en-US" sz="1300" b="1" spc="200" kern="0" dirty="0">
+            <a:pPr marL="0" indent="0">
+              <a:buNone/>
+            </a:pPr>
+            <a:r>
+              <a:rPr lang="en-US" sz="1300" b="1" kern="0" spc="200" dirty="0">
                 <a:solidFill>
                   <a:srgbClr val="F5C842"/>
                 </a:solidFill>
@@ -2269,7 +2261,7 @@
           <a:bodyPr wrap="square" lIns="0" tIns="0" rIns="0" bIns="0" rtlCol="0" anchor="ctr"/>
           <a:lstStyle/>
           <a:p>
-            <a:pPr indent="0" marL="0">
+            <a:pPr marL="0" indent="0">
               <a:buNone/>
             </a:pPr>
             <a:r>
@@ -2308,7 +2300,7 @@
           <a:bodyPr wrap="square" lIns="0" tIns="0" rIns="0" bIns="0" rtlCol="0" anchor="ctr"/>
           <a:lstStyle/>
           <a:p>
-            <a:pPr indent="0" marL="0">
+            <a:pPr marL="0" indent="0">
               <a:buNone/>
             </a:pPr>
             <a:r>
@@ -2347,6 +2339,13 @@
           </a:solidFill>
           <a:ln/>
         </p:spPr>
+        <p:txBody>
+          <a:bodyPr/>
+          <a:lstStyle/>
+          <a:p>
+            <a:endParaRPr lang="es-PE"/>
+          </a:p>
+        </p:txBody>
       </p:sp>
       <p:sp>
         <p:nvSpPr>
@@ -2369,7 +2368,7 @@
           <a:bodyPr wrap="square" lIns="0" tIns="0" rIns="0" bIns="0" rtlCol="0" anchor="ctr"/>
           <a:lstStyle/>
           <a:p>
-            <a:pPr indent="0" marL="0">
+            <a:pPr marL="0" indent="0">
               <a:buNone/>
             </a:pPr>
             <a:r>
@@ -2408,11 +2407,11 @@
           <a:bodyPr wrap="square" lIns="0" tIns="0" rIns="0" bIns="0" rtlCol="0" anchor="ctr"/>
           <a:lstStyle/>
           <a:p>
-            <a:pPr indent="0" marL="0">
-              <a:buNone/>
-            </a:pPr>
-            <a:r>
-              <a:rPr lang="en-US" sz="1200" b="1" spc="150" kern="0" dirty="0">
+            <a:pPr marL="0" indent="0">
+              <a:buNone/>
+            </a:pPr>
+            <a:r>
+              <a:rPr lang="en-US" sz="1200" b="1" kern="0" spc="150" dirty="0">
                 <a:solidFill>
                   <a:srgbClr val="C9CEE8"/>
                 </a:solidFill>
@@ -2447,7 +2446,7 @@
           <a:bodyPr wrap="square" lIns="0" tIns="0" rIns="0" bIns="0" rtlCol="0" anchor="t"/>
           <a:lstStyle/>
           <a:p>
-            <a:pPr indent="0" marL="0">
+            <a:pPr marL="0" indent="0">
               <a:buNone/>
             </a:pPr>
             <a:r>
@@ -2486,6 +2485,13 @@
           </a:solidFill>
           <a:ln/>
         </p:spPr>
+        <p:txBody>
+          <a:bodyPr/>
+          <a:lstStyle/>
+          <a:p>
+            <a:endParaRPr lang="es-PE"/>
+          </a:p>
+        </p:txBody>
       </p:sp>
       <p:sp>
         <p:nvSpPr>
@@ -2508,7 +2514,7 @@
           <a:bodyPr wrap="square" lIns="0" tIns="0" rIns="0" bIns="0" rtlCol="0" anchor="ctr"/>
           <a:lstStyle/>
           <a:p>
-            <a:pPr indent="0" marL="0">
+            <a:pPr marL="0" indent="0">
               <a:buNone/>
             </a:pPr>
             <a:r>
@@ -2547,11 +2553,11 @@
           <a:bodyPr wrap="square" lIns="0" tIns="0" rIns="0" bIns="0" rtlCol="0" anchor="ctr"/>
           <a:lstStyle/>
           <a:p>
-            <a:pPr indent="0" marL="0">
-              <a:buNone/>
-            </a:pPr>
-            <a:r>
-              <a:rPr lang="en-US" sz="1200" b="1" spc="150" kern="0" dirty="0">
+            <a:pPr marL="0" indent="0">
+              <a:buNone/>
+            </a:pPr>
+            <a:r>
+              <a:rPr lang="en-US" sz="1200" b="1" kern="0" spc="150" dirty="0">
                 <a:solidFill>
                   <a:srgbClr val="C9CEE8"/>
                 </a:solidFill>
@@ -2586,7 +2592,7 @@
           <a:bodyPr wrap="square" lIns="0" tIns="0" rIns="0" bIns="0" rtlCol="0" anchor="t"/>
           <a:lstStyle/>
           <a:p>
-            <a:pPr indent="0" marL="0">
+            <a:pPr marL="0" indent="0">
               <a:buNone/>
             </a:pPr>
             <a:r>
@@ -2625,6 +2631,13 @@
           </a:solidFill>
           <a:ln/>
         </p:spPr>
+        <p:txBody>
+          <a:bodyPr/>
+          <a:lstStyle/>
+          <a:p>
+            <a:endParaRPr lang="es-PE"/>
+          </a:p>
+        </p:txBody>
       </p:sp>
       <p:sp>
         <p:nvSpPr>
@@ -2647,7 +2660,7 @@
           <a:bodyPr wrap="square" lIns="0" tIns="0" rIns="0" bIns="0" rtlCol="0" anchor="ctr"/>
           <a:lstStyle/>
           <a:p>
-            <a:pPr indent="0" marL="0">
+            <a:pPr marL="0" indent="0">
               <a:buNone/>
             </a:pPr>
             <a:r>
@@ -2686,11 +2699,11 @@
           <a:bodyPr wrap="square" lIns="0" tIns="0" rIns="0" bIns="0" rtlCol="0" anchor="ctr"/>
           <a:lstStyle/>
           <a:p>
-            <a:pPr indent="0" marL="0">
-              <a:buNone/>
-            </a:pPr>
-            <a:r>
-              <a:rPr lang="en-US" sz="1200" b="1" spc="150" kern="0" dirty="0">
+            <a:pPr marL="0" indent="0">
+              <a:buNone/>
+            </a:pPr>
+            <a:r>
+              <a:rPr lang="en-US" sz="1200" b="1" kern="0" spc="150" dirty="0">
                 <a:solidFill>
                   <a:srgbClr val="C9CEE8"/>
                 </a:solidFill>
@@ -2725,7 +2738,7 @@
           <a:bodyPr wrap="square" lIns="0" tIns="0" rIns="0" bIns="0" rtlCol="0" anchor="t"/>
           <a:lstStyle/>
           <a:p>
-            <a:pPr indent="0" marL="0">
+            <a:pPr marL="0" indent="0">
               <a:buNone/>
             </a:pPr>
             <a:r>
@@ -2759,6 +2772,7 @@
         <a:solidFill>
           <a:srgbClr val="FFFFFF"/>
         </a:solidFill>
+        <a:effectLst/>
       </p:bgPr>
     </p:bg>
     <p:spTree>
@@ -2796,11 +2810,11 @@
           <a:bodyPr wrap="square" lIns="0" tIns="0" rIns="0" bIns="0" rtlCol="0" anchor="ctr"/>
           <a:lstStyle/>
           <a:p>
-            <a:pPr indent="0" marL="0">
-              <a:buNone/>
-            </a:pPr>
-            <a:r>
-              <a:rPr lang="en-US" sz="1300" b="1" spc="200" kern="0" dirty="0">
+            <a:pPr marL="0" indent="0">
+              <a:buNone/>
+            </a:pPr>
+            <a:r>
+              <a:rPr lang="en-US" sz="1300" b="1" kern="0" spc="200" dirty="0">
                 <a:solidFill>
                   <a:srgbClr val="F5C842"/>
                 </a:solidFill>
@@ -2835,7 +2849,7 @@
           <a:bodyPr wrap="square" lIns="0" tIns="0" rIns="0" bIns="0" rtlCol="0" anchor="ctr"/>
           <a:lstStyle/>
           <a:p>
-            <a:pPr indent="0" marL="0">
+            <a:pPr marL="0" indent="0">
               <a:buNone/>
             </a:pPr>
             <a:r>
@@ -2874,6 +2888,13 @@
           </a:solidFill>
           <a:ln/>
         </p:spPr>
+        <p:txBody>
+          <a:bodyPr/>
+          <a:lstStyle/>
+          <a:p>
+            <a:endParaRPr lang="es-PE"/>
+          </a:p>
+        </p:txBody>
       </p:sp>
       <p:sp>
         <p:nvSpPr>
@@ -2894,416 +2915,17 @@
           </a:solidFill>
           <a:ln/>
         </p:spPr>
+        <p:txBody>
+          <a:bodyPr/>
+          <a:lstStyle/>
+          <a:p>
+            <a:endParaRPr lang="es-PE"/>
+          </a:p>
+        </p:txBody>
       </p:sp>
       <p:pic>
         <p:nvPicPr>
           <p:cNvPr id="6" name="Image 0" descr="preencoded.png"/>
-          <p:cNvPicPr>
-            <a:picLocks noChangeAspect="1"/>
-          </p:cNvPicPr>
-          <p:nvPr/>
-        </p:nvPicPr>
-        <p:blipFill>
-          <a:blip r:embed="rId1"/>
-          <a:stretch>
-            <a:fillRect/>
-          </a:stretch>
-        </p:blipFill>
-        <p:spPr>
-          <a:xfrm>
-            <a:off x="987552" y="2176272"/>
-            <a:ext cx="310896" cy="310896"/>
-          </a:xfrm>
-          <a:prstGeom prst="rect">
-            <a:avLst/>
-          </a:prstGeom>
-        </p:spPr>
-      </p:pic>
-      <p:sp>
-        <p:nvSpPr>
-          <p:cNvPr id="7" name="Text 4"/>
-          <p:cNvSpPr/>
-          <p:nvPr/>
-        </p:nvSpPr>
-        <p:spPr>
-          <a:xfrm>
-            <a:off x="822960" y="2834640"/>
-            <a:ext cx="3108960" cy="411480"/>
-          </a:xfrm>
-          <a:prstGeom prst="rect">
-            <a:avLst/>
-          </a:prstGeom>
-          <a:noFill/>
-          <a:ln/>
-        </p:spPr>
-        <p:txBody>
-          <a:bodyPr wrap="square" lIns="0" tIns="0" rIns="0" bIns="0" rtlCol="0" anchor="ctr"/>
-          <a:lstStyle/>
-          <a:p>
-            <a:pPr indent="0" marL="0">
-              <a:buNone/>
-            </a:pPr>
-            <a:r>
-              <a:rPr lang="en-US" sz="1800" b="1" dirty="0">
-                <a:solidFill>
-                  <a:srgbClr val="121B3A"/>
-                </a:solidFill>
-                <a:latin typeface="Calibri" pitchFamily="34" charset="0"/>
-                <a:ea typeface="Calibri" pitchFamily="34" charset="-122"/>
-                <a:cs typeface="Calibri" pitchFamily="34" charset="-120"/>
-              </a:rPr>
-              <a:t>Alucinaciones</a:t>
-            </a:r>
-            <a:endParaRPr lang="en-US" sz="1800" dirty="0"/>
-          </a:p>
-        </p:txBody>
-      </p:sp>
-      <p:sp>
-        <p:nvSpPr>
-          <p:cNvPr id="8" name="Text 5"/>
-          <p:cNvSpPr/>
-          <p:nvPr/>
-        </p:nvSpPr>
-        <p:spPr>
-          <a:xfrm>
-            <a:off x="822960" y="3291840"/>
-            <a:ext cx="3108960" cy="1371600"/>
-          </a:xfrm>
-          <a:prstGeom prst="rect">
-            <a:avLst/>
-          </a:prstGeom>
-          <a:noFill/>
-          <a:ln/>
-        </p:spPr>
-        <p:txBody>
-          <a:bodyPr wrap="square" lIns="0" tIns="0" rIns="0" bIns="0" rtlCol="0" anchor="t"/>
-          <a:lstStyle/>
-          <a:p>
-            <a:pPr indent="0" marL="0">
-              <a:buNone/>
-            </a:pPr>
-            <a:r>
-              <a:rPr lang="en-US" sz="1300" dirty="0">
-                <a:solidFill>
-                  <a:srgbClr val="1A1A1A"/>
-                </a:solidFill>
-                <a:latin typeface="Calibri" pitchFamily="34" charset="0"/>
-                <a:ea typeface="Calibri" pitchFamily="34" charset="-122"/>
-                <a:cs typeface="Calibri" pitchFamily="34" charset="-120"/>
-              </a:rPr>
-              <a:t>La IA puede inventar datos, nombres, cifras o fuentes con total seguridad, sin avisar que no está segura.</a:t>
-            </a:r>
-            <a:endParaRPr lang="en-US" sz="1300" dirty="0"/>
-          </a:p>
-        </p:txBody>
-      </p:sp>
-      <p:sp>
-        <p:nvSpPr>
-          <p:cNvPr id="9" name="Shape 6"/>
-          <p:cNvSpPr/>
-          <p:nvPr/>
-        </p:nvSpPr>
-        <p:spPr>
-          <a:xfrm>
-            <a:off x="822960" y="4800600"/>
-            <a:ext cx="3108960" cy="9144"/>
-          </a:xfrm>
-          <a:prstGeom prst="rect">
-            <a:avLst/>
-          </a:prstGeom>
-          <a:solidFill>
-            <a:srgbClr val="E5E5EA"/>
-          </a:solidFill>
-          <a:ln/>
-        </p:spPr>
-      </p:sp>
-      <p:sp>
-        <p:nvSpPr>
-          <p:cNvPr id="10" name="Text 7"/>
-          <p:cNvSpPr/>
-          <p:nvPr/>
-        </p:nvSpPr>
-        <p:spPr>
-          <a:xfrm>
-            <a:off x="822960" y="4937760"/>
-            <a:ext cx="3108960" cy="1005840"/>
-          </a:xfrm>
-          <a:prstGeom prst="rect">
-            <a:avLst/>
-          </a:prstGeom>
-          <a:noFill/>
-          <a:ln/>
-        </p:spPr>
-        <p:txBody>
-          <a:bodyPr wrap="square" lIns="0" tIns="0" rIns="0" bIns="0" rtlCol="0" anchor="t"/>
-          <a:lstStyle/>
-          <a:p>
-            <a:pPr indent="0" marL="0">
-              <a:buNone/>
-            </a:pPr>
-            <a:r>
-              <a:rPr lang="en-US" sz="1200" i="1" dirty="0">
-                <a:solidFill>
-                  <a:srgbClr val="1E2D6B"/>
-                </a:solidFill>
-                <a:latin typeface="Calibri" pitchFamily="34" charset="0"/>
-                <a:ea typeface="Calibri" pitchFamily="34" charset="-122"/>
-                <a:cs typeface="Calibri" pitchFamily="34" charset="-120"/>
-              </a:rPr>
-              <a:t>Regla: cualquier dato concreto que genere la IA debe verificarse antes de usarse.</a:t>
-            </a:r>
-            <a:endParaRPr lang="en-US" sz="1200" dirty="0"/>
-          </a:p>
-        </p:txBody>
-      </p:sp>
-      <p:sp>
-        <p:nvSpPr>
-          <p:cNvPr id="11" name="Shape 8"/>
-          <p:cNvSpPr/>
-          <p:nvPr/>
-        </p:nvSpPr>
-        <p:spPr>
-          <a:xfrm>
-            <a:off x="4389120" y="1737360"/>
-            <a:ext cx="3657600" cy="4297680"/>
-          </a:xfrm>
-          <a:prstGeom prst="roundRect">
-            <a:avLst>
-              <a:gd name="adj" fmla="val 2000"/>
-            </a:avLst>
-          </a:prstGeom>
-          <a:solidFill>
-            <a:srgbClr val="F2F3F7"/>
-          </a:solidFill>
-          <a:ln/>
-        </p:spPr>
-      </p:sp>
-      <p:sp>
-        <p:nvSpPr>
-          <p:cNvPr id="12" name="Shape 9"/>
-          <p:cNvSpPr/>
-          <p:nvPr/>
-        </p:nvSpPr>
-        <p:spPr>
-          <a:xfrm>
-            <a:off x="4663440" y="2011680"/>
-            <a:ext cx="640080" cy="640080"/>
-          </a:xfrm>
-          <a:prstGeom prst="ellipse">
-            <a:avLst/>
-          </a:prstGeom>
-          <a:solidFill>
-            <a:srgbClr val="FFFFFF"/>
-          </a:solidFill>
-          <a:ln/>
-        </p:spPr>
-      </p:sp>
-      <p:pic>
-        <p:nvPicPr>
-          <p:cNvPr id="13" name="Image 1" descr="preencoded.png"/>
-          <p:cNvPicPr>
-            <a:picLocks noChangeAspect="1"/>
-          </p:cNvPicPr>
-          <p:nvPr/>
-        </p:nvPicPr>
-        <p:blipFill>
-          <a:blip r:embed="rId2"/>
-          <a:stretch>
-            <a:fillRect/>
-          </a:stretch>
-        </p:blipFill>
-        <p:spPr>
-          <a:xfrm>
-            <a:off x="4828032" y="2176272"/>
-            <a:ext cx="310896" cy="310896"/>
-          </a:xfrm>
-          <a:prstGeom prst="rect">
-            <a:avLst/>
-          </a:prstGeom>
-        </p:spPr>
-      </p:pic>
-      <p:sp>
-        <p:nvSpPr>
-          <p:cNvPr id="14" name="Text 10"/>
-          <p:cNvSpPr/>
-          <p:nvPr/>
-        </p:nvSpPr>
-        <p:spPr>
-          <a:xfrm>
-            <a:off x="4663440" y="2834640"/>
-            <a:ext cx="3108960" cy="411480"/>
-          </a:xfrm>
-          <a:prstGeom prst="rect">
-            <a:avLst/>
-          </a:prstGeom>
-          <a:noFill/>
-          <a:ln/>
-        </p:spPr>
-        <p:txBody>
-          <a:bodyPr wrap="square" lIns="0" tIns="0" rIns="0" bIns="0" rtlCol="0" anchor="ctr"/>
-          <a:lstStyle/>
-          <a:p>
-            <a:pPr indent="0" marL="0">
-              <a:buNone/>
-            </a:pPr>
-            <a:r>
-              <a:rPr lang="en-US" sz="1800" b="1" dirty="0">
-                <a:solidFill>
-                  <a:srgbClr val="121B3A"/>
-                </a:solidFill>
-                <a:latin typeface="Calibri" pitchFamily="34" charset="0"/>
-                <a:ea typeface="Calibri" pitchFamily="34" charset="-122"/>
-                <a:cs typeface="Calibri" pitchFamily="34" charset="-120"/>
-              </a:rPr>
-              <a:t>Confidencialidad</a:t>
-            </a:r>
-            <a:endParaRPr lang="en-US" sz="1800" dirty="0"/>
-          </a:p>
-        </p:txBody>
-      </p:sp>
-      <p:sp>
-        <p:nvSpPr>
-          <p:cNvPr id="15" name="Text 11"/>
-          <p:cNvSpPr/>
-          <p:nvPr/>
-        </p:nvSpPr>
-        <p:spPr>
-          <a:xfrm>
-            <a:off x="4663440" y="3291840"/>
-            <a:ext cx="3108960" cy="1371600"/>
-          </a:xfrm>
-          <a:prstGeom prst="rect">
-            <a:avLst/>
-          </a:prstGeom>
-          <a:noFill/>
-          <a:ln/>
-        </p:spPr>
-        <p:txBody>
-          <a:bodyPr wrap="square" lIns="0" tIns="0" rIns="0" bIns="0" rtlCol="0" anchor="t"/>
-          <a:lstStyle/>
-          <a:p>
-            <a:pPr indent="0" marL="0">
-              <a:buNone/>
-            </a:pPr>
-            <a:r>
-              <a:rPr lang="en-US" sz="1300" dirty="0">
-                <a:solidFill>
-                  <a:srgbClr val="1A1A1A"/>
-                </a:solidFill>
-                <a:latin typeface="Calibri" pitchFamily="34" charset="0"/>
-                <a:ea typeface="Calibri" pitchFamily="34" charset="-122"/>
-                <a:cs typeface="Calibri" pitchFamily="34" charset="-120"/>
-              </a:rPr>
-              <a:t>Lo que escribes en una IA puede no ser privado, según la herramienta y configuración.</a:t>
-            </a:r>
-            <a:endParaRPr lang="en-US" sz="1300" dirty="0"/>
-          </a:p>
-        </p:txBody>
-      </p:sp>
-      <p:sp>
-        <p:nvSpPr>
-          <p:cNvPr id="16" name="Shape 12"/>
-          <p:cNvSpPr/>
-          <p:nvPr/>
-        </p:nvSpPr>
-        <p:spPr>
-          <a:xfrm>
-            <a:off x="4663440" y="4800600"/>
-            <a:ext cx="3108960" cy="9144"/>
-          </a:xfrm>
-          <a:prstGeom prst="rect">
-            <a:avLst/>
-          </a:prstGeom>
-          <a:solidFill>
-            <a:srgbClr val="E5E5EA"/>
-          </a:solidFill>
-          <a:ln/>
-        </p:spPr>
-      </p:sp>
-      <p:sp>
-        <p:nvSpPr>
-          <p:cNvPr id="17" name="Text 13"/>
-          <p:cNvSpPr/>
-          <p:nvPr/>
-        </p:nvSpPr>
-        <p:spPr>
-          <a:xfrm>
-            <a:off x="4663440" y="4937760"/>
-            <a:ext cx="3108960" cy="1005840"/>
-          </a:xfrm>
-          <a:prstGeom prst="rect">
-            <a:avLst/>
-          </a:prstGeom>
-          <a:noFill/>
-          <a:ln/>
-        </p:spPr>
-        <p:txBody>
-          <a:bodyPr wrap="square" lIns="0" tIns="0" rIns="0" bIns="0" rtlCol="0" anchor="t"/>
-          <a:lstStyle/>
-          <a:p>
-            <a:pPr indent="0" marL="0">
-              <a:buNone/>
-            </a:pPr>
-            <a:r>
-              <a:rPr lang="en-US" sz="1200" i="1" dirty="0">
-                <a:solidFill>
-                  <a:srgbClr val="1E2D6B"/>
-                </a:solidFill>
-                <a:latin typeface="Calibri" pitchFamily="34" charset="0"/>
-                <a:ea typeface="Calibri" pitchFamily="34" charset="-122"/>
-                <a:cs typeface="Calibri" pitchFamily="34" charset="-120"/>
-              </a:rPr>
-              <a:t>Regla EEA: nunca compartir datos personales completos de alumnos, finanzas internas, ni contraseñas.</a:t>
-            </a:r>
-            <a:endParaRPr lang="en-US" sz="1200" dirty="0"/>
-          </a:p>
-        </p:txBody>
-      </p:sp>
-      <p:sp>
-        <p:nvSpPr>
-          <p:cNvPr id="18" name="Shape 14"/>
-          <p:cNvSpPr/>
-          <p:nvPr/>
-        </p:nvSpPr>
-        <p:spPr>
-          <a:xfrm>
-            <a:off x="8229600" y="1737360"/>
-            <a:ext cx="3657600" cy="4297680"/>
-          </a:xfrm>
-          <a:prstGeom prst="roundRect">
-            <a:avLst>
-              <a:gd name="adj" fmla="val 2000"/>
-            </a:avLst>
-          </a:prstGeom>
-          <a:solidFill>
-            <a:srgbClr val="F2F3F7"/>
-          </a:solidFill>
-          <a:ln/>
-        </p:spPr>
-      </p:sp>
-      <p:sp>
-        <p:nvSpPr>
-          <p:cNvPr id="19" name="Shape 15"/>
-          <p:cNvSpPr/>
-          <p:nvPr/>
-        </p:nvSpPr>
-        <p:spPr>
-          <a:xfrm>
-            <a:off x="8503920" y="2011680"/>
-            <a:ext cx="640080" cy="640080"/>
-          </a:xfrm>
-          <a:prstGeom prst="ellipse">
-            <a:avLst/>
-          </a:prstGeom>
-          <a:solidFill>
-            <a:srgbClr val="FFFFFF"/>
-          </a:solidFill>
-          <a:ln/>
-        </p:spPr>
-      </p:sp>
-      <p:pic>
-        <p:nvPicPr>
-          <p:cNvPr id="20" name="Image 2" descr="preencoded.png"/>
           <p:cNvPicPr>
             <a:picLocks noChangeAspect="1"/>
           </p:cNvPicPr>
@@ -3317,7 +2939,7 @@
         </p:blipFill>
         <p:spPr>
           <a:xfrm>
-            <a:off x="8668512" y="2176272"/>
+            <a:off x="987552" y="2176272"/>
             <a:ext cx="310896" cy="310896"/>
           </a:xfrm>
           <a:prstGeom prst="rect">
@@ -3327,13 +2949,13 @@
       </p:pic>
       <p:sp>
         <p:nvSpPr>
-          <p:cNvPr id="21" name="Text 16"/>
-          <p:cNvSpPr/>
-          <p:nvPr/>
-        </p:nvSpPr>
-        <p:spPr>
-          <a:xfrm>
-            <a:off x="8503920" y="2834640"/>
+          <p:cNvPr id="7" name="Text 4"/>
+          <p:cNvSpPr/>
+          <p:nvPr/>
+        </p:nvSpPr>
+        <p:spPr>
+          <a:xfrm>
+            <a:off x="822960" y="2834640"/>
             <a:ext cx="3108960" cy="411480"/>
           </a:xfrm>
           <a:prstGeom prst="rect">
@@ -3346,7 +2968,7 @@
           <a:bodyPr wrap="square" lIns="0" tIns="0" rIns="0" bIns="0" rtlCol="0" anchor="ctr"/>
           <a:lstStyle/>
           <a:p>
-            <a:pPr indent="0" marL="0">
+            <a:pPr marL="0" indent="0">
               <a:buNone/>
             </a:pPr>
             <a:r>
@@ -3358,7 +2980,7 @@
                 <a:ea typeface="Calibri" pitchFamily="34" charset="-122"/>
                 <a:cs typeface="Calibri" pitchFamily="34" charset="-120"/>
               </a:rPr>
-              <a:t>Dependencia</a:t>
+              <a:t>Alucinaciones</a:t>
             </a:r>
             <a:endParaRPr lang="en-US" sz="1800" dirty="0"/>
           </a:p>
@@ -3366,13 +2988,13 @@
       </p:sp>
       <p:sp>
         <p:nvSpPr>
-          <p:cNvPr id="22" name="Text 17"/>
-          <p:cNvSpPr/>
-          <p:nvPr/>
-        </p:nvSpPr>
-        <p:spPr>
-          <a:xfrm>
-            <a:off x="8503920" y="3291840"/>
+          <p:cNvPr id="8" name="Text 5"/>
+          <p:cNvSpPr/>
+          <p:nvPr/>
+        </p:nvSpPr>
+        <p:spPr>
+          <a:xfrm>
+            <a:off x="822960" y="3291840"/>
             <a:ext cx="3108960" cy="1371600"/>
           </a:xfrm>
           <a:prstGeom prst="rect">
@@ -3385,7 +3007,7 @@
           <a:bodyPr wrap="square" lIns="0" tIns="0" rIns="0" bIns="0" rtlCol="0" anchor="t"/>
           <a:lstStyle/>
           <a:p>
-            <a:pPr indent="0" marL="0">
+            <a:pPr marL="0" indent="0">
               <a:buNone/>
             </a:pPr>
             <a:r>
@@ -3397,7 +3019,7 @@
                 <a:ea typeface="Calibri" pitchFamily="34" charset="-122"/>
                 <a:cs typeface="Calibri" pitchFamily="34" charset="-120"/>
               </a:rPr>
-              <a:t>La IA acelera, no reemplaza el criterio. Si no puedes explicar lo que generó, no lo envíes tal cual.</a:t>
+              <a:t>La IA puede inventar datos, nombres, cifras o fuentes con total seguridad, sin avisar que no está segura.</a:t>
             </a:r>
             <a:endParaRPr lang="en-US" sz="1300" dirty="0"/>
           </a:p>
@@ -3405,13 +3027,13 @@
       </p:sp>
       <p:sp>
         <p:nvSpPr>
-          <p:cNvPr id="23" name="Shape 18"/>
-          <p:cNvSpPr/>
-          <p:nvPr/>
-        </p:nvSpPr>
-        <p:spPr>
-          <a:xfrm>
-            <a:off x="8503920" y="4800600"/>
+          <p:cNvPr id="9" name="Shape 6"/>
+          <p:cNvSpPr/>
+          <p:nvPr/>
+        </p:nvSpPr>
+        <p:spPr>
+          <a:xfrm>
+            <a:off x="822960" y="4800600"/>
             <a:ext cx="3108960" cy="9144"/>
           </a:xfrm>
           <a:prstGeom prst="rect">
@@ -3422,6 +3044,461 @@
           </a:solidFill>
           <a:ln/>
         </p:spPr>
+        <p:txBody>
+          <a:bodyPr/>
+          <a:lstStyle/>
+          <a:p>
+            <a:endParaRPr lang="es-PE"/>
+          </a:p>
+        </p:txBody>
+      </p:sp>
+      <p:sp>
+        <p:nvSpPr>
+          <p:cNvPr id="10" name="Text 7"/>
+          <p:cNvSpPr/>
+          <p:nvPr/>
+        </p:nvSpPr>
+        <p:spPr>
+          <a:xfrm>
+            <a:off x="822960" y="4937760"/>
+            <a:ext cx="3108960" cy="1005840"/>
+          </a:xfrm>
+          <a:prstGeom prst="rect">
+            <a:avLst/>
+          </a:prstGeom>
+          <a:noFill/>
+          <a:ln/>
+        </p:spPr>
+        <p:txBody>
+          <a:bodyPr wrap="square" lIns="0" tIns="0" rIns="0" bIns="0" rtlCol="0" anchor="t"/>
+          <a:lstStyle/>
+          <a:p>
+            <a:pPr marL="0" indent="0">
+              <a:buNone/>
+            </a:pPr>
+            <a:r>
+              <a:rPr lang="en-US" sz="1200" i="1" dirty="0">
+                <a:solidFill>
+                  <a:srgbClr val="1E2D6B"/>
+                </a:solidFill>
+                <a:latin typeface="Calibri" pitchFamily="34" charset="0"/>
+                <a:ea typeface="Calibri" pitchFamily="34" charset="-122"/>
+                <a:cs typeface="Calibri" pitchFamily="34" charset="-120"/>
+              </a:rPr>
+              <a:t>Regla: cualquier dato concreto que genere la IA debe verificarse antes de usarse.</a:t>
+            </a:r>
+            <a:endParaRPr lang="en-US" sz="1200" dirty="0"/>
+          </a:p>
+        </p:txBody>
+      </p:sp>
+      <p:sp>
+        <p:nvSpPr>
+          <p:cNvPr id="11" name="Shape 8"/>
+          <p:cNvSpPr/>
+          <p:nvPr/>
+        </p:nvSpPr>
+        <p:spPr>
+          <a:xfrm>
+            <a:off x="4389120" y="1737360"/>
+            <a:ext cx="3657600" cy="4297680"/>
+          </a:xfrm>
+          <a:prstGeom prst="roundRect">
+            <a:avLst>
+              <a:gd name="adj" fmla="val 2000"/>
+            </a:avLst>
+          </a:prstGeom>
+          <a:solidFill>
+            <a:srgbClr val="F2F3F7"/>
+          </a:solidFill>
+          <a:ln/>
+        </p:spPr>
+        <p:txBody>
+          <a:bodyPr/>
+          <a:lstStyle/>
+          <a:p>
+            <a:endParaRPr lang="es-PE"/>
+          </a:p>
+        </p:txBody>
+      </p:sp>
+      <p:sp>
+        <p:nvSpPr>
+          <p:cNvPr id="12" name="Shape 9"/>
+          <p:cNvSpPr/>
+          <p:nvPr/>
+        </p:nvSpPr>
+        <p:spPr>
+          <a:xfrm>
+            <a:off x="4663440" y="2011680"/>
+            <a:ext cx="640080" cy="640080"/>
+          </a:xfrm>
+          <a:prstGeom prst="ellipse">
+            <a:avLst/>
+          </a:prstGeom>
+          <a:solidFill>
+            <a:srgbClr val="FFFFFF"/>
+          </a:solidFill>
+          <a:ln/>
+        </p:spPr>
+        <p:txBody>
+          <a:bodyPr/>
+          <a:lstStyle/>
+          <a:p>
+            <a:endParaRPr lang="es-PE"/>
+          </a:p>
+        </p:txBody>
+      </p:sp>
+      <p:pic>
+        <p:nvPicPr>
+          <p:cNvPr id="13" name="Image 1" descr="preencoded.png"/>
+          <p:cNvPicPr>
+            <a:picLocks noChangeAspect="1"/>
+          </p:cNvPicPr>
+          <p:nvPr/>
+        </p:nvPicPr>
+        <p:blipFill>
+          <a:blip r:embed="rId4"/>
+          <a:stretch>
+            <a:fillRect/>
+          </a:stretch>
+        </p:blipFill>
+        <p:spPr>
+          <a:xfrm>
+            <a:off x="4828032" y="2176272"/>
+            <a:ext cx="310896" cy="310896"/>
+          </a:xfrm>
+          <a:prstGeom prst="rect">
+            <a:avLst/>
+          </a:prstGeom>
+        </p:spPr>
+      </p:pic>
+      <p:sp>
+        <p:nvSpPr>
+          <p:cNvPr id="14" name="Text 10"/>
+          <p:cNvSpPr/>
+          <p:nvPr/>
+        </p:nvSpPr>
+        <p:spPr>
+          <a:xfrm>
+            <a:off x="4663440" y="2834640"/>
+            <a:ext cx="3108960" cy="411480"/>
+          </a:xfrm>
+          <a:prstGeom prst="rect">
+            <a:avLst/>
+          </a:prstGeom>
+          <a:noFill/>
+          <a:ln/>
+        </p:spPr>
+        <p:txBody>
+          <a:bodyPr wrap="square" lIns="0" tIns="0" rIns="0" bIns="0" rtlCol="0" anchor="ctr"/>
+          <a:lstStyle/>
+          <a:p>
+            <a:pPr marL="0" indent="0">
+              <a:buNone/>
+            </a:pPr>
+            <a:r>
+              <a:rPr lang="en-US" sz="1800" b="1" dirty="0">
+                <a:solidFill>
+                  <a:srgbClr val="121B3A"/>
+                </a:solidFill>
+                <a:latin typeface="Calibri" pitchFamily="34" charset="0"/>
+                <a:ea typeface="Calibri" pitchFamily="34" charset="-122"/>
+                <a:cs typeface="Calibri" pitchFamily="34" charset="-120"/>
+              </a:rPr>
+              <a:t>Confidencialidad</a:t>
+            </a:r>
+            <a:endParaRPr lang="en-US" sz="1800" dirty="0"/>
+          </a:p>
+        </p:txBody>
+      </p:sp>
+      <p:sp>
+        <p:nvSpPr>
+          <p:cNvPr id="15" name="Text 11"/>
+          <p:cNvSpPr/>
+          <p:nvPr/>
+        </p:nvSpPr>
+        <p:spPr>
+          <a:xfrm>
+            <a:off x="4663440" y="3291840"/>
+            <a:ext cx="3108960" cy="1371600"/>
+          </a:xfrm>
+          <a:prstGeom prst="rect">
+            <a:avLst/>
+          </a:prstGeom>
+          <a:noFill/>
+          <a:ln/>
+        </p:spPr>
+        <p:txBody>
+          <a:bodyPr wrap="square" lIns="0" tIns="0" rIns="0" bIns="0" rtlCol="0" anchor="t"/>
+          <a:lstStyle/>
+          <a:p>
+            <a:pPr marL="0" indent="0">
+              <a:buNone/>
+            </a:pPr>
+            <a:r>
+              <a:rPr lang="en-US" sz="1300" dirty="0">
+                <a:solidFill>
+                  <a:srgbClr val="1A1A1A"/>
+                </a:solidFill>
+                <a:latin typeface="Calibri" pitchFamily="34" charset="0"/>
+                <a:ea typeface="Calibri" pitchFamily="34" charset="-122"/>
+                <a:cs typeface="Calibri" pitchFamily="34" charset="-120"/>
+              </a:rPr>
+              <a:t>Lo que escribes en una IA puede no ser privado, según la herramienta y configuración.</a:t>
+            </a:r>
+            <a:endParaRPr lang="en-US" sz="1300" dirty="0"/>
+          </a:p>
+        </p:txBody>
+      </p:sp>
+      <p:sp>
+        <p:nvSpPr>
+          <p:cNvPr id="16" name="Shape 12"/>
+          <p:cNvSpPr/>
+          <p:nvPr/>
+        </p:nvSpPr>
+        <p:spPr>
+          <a:xfrm>
+            <a:off x="4663440" y="4800600"/>
+            <a:ext cx="3108960" cy="9144"/>
+          </a:xfrm>
+          <a:prstGeom prst="rect">
+            <a:avLst/>
+          </a:prstGeom>
+          <a:solidFill>
+            <a:srgbClr val="E5E5EA"/>
+          </a:solidFill>
+          <a:ln/>
+        </p:spPr>
+        <p:txBody>
+          <a:bodyPr/>
+          <a:lstStyle/>
+          <a:p>
+            <a:endParaRPr lang="es-PE"/>
+          </a:p>
+        </p:txBody>
+      </p:sp>
+      <p:sp>
+        <p:nvSpPr>
+          <p:cNvPr id="17" name="Text 13"/>
+          <p:cNvSpPr/>
+          <p:nvPr/>
+        </p:nvSpPr>
+        <p:spPr>
+          <a:xfrm>
+            <a:off x="4663440" y="4937760"/>
+            <a:ext cx="3108960" cy="1005840"/>
+          </a:xfrm>
+          <a:prstGeom prst="rect">
+            <a:avLst/>
+          </a:prstGeom>
+          <a:noFill/>
+          <a:ln/>
+        </p:spPr>
+        <p:txBody>
+          <a:bodyPr wrap="square" lIns="0" tIns="0" rIns="0" bIns="0" rtlCol="0" anchor="t"/>
+          <a:lstStyle/>
+          <a:p>
+            <a:pPr marL="0" indent="0">
+              <a:buNone/>
+            </a:pPr>
+            <a:r>
+              <a:rPr lang="en-US" sz="1200" i="1" dirty="0">
+                <a:solidFill>
+                  <a:srgbClr val="1E2D6B"/>
+                </a:solidFill>
+                <a:latin typeface="Calibri" pitchFamily="34" charset="0"/>
+                <a:ea typeface="Calibri" pitchFamily="34" charset="-122"/>
+                <a:cs typeface="Calibri" pitchFamily="34" charset="-120"/>
+              </a:rPr>
+              <a:t>Regla EEA: nunca compartir datos personales completos de alumnos, finanzas internas, ni contraseñas.</a:t>
+            </a:r>
+            <a:endParaRPr lang="en-US" sz="1200" dirty="0"/>
+          </a:p>
+        </p:txBody>
+      </p:sp>
+      <p:sp>
+        <p:nvSpPr>
+          <p:cNvPr id="18" name="Shape 14"/>
+          <p:cNvSpPr/>
+          <p:nvPr/>
+        </p:nvSpPr>
+        <p:spPr>
+          <a:xfrm>
+            <a:off x="8229600" y="1737360"/>
+            <a:ext cx="3657600" cy="4297680"/>
+          </a:xfrm>
+          <a:prstGeom prst="roundRect">
+            <a:avLst>
+              <a:gd name="adj" fmla="val 2000"/>
+            </a:avLst>
+          </a:prstGeom>
+          <a:solidFill>
+            <a:srgbClr val="F2F3F7"/>
+          </a:solidFill>
+          <a:ln/>
+        </p:spPr>
+        <p:txBody>
+          <a:bodyPr/>
+          <a:lstStyle/>
+          <a:p>
+            <a:endParaRPr lang="es-PE"/>
+          </a:p>
+        </p:txBody>
+      </p:sp>
+      <p:sp>
+        <p:nvSpPr>
+          <p:cNvPr id="19" name="Shape 15"/>
+          <p:cNvSpPr/>
+          <p:nvPr/>
+        </p:nvSpPr>
+        <p:spPr>
+          <a:xfrm>
+            <a:off x="8503920" y="2011680"/>
+            <a:ext cx="640080" cy="640080"/>
+          </a:xfrm>
+          <a:prstGeom prst="ellipse">
+            <a:avLst/>
+          </a:prstGeom>
+          <a:solidFill>
+            <a:srgbClr val="FFFFFF"/>
+          </a:solidFill>
+          <a:ln/>
+        </p:spPr>
+        <p:txBody>
+          <a:bodyPr/>
+          <a:lstStyle/>
+          <a:p>
+            <a:endParaRPr lang="es-PE"/>
+          </a:p>
+        </p:txBody>
+      </p:sp>
+      <p:pic>
+        <p:nvPicPr>
+          <p:cNvPr id="20" name="Image 2" descr="preencoded.png"/>
+          <p:cNvPicPr>
+            <a:picLocks noChangeAspect="1"/>
+          </p:cNvPicPr>
+          <p:nvPr/>
+        </p:nvPicPr>
+        <p:blipFill>
+          <a:blip r:embed="rId5"/>
+          <a:stretch>
+            <a:fillRect/>
+          </a:stretch>
+        </p:blipFill>
+        <p:spPr>
+          <a:xfrm>
+            <a:off x="8668512" y="2176272"/>
+            <a:ext cx="310896" cy="310896"/>
+          </a:xfrm>
+          <a:prstGeom prst="rect">
+            <a:avLst/>
+          </a:prstGeom>
+        </p:spPr>
+      </p:pic>
+      <p:sp>
+        <p:nvSpPr>
+          <p:cNvPr id="21" name="Text 16"/>
+          <p:cNvSpPr/>
+          <p:nvPr/>
+        </p:nvSpPr>
+        <p:spPr>
+          <a:xfrm>
+            <a:off x="8503920" y="2834640"/>
+            <a:ext cx="3108960" cy="411480"/>
+          </a:xfrm>
+          <a:prstGeom prst="rect">
+            <a:avLst/>
+          </a:prstGeom>
+          <a:noFill/>
+          <a:ln/>
+        </p:spPr>
+        <p:txBody>
+          <a:bodyPr wrap="square" lIns="0" tIns="0" rIns="0" bIns="0" rtlCol="0" anchor="ctr"/>
+          <a:lstStyle/>
+          <a:p>
+            <a:pPr marL="0" indent="0">
+              <a:buNone/>
+            </a:pPr>
+            <a:r>
+              <a:rPr lang="en-US" sz="1800" b="1" dirty="0">
+                <a:solidFill>
+                  <a:srgbClr val="121B3A"/>
+                </a:solidFill>
+                <a:latin typeface="Calibri" pitchFamily="34" charset="0"/>
+                <a:ea typeface="Calibri" pitchFamily="34" charset="-122"/>
+                <a:cs typeface="Calibri" pitchFamily="34" charset="-120"/>
+              </a:rPr>
+              <a:t>Dependencia</a:t>
+            </a:r>
+            <a:endParaRPr lang="en-US" sz="1800" dirty="0"/>
+          </a:p>
+        </p:txBody>
+      </p:sp>
+      <p:sp>
+        <p:nvSpPr>
+          <p:cNvPr id="22" name="Text 17"/>
+          <p:cNvSpPr/>
+          <p:nvPr/>
+        </p:nvSpPr>
+        <p:spPr>
+          <a:xfrm>
+            <a:off x="8503920" y="3291840"/>
+            <a:ext cx="3108960" cy="1371600"/>
+          </a:xfrm>
+          <a:prstGeom prst="rect">
+            <a:avLst/>
+          </a:prstGeom>
+          <a:noFill/>
+          <a:ln/>
+        </p:spPr>
+        <p:txBody>
+          <a:bodyPr wrap="square" lIns="0" tIns="0" rIns="0" bIns="0" rtlCol="0" anchor="t"/>
+          <a:lstStyle/>
+          <a:p>
+            <a:pPr marL="0" indent="0">
+              <a:buNone/>
+            </a:pPr>
+            <a:r>
+              <a:rPr lang="en-US" sz="1300" dirty="0">
+                <a:solidFill>
+                  <a:srgbClr val="1A1A1A"/>
+                </a:solidFill>
+                <a:latin typeface="Calibri" pitchFamily="34" charset="0"/>
+                <a:ea typeface="Calibri" pitchFamily="34" charset="-122"/>
+                <a:cs typeface="Calibri" pitchFamily="34" charset="-120"/>
+              </a:rPr>
+              <a:t>La IA acelera, no reemplaza el criterio. Si no puedes explicar lo que generó, no lo envíes tal cual.</a:t>
+            </a:r>
+            <a:endParaRPr lang="en-US" sz="1300" dirty="0"/>
+          </a:p>
+        </p:txBody>
+      </p:sp>
+      <p:sp>
+        <p:nvSpPr>
+          <p:cNvPr id="23" name="Shape 18"/>
+          <p:cNvSpPr/>
+          <p:nvPr/>
+        </p:nvSpPr>
+        <p:spPr>
+          <a:xfrm>
+            <a:off x="8503920" y="4800600"/>
+            <a:ext cx="3108960" cy="9144"/>
+          </a:xfrm>
+          <a:prstGeom prst="rect">
+            <a:avLst/>
+          </a:prstGeom>
+          <a:solidFill>
+            <a:srgbClr val="E5E5EA"/>
+          </a:solidFill>
+          <a:ln/>
+        </p:spPr>
+        <p:txBody>
+          <a:bodyPr/>
+          <a:lstStyle/>
+          <a:p>
+            <a:endParaRPr lang="es-PE"/>
+          </a:p>
+        </p:txBody>
       </p:sp>
       <p:sp>
         <p:nvSpPr>
@@ -3444,7 +3521,7 @@
           <a:bodyPr wrap="square" lIns="0" tIns="0" rIns="0" bIns="0" rtlCol="0" anchor="t"/>
           <a:lstStyle/>
           <a:p>
-            <a:pPr indent="0" marL="0">
+            <a:pPr marL="0" indent="0">
               <a:buNone/>
             </a:pPr>
             <a:r>
@@ -3478,6 +3555,7 @@
         <a:solidFill>
           <a:srgbClr val="121B3A"/>
         </a:solidFill>
+        <a:effectLst/>
       </p:bgPr>
     </p:bg>
     <p:spTree>
@@ -3515,11 +3593,11 @@
           <a:bodyPr wrap="square" lIns="0" tIns="0" rIns="0" bIns="0" rtlCol="0" anchor="ctr"/>
           <a:lstStyle/>
           <a:p>
-            <a:pPr indent="0" marL="0">
-              <a:buNone/>
-            </a:pPr>
-            <a:r>
-              <a:rPr lang="en-US" sz="1300" b="1" spc="200" kern="0" dirty="0">
+            <a:pPr marL="0" indent="0">
+              <a:buNone/>
+            </a:pPr>
+            <a:r>
+              <a:rPr lang="en-US" sz="1300" b="1" kern="0" spc="200" dirty="0">
                 <a:solidFill>
                   <a:srgbClr val="F5C842"/>
                 </a:solidFill>
@@ -3554,7 +3632,7 @@
           <a:bodyPr wrap="square" lIns="0" tIns="0" rIns="0" bIns="0" rtlCol="0" anchor="ctr"/>
           <a:lstStyle/>
           <a:p>
-            <a:pPr indent="0" marL="0">
+            <a:pPr marL="0" indent="0">
               <a:buNone/>
             </a:pPr>
             <a:r>
@@ -3593,6 +3671,13 @@
           </a:solidFill>
           <a:ln/>
         </p:spPr>
+        <p:txBody>
+          <a:bodyPr/>
+          <a:lstStyle/>
+          <a:p>
+            <a:endParaRPr lang="es-PE"/>
+          </a:p>
+        </p:txBody>
       </p:sp>
       <p:pic>
         <p:nvPicPr>
@@ -3603,7 +3688,7 @@
           <p:nvPr/>
         </p:nvPicPr>
         <p:blipFill>
-          <a:blip r:embed="rId1"/>
+          <a:blip r:embed="rId3"/>
           <a:stretch>
             <a:fillRect/>
           </a:stretch>
@@ -3639,7 +3724,7 @@
           <a:bodyPr wrap="square" lIns="0" tIns="0" rIns="0" bIns="0" rtlCol="0" anchor="ctr"/>
           <a:lstStyle/>
           <a:p>
-            <a:pPr indent="0" marL="0">
+            <a:pPr marL="0" indent="0">
               <a:buNone/>
             </a:pPr>
             <a:r>
@@ -3678,7 +3763,7 @@
           <a:bodyPr wrap="square" lIns="0" tIns="0" rIns="0" bIns="0" rtlCol="0" anchor="t"/>
           <a:lstStyle/>
           <a:p>
-            <a:pPr indent="0" marL="0">
+            <a:pPr marL="0" indent="0">
               <a:buNone/>
             </a:pPr>
             <a:r>
@@ -3717,6 +3802,13 @@
           </a:solidFill>
           <a:ln/>
         </p:spPr>
+        <p:txBody>
+          <a:bodyPr/>
+          <a:lstStyle/>
+          <a:p>
+            <a:endParaRPr lang="es-PE"/>
+          </a:p>
+        </p:txBody>
       </p:sp>
       <p:sp>
         <p:nvSpPr>
@@ -3739,7 +3831,7 @@
           <a:bodyPr wrap="square" lIns="0" tIns="0" rIns="0" bIns="0" rtlCol="0" anchor="ctr"/>
           <a:lstStyle/>
           <a:p>
-            <a:pPr indent="0" marL="0">
+            <a:pPr marL="0" indent="0">
               <a:buNone/>
             </a:pPr>
             <a:r>
@@ -3778,7 +3870,7 @@
           <a:bodyPr wrap="square" lIns="0" tIns="0" rIns="0" bIns="0" rtlCol="0" anchor="t"/>
           <a:lstStyle/>
           <a:p>
-            <a:pPr indent="0" marL="0">
+            <a:pPr marL="0" indent="0">
               <a:buNone/>
             </a:pPr>
             <a:r>
@@ -3817,11 +3909,11 @@
           <a:bodyPr wrap="square" lIns="0" tIns="0" rIns="0" bIns="0" rtlCol="0" anchor="ctr"/>
           <a:lstStyle/>
           <a:p>
-            <a:pPr indent="0" marL="0">
-              <a:buNone/>
-            </a:pPr>
-            <a:r>
-              <a:rPr lang="en-US" sz="1600" b="1" spc="150" kern="0" dirty="0">
+            <a:pPr marL="0" indent="0">
+              <a:buNone/>
+            </a:pPr>
+            <a:r>
+              <a:rPr lang="en-US" sz="1600" b="1" kern="0" spc="150" dirty="0">
                 <a:solidFill>
                   <a:srgbClr val="F5C842"/>
                 </a:solidFill>
@@ -3856,6 +3948,13 @@
           </a:solidFill>
           <a:ln/>
         </p:spPr>
+        <p:txBody>
+          <a:bodyPr/>
+          <a:lstStyle/>
+          <a:p>
+            <a:endParaRPr lang="es-PE"/>
+          </a:p>
+        </p:txBody>
       </p:sp>
       <p:sp>
         <p:nvSpPr>
@@ -3878,7 +3977,7 @@
           <a:bodyPr wrap="square" lIns="0" tIns="0" rIns="0" bIns="0" rtlCol="0" anchor="ctr"/>
           <a:lstStyle/>
           <a:p>
-            <a:pPr indent="0" marL="0">
+            <a:pPr marL="0" indent="0">
               <a:buNone/>
             </a:pPr>
             <a:r>
@@ -3917,7 +4016,7 @@
           <a:bodyPr wrap="square" lIns="0" tIns="0" rIns="0" bIns="0" rtlCol="0" anchor="ctr"/>
           <a:lstStyle/>
           <a:p>
-            <a:pPr indent="0" marL="0">
+            <a:pPr marL="0" indent="0">
               <a:buNone/>
             </a:pPr>
             <a:r>
@@ -3956,7 +4055,7 @@
           <a:bodyPr wrap="square" lIns="0" tIns="0" rIns="0" bIns="0" rtlCol="0" anchor="t"/>
           <a:lstStyle/>
           <a:p>
-            <a:pPr indent="0" marL="0">
+            <a:pPr marL="0" indent="0">
               <a:buNone/>
             </a:pPr>
             <a:r>
@@ -3995,6 +4094,13 @@
           </a:solidFill>
           <a:ln/>
         </p:spPr>
+        <p:txBody>
+          <a:bodyPr/>
+          <a:lstStyle/>
+          <a:p>
+            <a:endParaRPr lang="es-PE"/>
+          </a:p>
+        </p:txBody>
       </p:sp>
       <p:sp>
         <p:nvSpPr>
@@ -4017,7 +4123,7 @@
           <a:bodyPr wrap="square" lIns="0" tIns="0" rIns="0" bIns="0" rtlCol="0" anchor="ctr"/>
           <a:lstStyle/>
           <a:p>
-            <a:pPr indent="0" marL="0">
+            <a:pPr marL="0" indent="0">
               <a:buNone/>
             </a:pPr>
             <a:r>
@@ -4056,7 +4162,7 @@
           <a:bodyPr wrap="square" lIns="0" tIns="0" rIns="0" bIns="0" rtlCol="0" anchor="ctr"/>
           <a:lstStyle/>
           <a:p>
-            <a:pPr indent="0" marL="0">
+            <a:pPr marL="0" indent="0">
               <a:buNone/>
             </a:pPr>
             <a:r>
@@ -4095,7 +4201,7 @@
           <a:bodyPr wrap="square" lIns="0" tIns="0" rIns="0" bIns="0" rtlCol="0" anchor="t"/>
           <a:lstStyle/>
           <a:p>
-            <a:pPr indent="0" marL="0">
+            <a:pPr marL="0" indent="0">
               <a:buNone/>
             </a:pPr>
             <a:r>
@@ -4134,6 +4240,13 @@
           </a:solidFill>
           <a:ln/>
         </p:spPr>
+        <p:txBody>
+          <a:bodyPr/>
+          <a:lstStyle/>
+          <a:p>
+            <a:endParaRPr lang="es-PE"/>
+          </a:p>
+        </p:txBody>
       </p:sp>
       <p:sp>
         <p:nvSpPr>
@@ -4156,7 +4269,7 @@
           <a:bodyPr wrap="square" lIns="0" tIns="0" rIns="0" bIns="0" rtlCol="0" anchor="ctr"/>
           <a:lstStyle/>
           <a:p>
-            <a:pPr indent="0" marL="0">
+            <a:pPr marL="0" indent="0">
               <a:buNone/>
             </a:pPr>
             <a:r>
@@ -4195,7 +4308,7 @@
           <a:bodyPr wrap="square" lIns="0" tIns="0" rIns="0" bIns="0" rtlCol="0" anchor="ctr"/>
           <a:lstStyle/>
           <a:p>
-            <a:pPr indent="0" marL="0">
+            <a:pPr marL="0" indent="0">
               <a:buNone/>
             </a:pPr>
             <a:r>
@@ -4234,7 +4347,7 @@
           <a:bodyPr wrap="square" lIns="0" tIns="0" rIns="0" bIns="0" rtlCol="0" anchor="t"/>
           <a:lstStyle/>
           <a:p>
-            <a:pPr indent="0" marL="0">
+            <a:pPr marL="0" indent="0">
               <a:buNone/>
             </a:pPr>
             <a:r>
@@ -4273,7 +4386,7 @@
           <a:bodyPr wrap="square" lIns="0" tIns="0" rIns="0" bIns="0" rtlCol="0" anchor="ctr"/>
           <a:lstStyle/>
           <a:p>
-            <a:pPr indent="0" marL="0">
+            <a:pPr marL="0" indent="0">
               <a:buNone/>
             </a:pPr>
             <a:r>
@@ -4307,6 +4420,7 @@
         <a:solidFill>
           <a:srgbClr val="FFFFFF"/>
         </a:solidFill>
+        <a:effectLst/>
       </p:bgPr>
     </p:bg>
     <p:spTree>
@@ -4344,11 +4458,11 @@
           <a:bodyPr wrap="square" lIns="0" tIns="0" rIns="0" bIns="0" rtlCol="0" anchor="ctr"/>
           <a:lstStyle/>
           <a:p>
-            <a:pPr indent="0" marL="0">
-              <a:buNone/>
-            </a:pPr>
-            <a:r>
-              <a:rPr lang="en-US" sz="1300" b="1" spc="200" kern="0" dirty="0">
+            <a:pPr marL="0" indent="0">
+              <a:buNone/>
+            </a:pPr>
+            <a:r>
+              <a:rPr lang="en-US" sz="1300" b="1" kern="0" spc="200" dirty="0">
                 <a:solidFill>
                   <a:srgbClr val="F5C842"/>
                 </a:solidFill>
@@ -4383,7 +4497,7 @@
           <a:bodyPr wrap="square" lIns="0" tIns="0" rIns="0" bIns="0" rtlCol="0" anchor="ctr"/>
           <a:lstStyle/>
           <a:p>
-            <a:pPr indent="0" marL="0">
+            <a:pPr marL="0" indent="0">
               <a:buNone/>
             </a:pPr>
             <a:r>
@@ -4420,332 +4534,17 @@
           </a:solidFill>
           <a:ln/>
         </p:spPr>
+        <p:txBody>
+          <a:bodyPr/>
+          <a:lstStyle/>
+          <a:p>
+            <a:endParaRPr lang="es-PE"/>
+          </a:p>
+        </p:txBody>
       </p:sp>
       <p:pic>
         <p:nvPicPr>
           <p:cNvPr id="5" name="Image 0" descr="preencoded.png"/>
-          <p:cNvPicPr>
-            <a:picLocks noChangeAspect="1"/>
-          </p:cNvPicPr>
-          <p:nvPr/>
-        </p:nvPicPr>
-        <p:blipFill>
-          <a:blip r:embed="rId1"/>
-          <a:stretch>
-            <a:fillRect/>
-          </a:stretch>
-        </p:blipFill>
-        <p:spPr>
-          <a:xfrm>
-            <a:off x="777240" y="1965960"/>
-            <a:ext cx="274320" cy="274320"/>
-          </a:xfrm>
-          <a:prstGeom prst="rect">
-            <a:avLst/>
-          </a:prstGeom>
-        </p:spPr>
-      </p:pic>
-      <p:sp>
-        <p:nvSpPr>
-          <p:cNvPr id="6" name="Text 3"/>
-          <p:cNvSpPr/>
-          <p:nvPr/>
-        </p:nvSpPr>
-        <p:spPr>
-          <a:xfrm>
-            <a:off x="1371600" y="1783080"/>
-            <a:ext cx="7315200" cy="365760"/>
-          </a:xfrm>
-          <a:prstGeom prst="rect">
-            <a:avLst/>
-          </a:prstGeom>
-          <a:noFill/>
-          <a:ln/>
-        </p:spPr>
-        <p:txBody>
-          <a:bodyPr wrap="square" lIns="0" tIns="0" rIns="0" bIns="0" rtlCol="0" anchor="ctr"/>
-          <a:lstStyle/>
-          <a:p>
-            <a:pPr indent="0" marL="0">
-              <a:buNone/>
-            </a:pPr>
-            <a:r>
-              <a:rPr lang="en-US" sz="1700" b="1" dirty="0">
-                <a:solidFill>
-                  <a:srgbClr val="121B3A"/>
-                </a:solidFill>
-                <a:latin typeface="Calibri" pitchFamily="34" charset="0"/>
-                <a:ea typeface="Calibri" pitchFamily="34" charset="-122"/>
-                <a:cs typeface="Calibri" pitchFamily="34" charset="-120"/>
-              </a:rPr>
-              <a:t>Apertura — Mentimeter</a:t>
-            </a:r>
-            <a:endParaRPr lang="en-US" sz="1700" dirty="0"/>
-          </a:p>
-        </p:txBody>
-      </p:sp>
-      <p:sp>
-        <p:nvSpPr>
-          <p:cNvPr id="7" name="Text 4"/>
-          <p:cNvSpPr/>
-          <p:nvPr/>
-        </p:nvSpPr>
-        <p:spPr>
-          <a:xfrm>
-            <a:off x="1371600" y="2148840"/>
-            <a:ext cx="7772400" cy="365760"/>
-          </a:xfrm>
-          <a:prstGeom prst="rect">
-            <a:avLst/>
-          </a:prstGeom>
-          <a:noFill/>
-          <a:ln/>
-        </p:spPr>
-        <p:txBody>
-          <a:bodyPr wrap="square" lIns="0" tIns="0" rIns="0" bIns="0" rtlCol="0" anchor="ctr"/>
-          <a:lstStyle/>
-          <a:p>
-            <a:pPr indent="0" marL="0">
-              <a:buNone/>
-            </a:pPr>
-            <a:r>
-              <a:rPr lang="en-US" sz="1250" dirty="0">
-                <a:solidFill>
-                  <a:srgbClr val="5A5F73"/>
-                </a:solidFill>
-                <a:latin typeface="Calibri" pitchFamily="34" charset="0"/>
-                <a:ea typeface="Calibri" pitchFamily="34" charset="-122"/>
-                <a:cs typeface="Calibri" pitchFamily="34" charset="-120"/>
-              </a:rPr>
-              <a:t>Encuesta de encuadre: tu punto de partida con la IA</a:t>
-            </a:r>
-            <a:endParaRPr lang="en-US" sz="1250" dirty="0"/>
-          </a:p>
-        </p:txBody>
-      </p:sp>
-      <p:sp>
-        <p:nvSpPr>
-          <p:cNvPr id="8" name="Text 5"/>
-          <p:cNvSpPr/>
-          <p:nvPr/>
-        </p:nvSpPr>
-        <p:spPr>
-          <a:xfrm>
-            <a:off x="9418320" y="1874520"/>
-            <a:ext cx="2103120" cy="457200"/>
-          </a:xfrm>
-          <a:prstGeom prst="rect">
-            <a:avLst/>
-          </a:prstGeom>
-          <a:noFill/>
-          <a:ln/>
-        </p:spPr>
-        <p:txBody>
-          <a:bodyPr wrap="square" lIns="0" tIns="0" rIns="0" bIns="0" rtlCol="0" anchor="ctr"/>
-          <a:lstStyle/>
-          <a:p>
-            <a:pPr algn="r" indent="0" marL="0">
-              <a:buNone/>
-            </a:pPr>
-            <a:r>
-              <a:rPr lang="en-US" sz="1400" b="1" dirty="0">
-                <a:solidFill>
-                  <a:srgbClr val="1E2D6B"/>
-                </a:solidFill>
-                <a:latin typeface="Calibri" pitchFamily="34" charset="0"/>
-                <a:ea typeface="Calibri" pitchFamily="34" charset="-122"/>
-                <a:cs typeface="Calibri" pitchFamily="34" charset="-120"/>
-              </a:rPr>
-              <a:t>10 min</a:t>
-            </a:r>
-            <a:endParaRPr lang="en-US" sz="1400" dirty="0"/>
-          </a:p>
-        </p:txBody>
-      </p:sp>
-      <p:sp>
-        <p:nvSpPr>
-          <p:cNvPr id="9" name="Shape 6"/>
-          <p:cNvSpPr/>
-          <p:nvPr/>
-        </p:nvSpPr>
-        <p:spPr>
-          <a:xfrm>
-            <a:off x="640080" y="2743200"/>
-            <a:ext cx="548640" cy="548640"/>
-          </a:xfrm>
-          <a:prstGeom prst="ellipse">
-            <a:avLst/>
-          </a:prstGeom>
-          <a:solidFill>
-            <a:srgbClr val="F2F3F7"/>
-          </a:solidFill>
-          <a:ln/>
-        </p:spPr>
-      </p:sp>
-      <p:pic>
-        <p:nvPicPr>
-          <p:cNvPr id="10" name="Image 1" descr="preencoded.png"/>
-          <p:cNvPicPr>
-            <a:picLocks noChangeAspect="1"/>
-          </p:cNvPicPr>
-          <p:nvPr/>
-        </p:nvPicPr>
-        <p:blipFill>
-          <a:blip r:embed="rId2"/>
-          <a:stretch>
-            <a:fillRect/>
-          </a:stretch>
-        </p:blipFill>
-        <p:spPr>
-          <a:xfrm>
-            <a:off x="777240" y="2880360"/>
-            <a:ext cx="274320" cy="274320"/>
-          </a:xfrm>
-          <a:prstGeom prst="rect">
-            <a:avLst/>
-          </a:prstGeom>
-        </p:spPr>
-      </p:pic>
-      <p:sp>
-        <p:nvSpPr>
-          <p:cNvPr id="11" name="Text 7"/>
-          <p:cNvSpPr/>
-          <p:nvPr/>
-        </p:nvSpPr>
-        <p:spPr>
-          <a:xfrm>
-            <a:off x="1371600" y="2697480"/>
-            <a:ext cx="7315200" cy="365760"/>
-          </a:xfrm>
-          <a:prstGeom prst="rect">
-            <a:avLst/>
-          </a:prstGeom>
-          <a:noFill/>
-          <a:ln/>
-        </p:spPr>
-        <p:txBody>
-          <a:bodyPr wrap="square" lIns="0" tIns="0" rIns="0" bIns="0" rtlCol="0" anchor="ctr"/>
-          <a:lstStyle/>
-          <a:p>
-            <a:pPr indent="0" marL="0">
-              <a:buNone/>
-            </a:pPr>
-            <a:r>
-              <a:rPr lang="en-US" sz="1700" b="1" dirty="0">
-                <a:solidFill>
-                  <a:srgbClr val="121B3A"/>
-                </a:solidFill>
-                <a:latin typeface="Calibri" pitchFamily="34" charset="0"/>
-                <a:ea typeface="Calibri" pitchFamily="34" charset="-122"/>
-                <a:cs typeface="Calibri" pitchFamily="34" charset="-120"/>
-              </a:rPr>
-              <a:t>¿Qué es la IA generativa?</a:t>
-            </a:r>
-            <a:endParaRPr lang="en-US" sz="1700" dirty="0"/>
-          </a:p>
-        </p:txBody>
-      </p:sp>
-      <p:sp>
-        <p:nvSpPr>
-          <p:cNvPr id="12" name="Text 8"/>
-          <p:cNvSpPr/>
-          <p:nvPr/>
-        </p:nvSpPr>
-        <p:spPr>
-          <a:xfrm>
-            <a:off x="1371600" y="3063240"/>
-            <a:ext cx="7772400" cy="365760"/>
-          </a:xfrm>
-          <a:prstGeom prst="rect">
-            <a:avLst/>
-          </a:prstGeom>
-          <a:noFill/>
-          <a:ln/>
-        </p:spPr>
-        <p:txBody>
-          <a:bodyPr wrap="square" lIns="0" tIns="0" rIns="0" bIns="0" rtlCol="0" anchor="ctr"/>
-          <a:lstStyle/>
-          <a:p>
-            <a:pPr indent="0" marL="0">
-              <a:buNone/>
-            </a:pPr>
-            <a:r>
-              <a:rPr lang="en-US" sz="1250" dirty="0">
-                <a:solidFill>
-                  <a:srgbClr val="5A5F73"/>
-                </a:solidFill>
-                <a:latin typeface="Calibri" pitchFamily="34" charset="0"/>
-                <a:ea typeface="Calibri" pitchFamily="34" charset="-122"/>
-                <a:cs typeface="Calibri" pitchFamily="34" charset="-120"/>
-              </a:rPr>
-              <a:t>Idea central, analogía y roles que puede cumplir la IA</a:t>
-            </a:r>
-            <a:endParaRPr lang="en-US" sz="1250" dirty="0"/>
-          </a:p>
-        </p:txBody>
-      </p:sp>
-      <p:sp>
-        <p:nvSpPr>
-          <p:cNvPr id="13" name="Text 9"/>
-          <p:cNvSpPr/>
-          <p:nvPr/>
-        </p:nvSpPr>
-        <p:spPr>
-          <a:xfrm>
-            <a:off x="9418320" y="2788920"/>
-            <a:ext cx="2103120" cy="457200"/>
-          </a:xfrm>
-          <a:prstGeom prst="rect">
-            <a:avLst/>
-          </a:prstGeom>
-          <a:noFill/>
-          <a:ln/>
-        </p:spPr>
-        <p:txBody>
-          <a:bodyPr wrap="square" lIns="0" tIns="0" rIns="0" bIns="0" rtlCol="0" anchor="ctr"/>
-          <a:lstStyle/>
-          <a:p>
-            <a:pPr algn="r" indent="0" marL="0">
-              <a:buNone/>
-            </a:pPr>
-            <a:r>
-              <a:rPr lang="en-US" sz="1400" b="1" dirty="0">
-                <a:solidFill>
-                  <a:srgbClr val="1E2D6B"/>
-                </a:solidFill>
-                <a:latin typeface="Calibri" pitchFamily="34" charset="0"/>
-                <a:ea typeface="Calibri" pitchFamily="34" charset="-122"/>
-                <a:cs typeface="Calibri" pitchFamily="34" charset="-120"/>
-              </a:rPr>
-              <a:t>25 min</a:t>
-            </a:r>
-            <a:endParaRPr lang="en-US" sz="1400" dirty="0"/>
-          </a:p>
-        </p:txBody>
-      </p:sp>
-      <p:sp>
-        <p:nvSpPr>
-          <p:cNvPr id="14" name="Shape 10"/>
-          <p:cNvSpPr/>
-          <p:nvPr/>
-        </p:nvSpPr>
-        <p:spPr>
-          <a:xfrm>
-            <a:off x="640080" y="3657600"/>
-            <a:ext cx="548640" cy="548640"/>
-          </a:xfrm>
-          <a:prstGeom prst="ellipse">
-            <a:avLst/>
-          </a:prstGeom>
-          <a:solidFill>
-            <a:srgbClr val="F2F3F7"/>
-          </a:solidFill>
-          <a:ln/>
-        </p:spPr>
-      </p:sp>
-      <p:pic>
-        <p:nvPicPr>
-          <p:cNvPr id="15" name="Image 2" descr="preencoded.png"/>
           <p:cNvPicPr>
             <a:picLocks noChangeAspect="1"/>
           </p:cNvPicPr>
@@ -4759,7 +4558,7 @@
         </p:blipFill>
         <p:spPr>
           <a:xfrm>
-            <a:off x="777240" y="3794760"/>
+            <a:off x="777240" y="1965960"/>
             <a:ext cx="274320" cy="274320"/>
           </a:xfrm>
           <a:prstGeom prst="rect">
@@ -4769,13 +4568,13 @@
       </p:pic>
       <p:sp>
         <p:nvSpPr>
-          <p:cNvPr id="16" name="Text 11"/>
-          <p:cNvSpPr/>
-          <p:nvPr/>
-        </p:nvSpPr>
-        <p:spPr>
-          <a:xfrm>
-            <a:off x="1371600" y="3611880"/>
+          <p:cNvPr id="6" name="Text 3"/>
+          <p:cNvSpPr/>
+          <p:nvPr/>
+        </p:nvSpPr>
+        <p:spPr>
+          <a:xfrm>
+            <a:off x="1371600" y="1783080"/>
             <a:ext cx="7315200" cy="365760"/>
           </a:xfrm>
           <a:prstGeom prst="rect">
@@ -4788,7 +4587,7 @@
           <a:bodyPr wrap="square" lIns="0" tIns="0" rIns="0" bIns="0" rtlCol="0" anchor="ctr"/>
           <a:lstStyle/>
           <a:p>
-            <a:pPr indent="0" marL="0">
+            <a:pPr marL="0" indent="0">
               <a:buNone/>
             </a:pPr>
             <a:r>
@@ -4800,7 +4599,7 @@
                 <a:ea typeface="Calibri" pitchFamily="34" charset="-122"/>
                 <a:cs typeface="Calibri" pitchFamily="34" charset="-120"/>
               </a:rPr>
-              <a:t>El arte del prompting — RITA</a:t>
+              <a:t>Apertura — Mentimeter</a:t>
             </a:r>
             <a:endParaRPr lang="en-US" sz="1700" dirty="0"/>
           </a:p>
@@ -4808,13 +4607,13 @@
       </p:sp>
       <p:sp>
         <p:nvSpPr>
-          <p:cNvPr id="17" name="Text 12"/>
-          <p:cNvSpPr/>
-          <p:nvPr/>
-        </p:nvSpPr>
-        <p:spPr>
-          <a:xfrm>
-            <a:off x="1371600" y="3977640"/>
+          <p:cNvPr id="7" name="Text 4"/>
+          <p:cNvSpPr/>
+          <p:nvPr/>
+        </p:nvSpPr>
+        <p:spPr>
+          <a:xfrm>
+            <a:off x="1371600" y="2148840"/>
             <a:ext cx="7772400" cy="365760"/>
           </a:xfrm>
           <a:prstGeom prst="rect">
@@ -4827,7 +4626,7 @@
           <a:bodyPr wrap="square" lIns="0" tIns="0" rIns="0" bIns="0" rtlCol="0" anchor="ctr"/>
           <a:lstStyle/>
           <a:p>
-            <a:pPr indent="0" marL="0">
+            <a:pPr marL="0" indent="0">
               <a:buNone/>
             </a:pPr>
             <a:r>
@@ -4839,7 +4638,7 @@
                 <a:ea typeface="Calibri" pitchFamily="34" charset="-122"/>
                 <a:cs typeface="Calibri" pitchFamily="34" charset="-120"/>
               </a:rPr>
-              <a:t>Rol, Interacción, Tarea, Adaptabilidad + ejercicio guiado</a:t>
+              <a:t>Encuesta de encuadre: tu punto de partida con la IA</a:t>
             </a:r>
             <a:endParaRPr lang="en-US" sz="1250" dirty="0"/>
           </a:p>
@@ -4847,13 +4646,13 @@
       </p:sp>
       <p:sp>
         <p:nvSpPr>
-          <p:cNvPr id="18" name="Text 13"/>
-          <p:cNvSpPr/>
-          <p:nvPr/>
-        </p:nvSpPr>
-        <p:spPr>
-          <a:xfrm>
-            <a:off x="9418320" y="3703320"/>
+          <p:cNvPr id="8" name="Text 5"/>
+          <p:cNvSpPr/>
+          <p:nvPr/>
+        </p:nvSpPr>
+        <p:spPr>
+          <a:xfrm>
+            <a:off x="9418320" y="1874520"/>
             <a:ext cx="2103120" cy="457200"/>
           </a:xfrm>
           <a:prstGeom prst="rect">
@@ -4866,7 +4665,7 @@
           <a:bodyPr wrap="square" lIns="0" tIns="0" rIns="0" bIns="0" rtlCol="0" anchor="ctr"/>
           <a:lstStyle/>
           <a:p>
-            <a:pPr algn="r" indent="0" marL="0">
+            <a:pPr marL="0" indent="0" algn="r">
               <a:buNone/>
             </a:pPr>
             <a:r>
@@ -4878,7 +4677,7 @@
                 <a:ea typeface="Calibri" pitchFamily="34" charset="-122"/>
                 <a:cs typeface="Calibri" pitchFamily="34" charset="-120"/>
               </a:rPr>
-              <a:t>45 min</a:t>
+              <a:t>10 min</a:t>
             </a:r>
             <a:endParaRPr lang="en-US" sz="1400" dirty="0"/>
           </a:p>
@@ -4886,13 +4685,13 @@
       </p:sp>
       <p:sp>
         <p:nvSpPr>
-          <p:cNvPr id="19" name="Shape 14"/>
-          <p:cNvSpPr/>
-          <p:nvPr/>
-        </p:nvSpPr>
-        <p:spPr>
-          <a:xfrm>
-            <a:off x="640080" y="4572000"/>
+          <p:cNvPr id="9" name="Shape 6"/>
+          <p:cNvSpPr/>
+          <p:nvPr/>
+        </p:nvSpPr>
+        <p:spPr>
+          <a:xfrm>
+            <a:off x="640080" y="2743200"/>
             <a:ext cx="548640" cy="548640"/>
           </a:xfrm>
           <a:prstGeom prst="ellipse">
@@ -4903,10 +4702,17 @@
           </a:solidFill>
           <a:ln/>
         </p:spPr>
+        <p:txBody>
+          <a:bodyPr/>
+          <a:lstStyle/>
+          <a:p>
+            <a:endParaRPr lang="es-PE"/>
+          </a:p>
+        </p:txBody>
       </p:sp>
       <p:pic>
         <p:nvPicPr>
-          <p:cNvPr id="20" name="Image 3" descr="preencoded.png"/>
+          <p:cNvPr id="10" name="Image 1" descr="preencoded.png"/>
           <p:cNvPicPr>
             <a:picLocks noChangeAspect="1"/>
           </p:cNvPicPr>
@@ -4920,7 +4726,7 @@
         </p:blipFill>
         <p:spPr>
           <a:xfrm>
-            <a:off x="777240" y="4709160"/>
+            <a:off x="777240" y="2880360"/>
             <a:ext cx="274320" cy="274320"/>
           </a:xfrm>
           <a:prstGeom prst="rect">
@@ -4930,13 +4736,13 @@
       </p:pic>
       <p:sp>
         <p:nvSpPr>
-          <p:cNvPr id="21" name="Text 15"/>
-          <p:cNvSpPr/>
-          <p:nvPr/>
-        </p:nvSpPr>
-        <p:spPr>
-          <a:xfrm>
-            <a:off x="1371600" y="4526280"/>
+          <p:cNvPr id="11" name="Text 7"/>
+          <p:cNvSpPr/>
+          <p:nvPr/>
+        </p:nvSpPr>
+        <p:spPr>
+          <a:xfrm>
+            <a:off x="1371600" y="2697480"/>
             <a:ext cx="7315200" cy="365760"/>
           </a:xfrm>
           <a:prstGeom prst="rect">
@@ -4949,7 +4755,7 @@
           <a:bodyPr wrap="square" lIns="0" tIns="0" rIns="0" bIns="0" rtlCol="0" anchor="ctr"/>
           <a:lstStyle/>
           <a:p>
-            <a:pPr indent="0" marL="0">
+            <a:pPr marL="0" indent="0">
               <a:buNone/>
             </a:pPr>
             <a:r>
@@ -4961,7 +4767,7 @@
                 <a:ea typeface="Calibri" pitchFamily="34" charset="-122"/>
                 <a:cs typeface="Calibri" pitchFamily="34" charset="-120"/>
               </a:rPr>
-              <a:t>Límites y riesgos</a:t>
+              <a:t>¿Qué es la IA generativa?</a:t>
             </a:r>
             <a:endParaRPr lang="en-US" sz="1700" dirty="0"/>
           </a:p>
@@ -4969,13 +4775,13 @@
       </p:sp>
       <p:sp>
         <p:nvSpPr>
-          <p:cNvPr id="22" name="Text 16"/>
-          <p:cNvSpPr/>
-          <p:nvPr/>
-        </p:nvSpPr>
-        <p:spPr>
-          <a:xfrm>
-            <a:off x="1371600" y="4892040"/>
+          <p:cNvPr id="12" name="Text 8"/>
+          <p:cNvSpPr/>
+          <p:nvPr/>
+        </p:nvSpPr>
+        <p:spPr>
+          <a:xfrm>
+            <a:off x="1371600" y="3063240"/>
             <a:ext cx="7772400" cy="365760"/>
           </a:xfrm>
           <a:prstGeom prst="rect">
@@ -4988,7 +4794,7 @@
           <a:bodyPr wrap="square" lIns="0" tIns="0" rIns="0" bIns="0" rtlCol="0" anchor="ctr"/>
           <a:lstStyle/>
           <a:p>
-            <a:pPr indent="0" marL="0">
+            <a:pPr marL="0" indent="0">
               <a:buNone/>
             </a:pPr>
             <a:r>
@@ -5000,7 +4806,7 @@
                 <a:ea typeface="Calibri" pitchFamily="34" charset="-122"/>
                 <a:cs typeface="Calibri" pitchFamily="34" charset="-120"/>
               </a:rPr>
-              <a:t>Alucinaciones, confidencialidad y criterio de uso</a:t>
+              <a:t>Idea central, analogía y roles que puede cumplir la IA</a:t>
             </a:r>
             <a:endParaRPr lang="en-US" sz="1250" dirty="0"/>
           </a:p>
@@ -5008,13 +4814,13 @@
       </p:sp>
       <p:sp>
         <p:nvSpPr>
-          <p:cNvPr id="23" name="Text 17"/>
-          <p:cNvSpPr/>
-          <p:nvPr/>
-        </p:nvSpPr>
-        <p:spPr>
-          <a:xfrm>
-            <a:off x="9418320" y="4617720"/>
+          <p:cNvPr id="13" name="Text 9"/>
+          <p:cNvSpPr/>
+          <p:nvPr/>
+        </p:nvSpPr>
+        <p:spPr>
+          <a:xfrm>
+            <a:off x="9418320" y="2788920"/>
             <a:ext cx="2103120" cy="457200"/>
           </a:xfrm>
           <a:prstGeom prst="rect">
@@ -5027,7 +4833,7 @@
           <a:bodyPr wrap="square" lIns="0" tIns="0" rIns="0" bIns="0" rtlCol="0" anchor="ctr"/>
           <a:lstStyle/>
           <a:p>
-            <a:pPr algn="r" indent="0" marL="0">
+            <a:pPr marL="0" indent="0" algn="r">
               <a:buNone/>
             </a:pPr>
             <a:r>
@@ -5047,13 +4853,13 @@
       </p:sp>
       <p:sp>
         <p:nvSpPr>
-          <p:cNvPr id="24" name="Shape 18"/>
-          <p:cNvSpPr/>
-          <p:nvPr/>
-        </p:nvSpPr>
-        <p:spPr>
-          <a:xfrm>
-            <a:off x="640080" y="5486400"/>
+          <p:cNvPr id="14" name="Shape 10"/>
+          <p:cNvSpPr/>
+          <p:nvPr/>
+        </p:nvSpPr>
+        <p:spPr>
+          <a:xfrm>
+            <a:off x="640080" y="3657600"/>
             <a:ext cx="548640" cy="548640"/>
           </a:xfrm>
           <a:prstGeom prst="ellipse">
@@ -5064,10 +4870,17 @@
           </a:solidFill>
           <a:ln/>
         </p:spPr>
+        <p:txBody>
+          <a:bodyPr/>
+          <a:lstStyle/>
+          <a:p>
+            <a:endParaRPr lang="es-PE"/>
+          </a:p>
+        </p:txBody>
       </p:sp>
       <p:pic>
         <p:nvPicPr>
-          <p:cNvPr id="25" name="Image 4" descr="preencoded.png"/>
+          <p:cNvPr id="15" name="Image 2" descr="preencoded.png"/>
           <p:cNvPicPr>
             <a:picLocks noChangeAspect="1"/>
           </p:cNvPicPr>
@@ -5081,6 +4894,342 @@
         </p:blipFill>
         <p:spPr>
           <a:xfrm>
+            <a:off x="777240" y="3794760"/>
+            <a:ext cx="274320" cy="274320"/>
+          </a:xfrm>
+          <a:prstGeom prst="rect">
+            <a:avLst/>
+          </a:prstGeom>
+        </p:spPr>
+      </p:pic>
+      <p:sp>
+        <p:nvSpPr>
+          <p:cNvPr id="16" name="Text 11"/>
+          <p:cNvSpPr/>
+          <p:nvPr/>
+        </p:nvSpPr>
+        <p:spPr>
+          <a:xfrm>
+            <a:off x="1371600" y="3611880"/>
+            <a:ext cx="7315200" cy="365760"/>
+          </a:xfrm>
+          <a:prstGeom prst="rect">
+            <a:avLst/>
+          </a:prstGeom>
+          <a:noFill/>
+          <a:ln/>
+        </p:spPr>
+        <p:txBody>
+          <a:bodyPr wrap="square" lIns="0" tIns="0" rIns="0" bIns="0" rtlCol="0" anchor="ctr"/>
+          <a:lstStyle/>
+          <a:p>
+            <a:pPr marL="0" indent="0">
+              <a:buNone/>
+            </a:pPr>
+            <a:r>
+              <a:rPr lang="en-US" sz="1700" b="1" dirty="0">
+                <a:solidFill>
+                  <a:srgbClr val="121B3A"/>
+                </a:solidFill>
+                <a:latin typeface="Calibri" pitchFamily="34" charset="0"/>
+                <a:ea typeface="Calibri" pitchFamily="34" charset="-122"/>
+                <a:cs typeface="Calibri" pitchFamily="34" charset="-120"/>
+              </a:rPr>
+              <a:t>El arte del prompting — RITA</a:t>
+            </a:r>
+            <a:endParaRPr lang="en-US" sz="1700" dirty="0"/>
+          </a:p>
+        </p:txBody>
+      </p:sp>
+      <p:sp>
+        <p:nvSpPr>
+          <p:cNvPr id="17" name="Text 12"/>
+          <p:cNvSpPr/>
+          <p:nvPr/>
+        </p:nvSpPr>
+        <p:spPr>
+          <a:xfrm>
+            <a:off x="1371600" y="3977640"/>
+            <a:ext cx="7772400" cy="365760"/>
+          </a:xfrm>
+          <a:prstGeom prst="rect">
+            <a:avLst/>
+          </a:prstGeom>
+          <a:noFill/>
+          <a:ln/>
+        </p:spPr>
+        <p:txBody>
+          <a:bodyPr wrap="square" lIns="0" tIns="0" rIns="0" bIns="0" rtlCol="0" anchor="ctr"/>
+          <a:lstStyle/>
+          <a:p>
+            <a:pPr marL="0" indent="0">
+              <a:buNone/>
+            </a:pPr>
+            <a:r>
+              <a:rPr lang="en-US" sz="1250" dirty="0">
+                <a:solidFill>
+                  <a:srgbClr val="5A5F73"/>
+                </a:solidFill>
+                <a:latin typeface="Calibri" pitchFamily="34" charset="0"/>
+                <a:ea typeface="Calibri" pitchFamily="34" charset="-122"/>
+                <a:cs typeface="Calibri" pitchFamily="34" charset="-120"/>
+              </a:rPr>
+              <a:t>Rol, Interacción, Tarea, Adaptabilidad + ejercicio guiado</a:t>
+            </a:r>
+            <a:endParaRPr lang="en-US" sz="1250" dirty="0"/>
+          </a:p>
+        </p:txBody>
+      </p:sp>
+      <p:sp>
+        <p:nvSpPr>
+          <p:cNvPr id="18" name="Text 13"/>
+          <p:cNvSpPr/>
+          <p:nvPr/>
+        </p:nvSpPr>
+        <p:spPr>
+          <a:xfrm>
+            <a:off x="9418320" y="3703320"/>
+            <a:ext cx="2103120" cy="457200"/>
+          </a:xfrm>
+          <a:prstGeom prst="rect">
+            <a:avLst/>
+          </a:prstGeom>
+          <a:noFill/>
+          <a:ln/>
+        </p:spPr>
+        <p:txBody>
+          <a:bodyPr wrap="square" lIns="0" tIns="0" rIns="0" bIns="0" rtlCol="0" anchor="ctr"/>
+          <a:lstStyle/>
+          <a:p>
+            <a:pPr marL="0" indent="0" algn="r">
+              <a:buNone/>
+            </a:pPr>
+            <a:r>
+              <a:rPr lang="en-US" sz="1400" b="1" dirty="0">
+                <a:solidFill>
+                  <a:srgbClr val="1E2D6B"/>
+                </a:solidFill>
+                <a:latin typeface="Calibri" pitchFamily="34" charset="0"/>
+                <a:ea typeface="Calibri" pitchFamily="34" charset="-122"/>
+                <a:cs typeface="Calibri" pitchFamily="34" charset="-120"/>
+              </a:rPr>
+              <a:t>45 min</a:t>
+            </a:r>
+            <a:endParaRPr lang="en-US" sz="1400" dirty="0"/>
+          </a:p>
+        </p:txBody>
+      </p:sp>
+      <p:sp>
+        <p:nvSpPr>
+          <p:cNvPr id="19" name="Shape 14"/>
+          <p:cNvSpPr/>
+          <p:nvPr/>
+        </p:nvSpPr>
+        <p:spPr>
+          <a:xfrm>
+            <a:off x="640080" y="4572000"/>
+            <a:ext cx="548640" cy="548640"/>
+          </a:xfrm>
+          <a:prstGeom prst="ellipse">
+            <a:avLst/>
+          </a:prstGeom>
+          <a:solidFill>
+            <a:srgbClr val="F2F3F7"/>
+          </a:solidFill>
+          <a:ln/>
+        </p:spPr>
+        <p:txBody>
+          <a:bodyPr/>
+          <a:lstStyle/>
+          <a:p>
+            <a:endParaRPr lang="es-PE"/>
+          </a:p>
+        </p:txBody>
+      </p:sp>
+      <p:pic>
+        <p:nvPicPr>
+          <p:cNvPr id="20" name="Image 3" descr="preencoded.png"/>
+          <p:cNvPicPr>
+            <a:picLocks noChangeAspect="1"/>
+          </p:cNvPicPr>
+          <p:nvPr/>
+        </p:nvPicPr>
+        <p:blipFill>
+          <a:blip r:embed="rId6"/>
+          <a:stretch>
+            <a:fillRect/>
+          </a:stretch>
+        </p:blipFill>
+        <p:spPr>
+          <a:xfrm>
+            <a:off x="777240" y="4709160"/>
+            <a:ext cx="274320" cy="274320"/>
+          </a:xfrm>
+          <a:prstGeom prst="rect">
+            <a:avLst/>
+          </a:prstGeom>
+        </p:spPr>
+      </p:pic>
+      <p:sp>
+        <p:nvSpPr>
+          <p:cNvPr id="21" name="Text 15"/>
+          <p:cNvSpPr/>
+          <p:nvPr/>
+        </p:nvSpPr>
+        <p:spPr>
+          <a:xfrm>
+            <a:off x="1371600" y="4526280"/>
+            <a:ext cx="7315200" cy="365760"/>
+          </a:xfrm>
+          <a:prstGeom prst="rect">
+            <a:avLst/>
+          </a:prstGeom>
+          <a:noFill/>
+          <a:ln/>
+        </p:spPr>
+        <p:txBody>
+          <a:bodyPr wrap="square" lIns="0" tIns="0" rIns="0" bIns="0" rtlCol="0" anchor="ctr"/>
+          <a:lstStyle/>
+          <a:p>
+            <a:pPr marL="0" indent="0">
+              <a:buNone/>
+            </a:pPr>
+            <a:r>
+              <a:rPr lang="en-US" sz="1700" b="1" dirty="0">
+                <a:solidFill>
+                  <a:srgbClr val="121B3A"/>
+                </a:solidFill>
+                <a:latin typeface="Calibri" pitchFamily="34" charset="0"/>
+                <a:ea typeface="Calibri" pitchFamily="34" charset="-122"/>
+                <a:cs typeface="Calibri" pitchFamily="34" charset="-120"/>
+              </a:rPr>
+              <a:t>Límites y riesgos</a:t>
+            </a:r>
+            <a:endParaRPr lang="en-US" sz="1700" dirty="0"/>
+          </a:p>
+        </p:txBody>
+      </p:sp>
+      <p:sp>
+        <p:nvSpPr>
+          <p:cNvPr id="22" name="Text 16"/>
+          <p:cNvSpPr/>
+          <p:nvPr/>
+        </p:nvSpPr>
+        <p:spPr>
+          <a:xfrm>
+            <a:off x="1371600" y="4892040"/>
+            <a:ext cx="7772400" cy="365760"/>
+          </a:xfrm>
+          <a:prstGeom prst="rect">
+            <a:avLst/>
+          </a:prstGeom>
+          <a:noFill/>
+          <a:ln/>
+        </p:spPr>
+        <p:txBody>
+          <a:bodyPr wrap="square" lIns="0" tIns="0" rIns="0" bIns="0" rtlCol="0" anchor="ctr"/>
+          <a:lstStyle/>
+          <a:p>
+            <a:pPr marL="0" indent="0">
+              <a:buNone/>
+            </a:pPr>
+            <a:r>
+              <a:rPr lang="en-US" sz="1250" dirty="0">
+                <a:solidFill>
+                  <a:srgbClr val="5A5F73"/>
+                </a:solidFill>
+                <a:latin typeface="Calibri" pitchFamily="34" charset="0"/>
+                <a:ea typeface="Calibri" pitchFamily="34" charset="-122"/>
+                <a:cs typeface="Calibri" pitchFamily="34" charset="-120"/>
+              </a:rPr>
+              <a:t>Alucinaciones, confidencialidad y criterio de uso</a:t>
+            </a:r>
+            <a:endParaRPr lang="en-US" sz="1250" dirty="0"/>
+          </a:p>
+        </p:txBody>
+      </p:sp>
+      <p:sp>
+        <p:nvSpPr>
+          <p:cNvPr id="23" name="Text 17"/>
+          <p:cNvSpPr/>
+          <p:nvPr/>
+        </p:nvSpPr>
+        <p:spPr>
+          <a:xfrm>
+            <a:off x="9418320" y="4617720"/>
+            <a:ext cx="2103120" cy="457200"/>
+          </a:xfrm>
+          <a:prstGeom prst="rect">
+            <a:avLst/>
+          </a:prstGeom>
+          <a:noFill/>
+          <a:ln/>
+        </p:spPr>
+        <p:txBody>
+          <a:bodyPr wrap="square" lIns="0" tIns="0" rIns="0" bIns="0" rtlCol="0" anchor="ctr"/>
+          <a:lstStyle/>
+          <a:p>
+            <a:pPr marL="0" indent="0" algn="r">
+              <a:buNone/>
+            </a:pPr>
+            <a:r>
+              <a:rPr lang="en-US" sz="1400" b="1" dirty="0">
+                <a:solidFill>
+                  <a:srgbClr val="1E2D6B"/>
+                </a:solidFill>
+                <a:latin typeface="Calibri" pitchFamily="34" charset="0"/>
+                <a:ea typeface="Calibri" pitchFamily="34" charset="-122"/>
+                <a:cs typeface="Calibri" pitchFamily="34" charset="-120"/>
+              </a:rPr>
+              <a:t>25 min</a:t>
+            </a:r>
+            <a:endParaRPr lang="en-US" sz="1400" dirty="0"/>
+          </a:p>
+        </p:txBody>
+      </p:sp>
+      <p:sp>
+        <p:nvSpPr>
+          <p:cNvPr id="24" name="Shape 18"/>
+          <p:cNvSpPr/>
+          <p:nvPr/>
+        </p:nvSpPr>
+        <p:spPr>
+          <a:xfrm>
+            <a:off x="640080" y="5486400"/>
+            <a:ext cx="548640" cy="548640"/>
+          </a:xfrm>
+          <a:prstGeom prst="ellipse">
+            <a:avLst/>
+          </a:prstGeom>
+          <a:solidFill>
+            <a:srgbClr val="F2F3F7"/>
+          </a:solidFill>
+          <a:ln/>
+        </p:spPr>
+        <p:txBody>
+          <a:bodyPr/>
+          <a:lstStyle/>
+          <a:p>
+            <a:endParaRPr lang="es-PE"/>
+          </a:p>
+        </p:txBody>
+      </p:sp>
+      <p:pic>
+        <p:nvPicPr>
+          <p:cNvPr id="25" name="Image 4" descr="preencoded.png"/>
+          <p:cNvPicPr>
+            <a:picLocks noChangeAspect="1"/>
+          </p:cNvPicPr>
+          <p:nvPr/>
+        </p:nvPicPr>
+        <p:blipFill>
+          <a:blip r:embed="rId7"/>
+          <a:stretch>
+            <a:fillRect/>
+          </a:stretch>
+        </p:blipFill>
+        <p:spPr>
+          <a:xfrm>
             <a:off x="777240" y="5623560"/>
             <a:ext cx="274320" cy="274320"/>
           </a:xfrm>
@@ -5110,7 +5259,7 @@
           <a:bodyPr wrap="square" lIns="0" tIns="0" rIns="0" bIns="0" rtlCol="0" anchor="ctr"/>
           <a:lstStyle/>
           <a:p>
-            <a:pPr indent="0" marL="0">
+            <a:pPr marL="0" indent="0">
               <a:buNone/>
             </a:pPr>
             <a:r>
@@ -5149,7 +5298,7 @@
           <a:bodyPr wrap="square" lIns="0" tIns="0" rIns="0" bIns="0" rtlCol="0" anchor="ctr"/>
           <a:lstStyle/>
           <a:p>
-            <a:pPr indent="0" marL="0">
+            <a:pPr marL="0" indent="0">
               <a:buNone/>
             </a:pPr>
             <a:r>
@@ -5188,7 +5337,7 @@
           <a:bodyPr wrap="square" lIns="0" tIns="0" rIns="0" bIns="0" rtlCol="0" anchor="ctr"/>
           <a:lstStyle/>
           <a:p>
-            <a:pPr algn="r" indent="0" marL="0">
+            <a:pPr marL="0" indent="0" algn="r">
               <a:buNone/>
             </a:pPr>
             <a:r>
@@ -5227,7 +5376,7 @@
           <a:bodyPr wrap="square" lIns="0" tIns="0" rIns="0" bIns="0" rtlCol="0" anchor="ctr"/>
           <a:lstStyle/>
           <a:p>
-            <a:pPr indent="0" marL="0">
+            <a:pPr marL="0" indent="0">
               <a:buNone/>
             </a:pPr>
             <a:r>
@@ -5261,6 +5410,7 @@
         <a:solidFill>
           <a:srgbClr val="F2F3F7"/>
         </a:solidFill>
+        <a:effectLst/>
       </p:bgPr>
     </p:bg>
     <p:spTree>
@@ -5298,11 +5448,11 @@
           <a:bodyPr wrap="square" lIns="0" tIns="0" rIns="0" bIns="0" rtlCol="0" anchor="ctr"/>
           <a:lstStyle/>
           <a:p>
-            <a:pPr indent="0" marL="0">
-              <a:buNone/>
-            </a:pPr>
-            <a:r>
-              <a:rPr lang="en-US" sz="1300" b="1" spc="200" kern="0" dirty="0">
+            <a:pPr marL="0" indent="0">
+              <a:buNone/>
+            </a:pPr>
+            <a:r>
+              <a:rPr lang="en-US" sz="1300" b="1" kern="0" spc="200" dirty="0">
                 <a:solidFill>
                   <a:srgbClr val="1E2D6B"/>
                 </a:solidFill>
@@ -5325,15 +5475,15 @@
           <p:nvPr/>
         </p:nvPicPr>
         <p:blipFill>
-          <a:blip r:embed="rId1"/>
+          <a:blip r:embed="rId3"/>
           <a:stretch>
             <a:fillRect/>
           </a:stretch>
         </p:blipFill>
         <p:spPr>
           <a:xfrm>
-            <a:off x="731520" y="1463040"/>
-            <a:ext cx="2377440" cy="2377440"/>
+            <a:off x="324996" y="1312333"/>
+            <a:ext cx="2985347" cy="2985347"/>
           </a:xfrm>
           <a:prstGeom prst="ellipse">
             <a:avLst/>
@@ -5361,7 +5511,7 @@
           <a:bodyPr wrap="square" lIns="0" tIns="0" rIns="0" bIns="0" rtlCol="0" anchor="ctr"/>
           <a:lstStyle/>
           <a:p>
-            <a:pPr indent="0" marL="0">
+            <a:pPr marL="0" indent="0">
               <a:buNone/>
             </a:pPr>
             <a:r>
@@ -5400,11 +5550,11 @@
           <a:bodyPr wrap="square" lIns="0" tIns="0" rIns="0" bIns="0" rtlCol="0" anchor="ctr"/>
           <a:lstStyle/>
           <a:p>
-            <a:pPr indent="0" marL="0">
-              <a:buNone/>
-            </a:pPr>
-            <a:r>
-              <a:rPr lang="en-US" sz="1300" b="1" spc="150" kern="0" dirty="0">
+            <a:pPr marL="0" indent="0">
+              <a:buNone/>
+            </a:pPr>
+            <a:r>
+              <a:rPr lang="en-US" sz="1300" b="1" kern="0" spc="150" dirty="0">
                 <a:solidFill>
                   <a:srgbClr val="1E2D6B"/>
                 </a:solidFill>
@@ -5439,7 +5589,7 @@
           <a:bodyPr wrap="square" lIns="0" tIns="0" rIns="0" bIns="0" rtlCol="0" anchor="t"/>
           <a:lstStyle/>
           <a:p>
-            <a:pPr indent="0" marL="0">
+            <a:pPr marL="0" indent="0">
               <a:buNone/>
             </a:pPr>
             <a:r>
@@ -5483,6 +5633,13 @@
             <a:prstDash val="solid"/>
           </a:ln>
         </p:spPr>
+        <p:txBody>
+          <a:bodyPr/>
+          <a:lstStyle/>
+          <a:p>
+            <a:endParaRPr lang="es-PE"/>
+          </a:p>
+        </p:txBody>
       </p:sp>
       <p:sp>
         <p:nvSpPr>
@@ -5505,7 +5662,7 @@
           <a:bodyPr wrap="square" lIns="0" tIns="0" rIns="0" bIns="0" rtlCol="0" anchor="ctr"/>
           <a:lstStyle/>
           <a:p>
-            <a:pPr algn="ctr" indent="0" marL="0">
+            <a:pPr marL="0" indent="0" algn="ctr">
               <a:buNone/>
             </a:pPr>
             <a:r>
@@ -5549,6 +5706,13 @@
             <a:prstDash val="solid"/>
           </a:ln>
         </p:spPr>
+        <p:txBody>
+          <a:bodyPr/>
+          <a:lstStyle/>
+          <a:p>
+            <a:endParaRPr lang="es-PE"/>
+          </a:p>
+        </p:txBody>
       </p:sp>
       <p:sp>
         <p:nvSpPr>
@@ -5571,7 +5735,7 @@
           <a:bodyPr wrap="square" lIns="0" tIns="0" rIns="0" bIns="0" rtlCol="0" anchor="ctr"/>
           <a:lstStyle/>
           <a:p>
-            <a:pPr algn="ctr" indent="0" marL="0">
+            <a:pPr marL="0" indent="0" algn="ctr">
               <a:buNone/>
             </a:pPr>
             <a:r>
@@ -5615,6 +5779,13 @@
             <a:prstDash val="solid"/>
           </a:ln>
         </p:spPr>
+        <p:txBody>
+          <a:bodyPr/>
+          <a:lstStyle/>
+          <a:p>
+            <a:endParaRPr lang="es-PE"/>
+          </a:p>
+        </p:txBody>
       </p:sp>
       <p:sp>
         <p:nvSpPr>
@@ -5637,7 +5808,7 @@
           <a:bodyPr wrap="square" lIns="0" tIns="0" rIns="0" bIns="0" rtlCol="0" anchor="ctr"/>
           <a:lstStyle/>
           <a:p>
-            <a:pPr algn="ctr" indent="0" marL="0">
+            <a:pPr marL="0" indent="0" algn="ctr">
               <a:buNone/>
             </a:pPr>
             <a:r>
@@ -5681,6 +5852,13 @@
             <a:prstDash val="solid"/>
           </a:ln>
         </p:spPr>
+        <p:txBody>
+          <a:bodyPr/>
+          <a:lstStyle/>
+          <a:p>
+            <a:endParaRPr lang="es-PE"/>
+          </a:p>
+        </p:txBody>
       </p:sp>
       <p:sp>
         <p:nvSpPr>
@@ -5703,7 +5881,7 @@
           <a:bodyPr wrap="square" lIns="0" tIns="0" rIns="0" bIns="0" rtlCol="0" anchor="ctr"/>
           <a:lstStyle/>
           <a:p>
-            <a:pPr algn="ctr" indent="0" marL="0">
+            <a:pPr marL="0" indent="0" algn="ctr">
               <a:buNone/>
             </a:pPr>
             <a:r>
@@ -5747,6 +5925,13 @@
             <a:prstDash val="solid"/>
           </a:ln>
         </p:spPr>
+        <p:txBody>
+          <a:bodyPr/>
+          <a:lstStyle/>
+          <a:p>
+            <a:endParaRPr lang="es-PE"/>
+          </a:p>
+        </p:txBody>
       </p:sp>
       <p:sp>
         <p:nvSpPr>
@@ -5769,7 +5954,7 @@
           <a:bodyPr wrap="square" lIns="0" tIns="0" rIns="0" bIns="0" rtlCol="0" anchor="ctr"/>
           <a:lstStyle/>
           <a:p>
-            <a:pPr algn="ctr" indent="0" marL="0">
+            <a:pPr marL="0" indent="0" algn="ctr">
               <a:buNone/>
             </a:pPr>
             <a:r>
@@ -5806,6 +5991,13 @@
           </a:solidFill>
           <a:ln/>
         </p:spPr>
+        <p:txBody>
+          <a:bodyPr/>
+          <a:lstStyle/>
+          <a:p>
+            <a:endParaRPr lang="es-PE"/>
+          </a:p>
+        </p:txBody>
       </p:sp>
       <p:sp>
         <p:nvSpPr>
@@ -5828,7 +6020,7 @@
           <a:bodyPr wrap="square" lIns="0" tIns="0" rIns="0" bIns="0" rtlCol="0" anchor="ctr"/>
           <a:lstStyle/>
           <a:p>
-            <a:pPr indent="0" marL="0">
+            <a:pPr marL="0" indent="0">
               <a:buNone/>
             </a:pPr>
             <a:r>
@@ -5862,6 +6054,7 @@
         <a:solidFill>
           <a:srgbClr val="FFFFFF"/>
         </a:solidFill>
+        <a:effectLst/>
       </p:bgPr>
     </p:bg>
     <p:spTree>
@@ -5899,11 +6092,11 @@
           <a:bodyPr wrap="square" lIns="0" tIns="0" rIns="0" bIns="0" rtlCol="0" anchor="ctr"/>
           <a:lstStyle/>
           <a:p>
-            <a:pPr indent="0" marL="0">
-              <a:buNone/>
-            </a:pPr>
-            <a:r>
-              <a:rPr lang="en-US" sz="1300" b="1" spc="200" kern="0" dirty="0">
+            <a:pPr marL="0" indent="0">
+              <a:buNone/>
+            </a:pPr>
+            <a:r>
+              <a:rPr lang="en-US" sz="1300" b="1" kern="0" spc="200" dirty="0">
                 <a:solidFill>
                   <a:srgbClr val="F5C842"/>
                 </a:solidFill>
@@ -5938,7 +6131,7 @@
           <a:bodyPr wrap="square" lIns="0" tIns="0" rIns="0" bIns="0" rtlCol="0" anchor="ctr"/>
           <a:lstStyle/>
           <a:p>
-            <a:pPr indent="0" marL="0">
+            <a:pPr marL="0" indent="0">
               <a:buNone/>
             </a:pPr>
             <a:r>
@@ -5977,7 +6170,7 @@
           <a:bodyPr wrap="square" lIns="0" tIns="0" rIns="0" bIns="0" rtlCol="0" anchor="ctr"/>
           <a:lstStyle/>
           <a:p>
-            <a:pPr indent="0" marL="0">
+            <a:pPr marL="0" indent="0">
               <a:buNone/>
             </a:pPr>
             <a:r>
@@ -6016,6 +6209,13 @@
           </a:solidFill>
           <a:ln/>
         </p:spPr>
+        <p:txBody>
+          <a:bodyPr/>
+          <a:lstStyle/>
+          <a:p>
+            <a:endParaRPr lang="es-PE"/>
+          </a:p>
+        </p:txBody>
       </p:sp>
       <p:sp>
         <p:nvSpPr>
@@ -6036,298 +6236,17 @@
           </a:solidFill>
           <a:ln/>
         </p:spPr>
+        <p:txBody>
+          <a:bodyPr/>
+          <a:lstStyle/>
+          <a:p>
+            <a:endParaRPr lang="es-PE"/>
+          </a:p>
+        </p:txBody>
       </p:sp>
       <p:pic>
         <p:nvPicPr>
           <p:cNvPr id="7" name="Image 0" descr="preencoded.png"/>
-          <p:cNvPicPr>
-            <a:picLocks noChangeAspect="1"/>
-          </p:cNvPicPr>
-          <p:nvPr/>
-        </p:nvPicPr>
-        <p:blipFill>
-          <a:blip r:embed="rId1"/>
-          <a:stretch>
-            <a:fillRect/>
-          </a:stretch>
-        </p:blipFill>
-        <p:spPr>
-          <a:xfrm>
-            <a:off x="960120" y="2514600"/>
-            <a:ext cx="274320" cy="274320"/>
-          </a:xfrm>
-          <a:prstGeom prst="rect">
-            <a:avLst/>
-          </a:prstGeom>
-        </p:spPr>
-      </p:pic>
-      <p:sp>
-        <p:nvSpPr>
-          <p:cNvPr id="8" name="Text 5"/>
-          <p:cNvSpPr/>
-          <p:nvPr/>
-        </p:nvSpPr>
-        <p:spPr>
-          <a:xfrm>
-            <a:off x="1508760" y="2423160"/>
-            <a:ext cx="4114800" cy="365760"/>
-          </a:xfrm>
-          <a:prstGeom prst="rect">
-            <a:avLst/>
-          </a:prstGeom>
-          <a:noFill/>
-          <a:ln/>
-        </p:spPr>
-        <p:txBody>
-          <a:bodyPr wrap="square" lIns="0" tIns="0" rIns="0" bIns="0" rtlCol="0" anchor="ctr"/>
-          <a:lstStyle/>
-          <a:p>
-            <a:pPr indent="0" marL="0">
-              <a:buNone/>
-            </a:pPr>
-            <a:r>
-              <a:rPr lang="en-US" sz="1500" b="1" dirty="0">
-                <a:solidFill>
-                  <a:srgbClr val="121B3A"/>
-                </a:solidFill>
-                <a:latin typeface="Calibri" pitchFamily="34" charset="0"/>
-                <a:ea typeface="Calibri" pitchFamily="34" charset="-122"/>
-                <a:cs typeface="Calibri" pitchFamily="34" charset="-120"/>
-              </a:rPr>
-              <a:t>1.  Nube de palabras</a:t>
-            </a:r>
-            <a:endParaRPr lang="en-US" sz="1500" dirty="0"/>
-          </a:p>
-        </p:txBody>
-      </p:sp>
-      <p:sp>
-        <p:nvSpPr>
-          <p:cNvPr id="9" name="Text 6"/>
-          <p:cNvSpPr/>
-          <p:nvPr/>
-        </p:nvSpPr>
-        <p:spPr>
-          <a:xfrm>
-            <a:off x="822960" y="3017520"/>
-            <a:ext cx="4754880" cy="1097280"/>
-          </a:xfrm>
-          <a:prstGeom prst="rect">
-            <a:avLst/>
-          </a:prstGeom>
-          <a:noFill/>
-          <a:ln/>
-        </p:spPr>
-        <p:txBody>
-          <a:bodyPr wrap="square" lIns="0" tIns="0" rIns="0" bIns="0" rtlCol="0" anchor="t"/>
-          <a:lstStyle/>
-          <a:p>
-            <a:pPr indent="0" marL="0">
-              <a:buNone/>
-            </a:pPr>
-            <a:r>
-              <a:rPr lang="en-US" sz="1350" i="1" dirty="0">
-                <a:solidFill>
-                  <a:srgbClr val="5A5F73"/>
-                </a:solidFill>
-                <a:latin typeface="Calibri" pitchFamily="34" charset="0"/>
-                <a:ea typeface="Calibri" pitchFamily="34" charset="-122"/>
-                <a:cs typeface="Calibri" pitchFamily="34" charset="-120"/>
-              </a:rPr>
-              <a:t>En una palabra: ¿qué es la IA para ti?</a:t>
-            </a:r>
-            <a:endParaRPr lang="en-US" sz="1350" dirty="0"/>
-          </a:p>
-        </p:txBody>
-      </p:sp>
-      <p:sp>
-        <p:nvSpPr>
-          <p:cNvPr id="10" name="Shape 7"/>
-          <p:cNvSpPr/>
-          <p:nvPr/>
-        </p:nvSpPr>
-        <p:spPr>
-          <a:xfrm>
-            <a:off x="6355080" y="2103120"/>
-            <a:ext cx="5257800" cy="2103120"/>
-          </a:xfrm>
-          <a:prstGeom prst="roundRect">
-            <a:avLst>
-              <a:gd name="adj" fmla="val 3478"/>
-            </a:avLst>
-          </a:prstGeom>
-          <a:solidFill>
-            <a:srgbClr val="F2F3F7"/>
-          </a:solidFill>
-          <a:ln/>
-        </p:spPr>
-      </p:sp>
-      <p:sp>
-        <p:nvSpPr>
-          <p:cNvPr id="11" name="Shape 8"/>
-          <p:cNvSpPr/>
-          <p:nvPr/>
-        </p:nvSpPr>
-        <p:spPr>
-          <a:xfrm>
-            <a:off x="6629400" y="2377440"/>
-            <a:ext cx="548640" cy="548640"/>
-          </a:xfrm>
-          <a:prstGeom prst="ellipse">
-            <a:avLst/>
-          </a:prstGeom>
-          <a:solidFill>
-            <a:srgbClr val="FFFFFF"/>
-          </a:solidFill>
-          <a:ln/>
-        </p:spPr>
-      </p:sp>
-      <p:pic>
-        <p:nvPicPr>
-          <p:cNvPr id="12" name="Image 1" descr="preencoded.png"/>
-          <p:cNvPicPr>
-            <a:picLocks noChangeAspect="1"/>
-          </p:cNvPicPr>
-          <p:nvPr/>
-        </p:nvPicPr>
-        <p:blipFill>
-          <a:blip r:embed="rId2"/>
-          <a:stretch>
-            <a:fillRect/>
-          </a:stretch>
-        </p:blipFill>
-        <p:spPr>
-          <a:xfrm>
-            <a:off x="6766560" y="2514600"/>
-            <a:ext cx="274320" cy="274320"/>
-          </a:xfrm>
-          <a:prstGeom prst="rect">
-            <a:avLst/>
-          </a:prstGeom>
-        </p:spPr>
-      </p:pic>
-      <p:sp>
-        <p:nvSpPr>
-          <p:cNvPr id="13" name="Text 9"/>
-          <p:cNvSpPr/>
-          <p:nvPr/>
-        </p:nvSpPr>
-        <p:spPr>
-          <a:xfrm>
-            <a:off x="7315200" y="2423160"/>
-            <a:ext cx="4114800" cy="365760"/>
-          </a:xfrm>
-          <a:prstGeom prst="rect">
-            <a:avLst/>
-          </a:prstGeom>
-          <a:noFill/>
-          <a:ln/>
-        </p:spPr>
-        <p:txBody>
-          <a:bodyPr wrap="square" lIns="0" tIns="0" rIns="0" bIns="0" rtlCol="0" anchor="ctr"/>
-          <a:lstStyle/>
-          <a:p>
-            <a:pPr indent="0" marL="0">
-              <a:buNone/>
-            </a:pPr>
-            <a:r>
-              <a:rPr lang="en-US" sz="1500" b="1" dirty="0">
-                <a:solidFill>
-                  <a:srgbClr val="121B3A"/>
-                </a:solidFill>
-                <a:latin typeface="Calibri" pitchFamily="34" charset="0"/>
-                <a:ea typeface="Calibri" pitchFamily="34" charset="-122"/>
-                <a:cs typeface="Calibri" pitchFamily="34" charset="-120"/>
-              </a:rPr>
-              <a:t>2.  Escala</a:t>
-            </a:r>
-            <a:endParaRPr lang="en-US" sz="1500" dirty="0"/>
-          </a:p>
-        </p:txBody>
-      </p:sp>
-      <p:sp>
-        <p:nvSpPr>
-          <p:cNvPr id="14" name="Text 10"/>
-          <p:cNvSpPr/>
-          <p:nvPr/>
-        </p:nvSpPr>
-        <p:spPr>
-          <a:xfrm>
-            <a:off x="6629400" y="3017520"/>
-            <a:ext cx="4754880" cy="1097280"/>
-          </a:xfrm>
-          <a:prstGeom prst="rect">
-            <a:avLst/>
-          </a:prstGeom>
-          <a:noFill/>
-          <a:ln/>
-        </p:spPr>
-        <p:txBody>
-          <a:bodyPr wrap="square" lIns="0" tIns="0" rIns="0" bIns="0" rtlCol="0" anchor="t"/>
-          <a:lstStyle/>
-          <a:p>
-            <a:pPr indent="0" marL="0">
-              <a:buNone/>
-            </a:pPr>
-            <a:r>
-              <a:rPr lang="en-US" sz="1350" i="1" dirty="0">
-                <a:solidFill>
-                  <a:srgbClr val="5A5F73"/>
-                </a:solidFill>
-                <a:latin typeface="Calibri" pitchFamily="34" charset="0"/>
-                <a:ea typeface="Calibri" pitchFamily="34" charset="-122"/>
-                <a:cs typeface="Calibri" pitchFamily="34" charset="-120"/>
-              </a:rPr>
-              <a:t>¿Usas herramientas de IA en tu trabajo diario? (de acuerdo / en desacuerdo)</a:t>
-            </a:r>
-            <a:endParaRPr lang="en-US" sz="1350" dirty="0"/>
-          </a:p>
-        </p:txBody>
-      </p:sp>
-      <p:sp>
-        <p:nvSpPr>
-          <p:cNvPr id="15" name="Shape 11"/>
-          <p:cNvSpPr/>
-          <p:nvPr/>
-        </p:nvSpPr>
-        <p:spPr>
-          <a:xfrm>
-            <a:off x="548640" y="4434840"/>
-            <a:ext cx="5257800" cy="2103120"/>
-          </a:xfrm>
-          <a:prstGeom prst="roundRect">
-            <a:avLst>
-              <a:gd name="adj" fmla="val 3478"/>
-            </a:avLst>
-          </a:prstGeom>
-          <a:solidFill>
-            <a:srgbClr val="F2F3F7"/>
-          </a:solidFill>
-          <a:ln/>
-        </p:spPr>
-      </p:sp>
-      <p:sp>
-        <p:nvSpPr>
-          <p:cNvPr id="16" name="Shape 12"/>
-          <p:cNvSpPr/>
-          <p:nvPr/>
-        </p:nvSpPr>
-        <p:spPr>
-          <a:xfrm>
-            <a:off x="822960" y="4709160"/>
-            <a:ext cx="548640" cy="548640"/>
-          </a:xfrm>
-          <a:prstGeom prst="ellipse">
-            <a:avLst/>
-          </a:prstGeom>
-          <a:solidFill>
-            <a:srgbClr val="FFFFFF"/>
-          </a:solidFill>
-          <a:ln/>
-        </p:spPr>
-      </p:sp>
-      <p:pic>
-        <p:nvPicPr>
-          <p:cNvPr id="17" name="Image 2" descr="preencoded.png"/>
           <p:cNvPicPr>
             <a:picLocks noChangeAspect="1"/>
           </p:cNvPicPr>
@@ -6341,7 +6260,7 @@
         </p:blipFill>
         <p:spPr>
           <a:xfrm>
-            <a:off x="960120" y="4846320"/>
+            <a:off x="960120" y="2514600"/>
             <a:ext cx="274320" cy="274320"/>
           </a:xfrm>
           <a:prstGeom prst="rect">
@@ -6351,13 +6270,13 @@
       </p:pic>
       <p:sp>
         <p:nvSpPr>
-          <p:cNvPr id="18" name="Text 13"/>
-          <p:cNvSpPr/>
-          <p:nvPr/>
-        </p:nvSpPr>
-        <p:spPr>
-          <a:xfrm>
-            <a:off x="1508760" y="4754880"/>
+          <p:cNvPr id="8" name="Text 5"/>
+          <p:cNvSpPr/>
+          <p:nvPr/>
+        </p:nvSpPr>
+        <p:spPr>
+          <a:xfrm>
+            <a:off x="1508760" y="2423160"/>
             <a:ext cx="4114800" cy="365760"/>
           </a:xfrm>
           <a:prstGeom prst="rect">
@@ -6370,7 +6289,7 @@
           <a:bodyPr wrap="square" lIns="0" tIns="0" rIns="0" bIns="0" rtlCol="0" anchor="ctr"/>
           <a:lstStyle/>
           <a:p>
-            <a:pPr indent="0" marL="0">
+            <a:pPr marL="0" indent="0">
               <a:buNone/>
             </a:pPr>
             <a:r>
@@ -6382,7 +6301,7 @@
                 <a:ea typeface="Calibri" pitchFamily="34" charset="-122"/>
                 <a:cs typeface="Calibri" pitchFamily="34" charset="-120"/>
               </a:rPr>
-              <a:t>3.  Opción múltiple</a:t>
+              <a:t>1.  Nube de palabras</a:t>
             </a:r>
             <a:endParaRPr lang="en-US" sz="1500" dirty="0"/>
           </a:p>
@@ -6390,13 +6309,13 @@
       </p:sp>
       <p:sp>
         <p:nvSpPr>
-          <p:cNvPr id="19" name="Text 14"/>
-          <p:cNvSpPr/>
-          <p:nvPr/>
-        </p:nvSpPr>
-        <p:spPr>
-          <a:xfrm>
-            <a:off x="822960" y="5349240"/>
+          <p:cNvPr id="9" name="Text 6"/>
+          <p:cNvSpPr/>
+          <p:nvPr/>
+        </p:nvSpPr>
+        <p:spPr>
+          <a:xfrm>
+            <a:off x="822960" y="3017520"/>
             <a:ext cx="4754880" cy="1097280"/>
           </a:xfrm>
           <a:prstGeom prst="rect">
@@ -6409,7 +6328,7 @@
           <a:bodyPr wrap="square" lIns="0" tIns="0" rIns="0" bIns="0" rtlCol="0" anchor="t"/>
           <a:lstStyle/>
           <a:p>
-            <a:pPr indent="0" marL="0">
+            <a:pPr marL="0" indent="0">
               <a:buNone/>
             </a:pPr>
             <a:r>
@@ -6421,7 +6340,7 @@
                 <a:ea typeface="Calibri" pitchFamily="34" charset="-122"/>
                 <a:cs typeface="Calibri" pitchFamily="34" charset="-120"/>
               </a:rPr>
-              <a:t>¿Cuál de estas herramientas has usado al menos una vez: ChatGPT, Gemini, Claude?</a:t>
+              <a:t>En una palabra: ¿qué es la IA para ti?</a:t>
             </a:r>
             <a:endParaRPr lang="en-US" sz="1350" dirty="0"/>
           </a:p>
@@ -6429,13 +6348,13 @@
       </p:sp>
       <p:sp>
         <p:nvSpPr>
-          <p:cNvPr id="20" name="Shape 15"/>
-          <p:cNvSpPr/>
-          <p:nvPr/>
-        </p:nvSpPr>
-        <p:spPr>
-          <a:xfrm>
-            <a:off x="6355080" y="4434840"/>
+          <p:cNvPr id="10" name="Shape 7"/>
+          <p:cNvSpPr/>
+          <p:nvPr/>
+        </p:nvSpPr>
+        <p:spPr>
+          <a:xfrm>
+            <a:off x="6355080" y="2103120"/>
             <a:ext cx="5257800" cy="2103120"/>
           </a:xfrm>
           <a:prstGeom prst="roundRect">
@@ -6448,16 +6367,23 @@
           </a:solidFill>
           <a:ln/>
         </p:spPr>
-      </p:sp>
-      <p:sp>
-        <p:nvSpPr>
-          <p:cNvPr id="21" name="Shape 16"/>
-          <p:cNvSpPr/>
-          <p:nvPr/>
-        </p:nvSpPr>
-        <p:spPr>
-          <a:xfrm>
-            <a:off x="6629400" y="4709160"/>
+        <p:txBody>
+          <a:bodyPr/>
+          <a:lstStyle/>
+          <a:p>
+            <a:endParaRPr lang="es-PE"/>
+          </a:p>
+        </p:txBody>
+      </p:sp>
+      <p:sp>
+        <p:nvSpPr>
+          <p:cNvPr id="11" name="Shape 8"/>
+          <p:cNvSpPr/>
+          <p:nvPr/>
+        </p:nvSpPr>
+        <p:spPr>
+          <a:xfrm>
+            <a:off x="6629400" y="2377440"/>
             <a:ext cx="548640" cy="548640"/>
           </a:xfrm>
           <a:prstGeom prst="ellipse">
@@ -6468,10 +6394,17 @@
           </a:solidFill>
           <a:ln/>
         </p:spPr>
+        <p:txBody>
+          <a:bodyPr/>
+          <a:lstStyle/>
+          <a:p>
+            <a:endParaRPr lang="es-PE"/>
+          </a:p>
+        </p:txBody>
       </p:sp>
       <p:pic>
         <p:nvPicPr>
-          <p:cNvPr id="22" name="Image 3" descr="preencoded.png"/>
+          <p:cNvPr id="12" name="Image 1" descr="preencoded.png"/>
           <p:cNvPicPr>
             <a:picLocks noChangeAspect="1"/>
           </p:cNvPicPr>
@@ -6485,6 +6418,322 @@
         </p:blipFill>
         <p:spPr>
           <a:xfrm>
+            <a:off x="6766560" y="2514600"/>
+            <a:ext cx="274320" cy="274320"/>
+          </a:xfrm>
+          <a:prstGeom prst="rect">
+            <a:avLst/>
+          </a:prstGeom>
+        </p:spPr>
+      </p:pic>
+      <p:sp>
+        <p:nvSpPr>
+          <p:cNvPr id="13" name="Text 9"/>
+          <p:cNvSpPr/>
+          <p:nvPr/>
+        </p:nvSpPr>
+        <p:spPr>
+          <a:xfrm>
+            <a:off x="7315200" y="2423160"/>
+            <a:ext cx="4114800" cy="365760"/>
+          </a:xfrm>
+          <a:prstGeom prst="rect">
+            <a:avLst/>
+          </a:prstGeom>
+          <a:noFill/>
+          <a:ln/>
+        </p:spPr>
+        <p:txBody>
+          <a:bodyPr wrap="square" lIns="0" tIns="0" rIns="0" bIns="0" rtlCol="0" anchor="ctr"/>
+          <a:lstStyle/>
+          <a:p>
+            <a:pPr marL="0" indent="0">
+              <a:buNone/>
+            </a:pPr>
+            <a:r>
+              <a:rPr lang="en-US" sz="1500" b="1" dirty="0">
+                <a:solidFill>
+                  <a:srgbClr val="121B3A"/>
+                </a:solidFill>
+                <a:latin typeface="Calibri" pitchFamily="34" charset="0"/>
+                <a:ea typeface="Calibri" pitchFamily="34" charset="-122"/>
+                <a:cs typeface="Calibri" pitchFamily="34" charset="-120"/>
+              </a:rPr>
+              <a:t>2.  Escala</a:t>
+            </a:r>
+            <a:endParaRPr lang="en-US" sz="1500" dirty="0"/>
+          </a:p>
+        </p:txBody>
+      </p:sp>
+      <p:sp>
+        <p:nvSpPr>
+          <p:cNvPr id="14" name="Text 10"/>
+          <p:cNvSpPr/>
+          <p:nvPr/>
+        </p:nvSpPr>
+        <p:spPr>
+          <a:xfrm>
+            <a:off x="6629400" y="3017520"/>
+            <a:ext cx="4754880" cy="1097280"/>
+          </a:xfrm>
+          <a:prstGeom prst="rect">
+            <a:avLst/>
+          </a:prstGeom>
+          <a:noFill/>
+          <a:ln/>
+        </p:spPr>
+        <p:txBody>
+          <a:bodyPr wrap="square" lIns="0" tIns="0" rIns="0" bIns="0" rtlCol="0" anchor="t"/>
+          <a:lstStyle/>
+          <a:p>
+            <a:pPr marL="0" indent="0">
+              <a:buNone/>
+            </a:pPr>
+            <a:r>
+              <a:rPr lang="en-US" sz="1350" i="1" dirty="0">
+                <a:solidFill>
+                  <a:srgbClr val="5A5F73"/>
+                </a:solidFill>
+                <a:latin typeface="Calibri" pitchFamily="34" charset="0"/>
+                <a:ea typeface="Calibri" pitchFamily="34" charset="-122"/>
+                <a:cs typeface="Calibri" pitchFamily="34" charset="-120"/>
+              </a:rPr>
+              <a:t>¿Usas herramientas de IA en tu trabajo diario? (de acuerdo / en desacuerdo)</a:t>
+            </a:r>
+            <a:endParaRPr lang="en-US" sz="1350" dirty="0"/>
+          </a:p>
+        </p:txBody>
+      </p:sp>
+      <p:sp>
+        <p:nvSpPr>
+          <p:cNvPr id="15" name="Shape 11"/>
+          <p:cNvSpPr/>
+          <p:nvPr/>
+        </p:nvSpPr>
+        <p:spPr>
+          <a:xfrm>
+            <a:off x="548640" y="4434840"/>
+            <a:ext cx="5257800" cy="2103120"/>
+          </a:xfrm>
+          <a:prstGeom prst="roundRect">
+            <a:avLst>
+              <a:gd name="adj" fmla="val 3478"/>
+            </a:avLst>
+          </a:prstGeom>
+          <a:solidFill>
+            <a:srgbClr val="F2F3F7"/>
+          </a:solidFill>
+          <a:ln/>
+        </p:spPr>
+        <p:txBody>
+          <a:bodyPr/>
+          <a:lstStyle/>
+          <a:p>
+            <a:endParaRPr lang="es-PE"/>
+          </a:p>
+        </p:txBody>
+      </p:sp>
+      <p:sp>
+        <p:nvSpPr>
+          <p:cNvPr id="16" name="Shape 12"/>
+          <p:cNvSpPr/>
+          <p:nvPr/>
+        </p:nvSpPr>
+        <p:spPr>
+          <a:xfrm>
+            <a:off x="822960" y="4709160"/>
+            <a:ext cx="548640" cy="548640"/>
+          </a:xfrm>
+          <a:prstGeom prst="ellipse">
+            <a:avLst/>
+          </a:prstGeom>
+          <a:solidFill>
+            <a:srgbClr val="FFFFFF"/>
+          </a:solidFill>
+          <a:ln/>
+        </p:spPr>
+        <p:txBody>
+          <a:bodyPr/>
+          <a:lstStyle/>
+          <a:p>
+            <a:endParaRPr lang="es-PE"/>
+          </a:p>
+        </p:txBody>
+      </p:sp>
+      <p:pic>
+        <p:nvPicPr>
+          <p:cNvPr id="17" name="Image 2" descr="preencoded.png"/>
+          <p:cNvPicPr>
+            <a:picLocks noChangeAspect="1"/>
+          </p:cNvPicPr>
+          <p:nvPr/>
+        </p:nvPicPr>
+        <p:blipFill>
+          <a:blip r:embed="rId5"/>
+          <a:stretch>
+            <a:fillRect/>
+          </a:stretch>
+        </p:blipFill>
+        <p:spPr>
+          <a:xfrm>
+            <a:off x="960120" y="4846320"/>
+            <a:ext cx="274320" cy="274320"/>
+          </a:xfrm>
+          <a:prstGeom prst="rect">
+            <a:avLst/>
+          </a:prstGeom>
+        </p:spPr>
+      </p:pic>
+      <p:sp>
+        <p:nvSpPr>
+          <p:cNvPr id="18" name="Text 13"/>
+          <p:cNvSpPr/>
+          <p:nvPr/>
+        </p:nvSpPr>
+        <p:spPr>
+          <a:xfrm>
+            <a:off x="1508760" y="4754880"/>
+            <a:ext cx="4114800" cy="365760"/>
+          </a:xfrm>
+          <a:prstGeom prst="rect">
+            <a:avLst/>
+          </a:prstGeom>
+          <a:noFill/>
+          <a:ln/>
+        </p:spPr>
+        <p:txBody>
+          <a:bodyPr wrap="square" lIns="0" tIns="0" rIns="0" bIns="0" rtlCol="0" anchor="ctr"/>
+          <a:lstStyle/>
+          <a:p>
+            <a:pPr marL="0" indent="0">
+              <a:buNone/>
+            </a:pPr>
+            <a:r>
+              <a:rPr lang="en-US" sz="1500" b="1" dirty="0">
+                <a:solidFill>
+                  <a:srgbClr val="121B3A"/>
+                </a:solidFill>
+                <a:latin typeface="Calibri" pitchFamily="34" charset="0"/>
+                <a:ea typeface="Calibri" pitchFamily="34" charset="-122"/>
+                <a:cs typeface="Calibri" pitchFamily="34" charset="-120"/>
+              </a:rPr>
+              <a:t>3.  Opción múltiple</a:t>
+            </a:r>
+            <a:endParaRPr lang="en-US" sz="1500" dirty="0"/>
+          </a:p>
+        </p:txBody>
+      </p:sp>
+      <p:sp>
+        <p:nvSpPr>
+          <p:cNvPr id="19" name="Text 14"/>
+          <p:cNvSpPr/>
+          <p:nvPr/>
+        </p:nvSpPr>
+        <p:spPr>
+          <a:xfrm>
+            <a:off x="822960" y="5349240"/>
+            <a:ext cx="4754880" cy="1097280"/>
+          </a:xfrm>
+          <a:prstGeom prst="rect">
+            <a:avLst/>
+          </a:prstGeom>
+          <a:noFill/>
+          <a:ln/>
+        </p:spPr>
+        <p:txBody>
+          <a:bodyPr wrap="square" lIns="0" tIns="0" rIns="0" bIns="0" rtlCol="0" anchor="t"/>
+          <a:lstStyle/>
+          <a:p>
+            <a:pPr marL="0" indent="0">
+              <a:buNone/>
+            </a:pPr>
+            <a:r>
+              <a:rPr lang="en-US" sz="1350" i="1" dirty="0">
+                <a:solidFill>
+                  <a:srgbClr val="5A5F73"/>
+                </a:solidFill>
+                <a:latin typeface="Calibri" pitchFamily="34" charset="0"/>
+                <a:ea typeface="Calibri" pitchFamily="34" charset="-122"/>
+                <a:cs typeface="Calibri" pitchFamily="34" charset="-120"/>
+              </a:rPr>
+              <a:t>¿Cuál de estas herramientas has usado al menos una vez: ChatGPT, Gemini, Claude?</a:t>
+            </a:r>
+            <a:endParaRPr lang="en-US" sz="1350" dirty="0"/>
+          </a:p>
+        </p:txBody>
+      </p:sp>
+      <p:sp>
+        <p:nvSpPr>
+          <p:cNvPr id="20" name="Shape 15"/>
+          <p:cNvSpPr/>
+          <p:nvPr/>
+        </p:nvSpPr>
+        <p:spPr>
+          <a:xfrm>
+            <a:off x="6355080" y="4434840"/>
+            <a:ext cx="5257800" cy="2103120"/>
+          </a:xfrm>
+          <a:prstGeom prst="roundRect">
+            <a:avLst>
+              <a:gd name="adj" fmla="val 3478"/>
+            </a:avLst>
+          </a:prstGeom>
+          <a:solidFill>
+            <a:srgbClr val="F2F3F7"/>
+          </a:solidFill>
+          <a:ln/>
+        </p:spPr>
+        <p:txBody>
+          <a:bodyPr/>
+          <a:lstStyle/>
+          <a:p>
+            <a:endParaRPr lang="es-PE"/>
+          </a:p>
+        </p:txBody>
+      </p:sp>
+      <p:sp>
+        <p:nvSpPr>
+          <p:cNvPr id="21" name="Shape 16"/>
+          <p:cNvSpPr/>
+          <p:nvPr/>
+        </p:nvSpPr>
+        <p:spPr>
+          <a:xfrm>
+            <a:off x="6629400" y="4709160"/>
+            <a:ext cx="548640" cy="548640"/>
+          </a:xfrm>
+          <a:prstGeom prst="ellipse">
+            <a:avLst/>
+          </a:prstGeom>
+          <a:solidFill>
+            <a:srgbClr val="FFFFFF"/>
+          </a:solidFill>
+          <a:ln/>
+        </p:spPr>
+        <p:txBody>
+          <a:bodyPr/>
+          <a:lstStyle/>
+          <a:p>
+            <a:endParaRPr lang="es-PE"/>
+          </a:p>
+        </p:txBody>
+      </p:sp>
+      <p:pic>
+        <p:nvPicPr>
+          <p:cNvPr id="22" name="Image 3" descr="preencoded.png"/>
+          <p:cNvPicPr>
+            <a:picLocks noChangeAspect="1"/>
+          </p:cNvPicPr>
+          <p:nvPr/>
+        </p:nvPicPr>
+        <p:blipFill>
+          <a:blip r:embed="rId6"/>
+          <a:stretch>
+            <a:fillRect/>
+          </a:stretch>
+        </p:blipFill>
+        <p:spPr>
+          <a:xfrm>
             <a:off x="6766560" y="4846320"/>
             <a:ext cx="274320" cy="274320"/>
           </a:xfrm>
@@ -6514,7 +6763,7 @@
           <a:bodyPr wrap="square" lIns="0" tIns="0" rIns="0" bIns="0" rtlCol="0" anchor="ctr"/>
           <a:lstStyle/>
           <a:p>
-            <a:pPr indent="0" marL="0">
+            <a:pPr marL="0" indent="0">
               <a:buNone/>
             </a:pPr>
             <a:r>
@@ -6553,7 +6802,7 @@
           <a:bodyPr wrap="square" lIns="0" tIns="0" rIns="0" bIns="0" rtlCol="0" anchor="t"/>
           <a:lstStyle/>
           <a:p>
-            <a:pPr indent="0" marL="0">
+            <a:pPr marL="0" indent="0">
               <a:buNone/>
             </a:pPr>
             <a:r>
@@ -6587,6 +6836,7 @@
         <a:solidFill>
           <a:srgbClr val="121B3A"/>
         </a:solidFill>
+        <a:effectLst/>
       </p:bgPr>
     </p:bg>
     <p:spTree>
@@ -6624,11 +6874,11 @@
           <a:bodyPr wrap="square" lIns="0" tIns="0" rIns="0" bIns="0" rtlCol="0" anchor="ctr"/>
           <a:lstStyle/>
           <a:p>
-            <a:pPr indent="0" marL="0">
-              <a:buNone/>
-            </a:pPr>
-            <a:r>
-              <a:rPr lang="en-US" sz="1300" b="1" spc="200" kern="0" dirty="0">
+            <a:pPr marL="0" indent="0">
+              <a:buNone/>
+            </a:pPr>
+            <a:r>
+              <a:rPr lang="en-US" sz="1300" b="1" kern="0" spc="200" dirty="0">
                 <a:solidFill>
                   <a:srgbClr val="F5C842"/>
                 </a:solidFill>
@@ -6663,7 +6913,7 @@
           <a:bodyPr wrap="square" lIns="0" tIns="0" rIns="0" bIns="0" rtlCol="0" anchor="ctr"/>
           <a:lstStyle/>
           <a:p>
-            <a:pPr indent="0" marL="0">
+            <a:pPr marL="0" indent="0">
               <a:buNone/>
             </a:pPr>
             <a:r>
@@ -6702,6 +6952,13 @@
           </a:solidFill>
           <a:ln/>
         </p:spPr>
+        <p:txBody>
+          <a:bodyPr/>
+          <a:lstStyle/>
+          <a:p>
+            <a:endParaRPr lang="es-PE"/>
+          </a:p>
+        </p:txBody>
       </p:sp>
       <p:sp>
         <p:nvSpPr>
@@ -6724,7 +6981,7 @@
           <a:bodyPr wrap="square" lIns="0" tIns="0" rIns="0" bIns="0" rtlCol="0" anchor="t"/>
           <a:lstStyle/>
           <a:p>
-            <a:pPr indent="0" marL="0">
+            <a:pPr marL="0" indent="0">
               <a:buNone/>
             </a:pPr>
             <a:r>
@@ -6741,7 +6998,7 @@
             <a:endParaRPr lang="en-US" sz="1800" dirty="0"/>
           </a:p>
           <a:p>
-            <a:pPr indent="0" marL="0">
+            <a:pPr marL="0" indent="0">
               <a:buNone/>
             </a:pPr>
             <a:r>
@@ -6753,12 +7010,12 @@
                 <a:ea typeface="Calibri" pitchFamily="34" charset="-122"/>
                 <a:cs typeface="Calibri" pitchFamily="34" charset="-120"/>
               </a:rPr>
-              <a:t xml:space="preserve"> </a:t>
+              <a:t> </a:t>
             </a:r>
             <a:endParaRPr lang="en-US" sz="1800" dirty="0"/>
           </a:p>
           <a:p>
-            <a:pPr indent="0" marL="0">
+            <a:pPr marL="0" indent="0">
               <a:buNone/>
             </a:pPr>
             <a:r>
@@ -6775,7 +7032,7 @@
             <a:endParaRPr lang="en-US" sz="1800" dirty="0"/>
           </a:p>
           <a:p>
-            <a:pPr indent="0" marL="0">
+            <a:pPr marL="0" indent="0">
               <a:buNone/>
             </a:pPr>
             <a:r>
@@ -6787,12 +7044,12 @@
                 <a:ea typeface="Calibri" pitchFamily="34" charset="-122"/>
                 <a:cs typeface="Calibri" pitchFamily="34" charset="-120"/>
               </a:rPr>
-              <a:t xml:space="preserve"> </a:t>
+              <a:t> </a:t>
             </a:r>
             <a:endParaRPr lang="en-US" sz="1800" dirty="0"/>
           </a:p>
           <a:p>
-            <a:pPr indent="0" marL="0">
+            <a:pPr marL="0" indent="0">
               <a:buNone/>
             </a:pPr>
             <a:r>
@@ -6831,6 +7088,13 @@
           </a:solidFill>
           <a:ln/>
         </p:spPr>
+        <p:txBody>
+          <a:bodyPr/>
+          <a:lstStyle/>
+          <a:p>
+            <a:endParaRPr lang="es-PE"/>
+          </a:p>
+        </p:txBody>
       </p:sp>
       <p:sp>
         <p:nvSpPr>
@@ -6853,11 +7117,11 @@
           <a:bodyPr wrap="square" lIns="0" tIns="0" rIns="0" bIns="0" rtlCol="0" anchor="ctr"/>
           <a:lstStyle/>
           <a:p>
-            <a:pPr indent="0" marL="0">
-              <a:buNone/>
-            </a:pPr>
-            <a:r>
-              <a:rPr lang="en-US" sz="1400" b="1" spc="150" kern="0" dirty="0">
+            <a:pPr marL="0" indent="0">
+              <a:buNone/>
+            </a:pPr>
+            <a:r>
+              <a:rPr lang="en-US" sz="1400" b="1" kern="0" spc="150" dirty="0">
                 <a:solidFill>
                   <a:srgbClr val="121B3A"/>
                 </a:solidFill>
@@ -6892,7 +7156,7 @@
           <a:bodyPr wrap="square" lIns="0" tIns="0" rIns="0" bIns="0" rtlCol="0" anchor="t"/>
           <a:lstStyle/>
           <a:p>
-            <a:pPr indent="0" marL="0">
+            <a:pPr marL="0" indent="0">
               <a:buNone/>
             </a:pPr>
             <a:r>
@@ -6931,7 +7195,7 @@
           <a:bodyPr wrap="square" lIns="0" tIns="0" rIns="0" bIns="0" rtlCol="0" anchor="t"/>
           <a:lstStyle/>
           <a:p>
-            <a:pPr indent="0" marL="0">
+            <a:pPr marL="0" indent="0">
               <a:buNone/>
             </a:pPr>
             <a:r>
@@ -6965,6 +7229,7 @@
         <a:solidFill>
           <a:srgbClr val="FFFFFF"/>
         </a:solidFill>
+        <a:effectLst/>
       </p:bgPr>
     </p:bg>
     <p:spTree>
@@ -7002,11 +7267,11 @@
           <a:bodyPr wrap="square" lIns="0" tIns="0" rIns="0" bIns="0" rtlCol="0" anchor="ctr"/>
           <a:lstStyle/>
           <a:p>
-            <a:pPr indent="0" marL="0">
-              <a:buNone/>
-            </a:pPr>
-            <a:r>
-              <a:rPr lang="en-US" sz="1300" b="1" spc="200" kern="0" dirty="0">
+            <a:pPr marL="0" indent="0">
+              <a:buNone/>
+            </a:pPr>
+            <a:r>
+              <a:rPr lang="en-US" sz="1300" b="1" kern="0" spc="200" dirty="0">
                 <a:solidFill>
                   <a:srgbClr val="F5C842"/>
                 </a:solidFill>
@@ -7041,7 +7306,7 @@
           <a:bodyPr wrap="square" lIns="0" tIns="0" rIns="0" bIns="0" rtlCol="0" anchor="ctr"/>
           <a:lstStyle/>
           <a:p>
-            <a:pPr indent="0" marL="0">
+            <a:pPr marL="0" indent="0">
               <a:buNone/>
             </a:pPr>
             <a:r>
@@ -7080,7 +7345,7 @@
           <a:bodyPr wrap="square" lIns="0" tIns="0" rIns="0" bIns="0" rtlCol="0" anchor="ctr"/>
           <a:lstStyle/>
           <a:p>
-            <a:pPr indent="0" marL="0">
+            <a:pPr marL="0" indent="0">
               <a:buNone/>
             </a:pPr>
             <a:r>
@@ -7119,6 +7384,13 @@
           </a:solidFill>
           <a:ln/>
         </p:spPr>
+        <p:txBody>
+          <a:bodyPr/>
+          <a:lstStyle/>
+          <a:p>
+            <a:endParaRPr lang="es-PE"/>
+          </a:p>
+        </p:txBody>
       </p:sp>
       <p:sp>
         <p:nvSpPr>
@@ -7141,7 +7413,7 @@
           <a:bodyPr wrap="square" lIns="0" tIns="0" rIns="0" bIns="0" rtlCol="0" anchor="ctr"/>
           <a:lstStyle/>
           <a:p>
-            <a:pPr indent="0" marL="0">
+            <a:pPr marL="0" indent="0">
               <a:buNone/>
             </a:pPr>
             <a:r>
@@ -7180,7 +7452,7 @@
           <a:bodyPr wrap="square" lIns="0" tIns="0" rIns="0" bIns="0" rtlCol="0" anchor="t"/>
           <a:lstStyle/>
           <a:p>
-            <a:pPr indent="0" marL="0">
+            <a:pPr marL="0" indent="0">
               <a:buNone/>
             </a:pPr>
             <a:r>
@@ -7219,7 +7491,7 @@
           <a:bodyPr wrap="square" lIns="0" tIns="0" rIns="0" bIns="0" rtlCol="0" anchor="t"/>
           <a:lstStyle/>
           <a:p>
-            <a:pPr indent="0" marL="0">
+            <a:pPr marL="0" indent="0">
               <a:buNone/>
             </a:pPr>
             <a:r>
@@ -7258,6 +7530,13 @@
           </a:solidFill>
           <a:ln/>
         </p:spPr>
+        <p:txBody>
+          <a:bodyPr/>
+          <a:lstStyle/>
+          <a:p>
+            <a:endParaRPr lang="es-PE"/>
+          </a:p>
+        </p:txBody>
       </p:sp>
       <p:sp>
         <p:nvSpPr>
@@ -7280,7 +7559,7 @@
           <a:bodyPr wrap="square" lIns="0" tIns="0" rIns="0" bIns="0" rtlCol="0" anchor="ctr"/>
           <a:lstStyle/>
           <a:p>
-            <a:pPr indent="0" marL="0">
+            <a:pPr marL="0" indent="0">
               <a:buNone/>
             </a:pPr>
             <a:r>
@@ -7319,7 +7598,7 @@
           <a:bodyPr wrap="square" lIns="0" tIns="0" rIns="0" bIns="0" rtlCol="0" anchor="t"/>
           <a:lstStyle/>
           <a:p>
-            <a:pPr indent="0" marL="0">
+            <a:pPr marL="0" indent="0">
               <a:buNone/>
             </a:pPr>
             <a:r>
@@ -7358,7 +7637,7 @@
           <a:bodyPr wrap="square" lIns="0" tIns="0" rIns="0" bIns="0" rtlCol="0" anchor="t"/>
           <a:lstStyle/>
           <a:p>
-            <a:pPr indent="0" marL="0">
+            <a:pPr marL="0" indent="0">
               <a:buNone/>
             </a:pPr>
             <a:r>
@@ -7397,6 +7676,13 @@
           </a:solidFill>
           <a:ln/>
         </p:spPr>
+        <p:txBody>
+          <a:bodyPr/>
+          <a:lstStyle/>
+          <a:p>
+            <a:endParaRPr lang="es-PE"/>
+          </a:p>
+        </p:txBody>
       </p:sp>
       <p:sp>
         <p:nvSpPr>
@@ -7419,7 +7705,7 @@
           <a:bodyPr wrap="square" lIns="0" tIns="0" rIns="0" bIns="0" rtlCol="0" anchor="ctr"/>
           <a:lstStyle/>
           <a:p>
-            <a:pPr indent="0" marL="0">
+            <a:pPr marL="0" indent="0">
               <a:buNone/>
             </a:pPr>
             <a:r>
@@ -7458,7 +7744,7 @@
           <a:bodyPr wrap="square" lIns="0" tIns="0" rIns="0" bIns="0" rtlCol="0" anchor="t"/>
           <a:lstStyle/>
           <a:p>
-            <a:pPr indent="0" marL="0">
+            <a:pPr marL="0" indent="0">
               <a:buNone/>
             </a:pPr>
             <a:r>
@@ -7497,7 +7783,7 @@
           <a:bodyPr wrap="square" lIns="0" tIns="0" rIns="0" bIns="0" rtlCol="0" anchor="t"/>
           <a:lstStyle/>
           <a:p>
-            <a:pPr indent="0" marL="0">
+            <a:pPr marL="0" indent="0">
               <a:buNone/>
             </a:pPr>
             <a:r>
@@ -7536,6 +7822,13 @@
           </a:solidFill>
           <a:ln/>
         </p:spPr>
+        <p:txBody>
+          <a:bodyPr/>
+          <a:lstStyle/>
+          <a:p>
+            <a:endParaRPr lang="es-PE"/>
+          </a:p>
+        </p:txBody>
       </p:sp>
       <p:sp>
         <p:nvSpPr>
@@ -7558,7 +7851,7 @@
           <a:bodyPr wrap="square" lIns="0" tIns="0" rIns="0" bIns="0" rtlCol="0" anchor="ctr"/>
           <a:lstStyle/>
           <a:p>
-            <a:pPr indent="0" marL="0">
+            <a:pPr marL="0" indent="0">
               <a:buNone/>
             </a:pPr>
             <a:r>
@@ -7597,7 +7890,7 @@
           <a:bodyPr wrap="square" lIns="0" tIns="0" rIns="0" bIns="0" rtlCol="0" anchor="t"/>
           <a:lstStyle/>
           <a:p>
-            <a:pPr indent="0" marL="0">
+            <a:pPr marL="0" indent="0">
               <a:buNone/>
             </a:pPr>
             <a:r>
@@ -7636,7 +7929,7 @@
           <a:bodyPr wrap="square" lIns="0" tIns="0" rIns="0" bIns="0" rtlCol="0" anchor="t"/>
           <a:lstStyle/>
           <a:p>
-            <a:pPr indent="0" marL="0">
+            <a:pPr marL="0" indent="0">
               <a:buNone/>
             </a:pPr>
             <a:r>
@@ -7675,6 +7968,13 @@
           </a:solidFill>
           <a:ln/>
         </p:spPr>
+        <p:txBody>
+          <a:bodyPr/>
+          <a:lstStyle/>
+          <a:p>
+            <a:endParaRPr lang="es-PE"/>
+          </a:p>
+        </p:txBody>
       </p:sp>
       <p:sp>
         <p:nvSpPr>
@@ -7697,7 +7997,7 @@
           <a:bodyPr wrap="square" lIns="0" tIns="0" rIns="0" bIns="0" rtlCol="0" anchor="ctr"/>
           <a:lstStyle/>
           <a:p>
-            <a:pPr indent="0" marL="0">
+            <a:pPr marL="0" indent="0">
               <a:buNone/>
             </a:pPr>
             <a:r>
@@ -7736,7 +8036,7 @@
           <a:bodyPr wrap="square" lIns="0" tIns="0" rIns="0" bIns="0" rtlCol="0" anchor="t"/>
           <a:lstStyle/>
           <a:p>
-            <a:pPr indent="0" marL="0">
+            <a:pPr marL="0" indent="0">
               <a:buNone/>
             </a:pPr>
             <a:r>
@@ -7775,7 +8075,7 @@
           <a:bodyPr wrap="square" lIns="0" tIns="0" rIns="0" bIns="0" rtlCol="0" anchor="t"/>
           <a:lstStyle/>
           <a:p>
-            <a:pPr indent="0" marL="0">
+            <a:pPr marL="0" indent="0">
               <a:buNone/>
             </a:pPr>
             <a:r>
@@ -7814,6 +8114,13 @@
           </a:solidFill>
           <a:ln/>
         </p:spPr>
+        <p:txBody>
+          <a:bodyPr/>
+          <a:lstStyle/>
+          <a:p>
+            <a:endParaRPr lang="es-PE"/>
+          </a:p>
+        </p:txBody>
       </p:sp>
       <p:sp>
         <p:nvSpPr>
@@ -7836,7 +8143,7 @@
           <a:bodyPr wrap="square" lIns="0" tIns="0" rIns="0" bIns="0" rtlCol="0" anchor="ctr"/>
           <a:lstStyle/>
           <a:p>
-            <a:pPr indent="0" marL="0">
+            <a:pPr marL="0" indent="0">
               <a:buNone/>
             </a:pPr>
             <a:r>
@@ -7875,7 +8182,7 @@
           <a:bodyPr wrap="square" lIns="0" tIns="0" rIns="0" bIns="0" rtlCol="0" anchor="t"/>
           <a:lstStyle/>
           <a:p>
-            <a:pPr indent="0" marL="0">
+            <a:pPr marL="0" indent="0">
               <a:buNone/>
             </a:pPr>
             <a:r>
@@ -7914,7 +8221,7 @@
           <a:bodyPr wrap="square" lIns="0" tIns="0" rIns="0" bIns="0" rtlCol="0" anchor="t"/>
           <a:lstStyle/>
           <a:p>
-            <a:pPr indent="0" marL="0">
+            <a:pPr marL="0" indent="0">
               <a:buNone/>
             </a:pPr>
             <a:r>
@@ -7948,6 +8255,7 @@
         <a:solidFill>
           <a:srgbClr val="121B3A"/>
         </a:solidFill>
+        <a:effectLst/>
       </p:bgPr>
     </p:bg>
     <p:spTree>
@@ -7985,11 +8293,11 @@
           <a:bodyPr wrap="square" lIns="0" tIns="0" rIns="0" bIns="0" rtlCol="0" anchor="ctr"/>
           <a:lstStyle/>
           <a:p>
-            <a:pPr indent="0" marL="0">
-              <a:buNone/>
-            </a:pPr>
-            <a:r>
-              <a:rPr lang="en-US" sz="1300" b="1" spc="200" kern="0" dirty="0">
+            <a:pPr marL="0" indent="0">
+              <a:buNone/>
+            </a:pPr>
+            <a:r>
+              <a:rPr lang="en-US" sz="1300" b="1" kern="0" spc="200" dirty="0">
                 <a:solidFill>
                   <a:srgbClr val="F5C842"/>
                 </a:solidFill>
@@ -8024,7 +8332,7 @@
           <a:bodyPr wrap="square" lIns="0" tIns="0" rIns="0" bIns="0" rtlCol="0" anchor="ctr"/>
           <a:lstStyle/>
           <a:p>
-            <a:pPr indent="0" marL="0">
+            <a:pPr marL="0" indent="0">
               <a:buNone/>
             </a:pPr>
             <a:r>
@@ -8063,7 +8371,7 @@
           <a:bodyPr wrap="square" lIns="0" tIns="0" rIns="0" bIns="0" rtlCol="0" anchor="ctr"/>
           <a:lstStyle/>
           <a:p>
-            <a:pPr indent="0" marL="0">
+            <a:pPr marL="0" indent="0">
               <a:buNone/>
             </a:pPr>
             <a:r>
@@ -8102,6 +8410,13 @@
           </a:solidFill>
           <a:ln/>
         </p:spPr>
+        <p:txBody>
+          <a:bodyPr/>
+          <a:lstStyle/>
+          <a:p>
+            <a:endParaRPr lang="es-PE"/>
+          </a:p>
+        </p:txBody>
       </p:sp>
       <p:sp>
         <p:nvSpPr>
@@ -8124,7 +8439,7 @@
           <a:bodyPr wrap="square" lIns="0" tIns="0" rIns="0" bIns="0" rtlCol="0" anchor="ctr"/>
           <a:lstStyle/>
           <a:p>
-            <a:pPr indent="0" marL="0">
+            <a:pPr marL="0" indent="0">
               <a:buNone/>
             </a:pPr>
             <a:r>
@@ -8163,7 +8478,7 @@
           <a:bodyPr wrap="square" lIns="0" tIns="0" rIns="0" bIns="0" rtlCol="0" anchor="t"/>
           <a:lstStyle/>
           <a:p>
-            <a:pPr indent="0" marL="0">
+            <a:pPr marL="0" indent="0">
               <a:buNone/>
             </a:pPr>
             <a:r>
@@ -8202,6 +8517,13 @@
           </a:solidFill>
           <a:ln/>
         </p:spPr>
+        <p:txBody>
+          <a:bodyPr/>
+          <a:lstStyle/>
+          <a:p>
+            <a:endParaRPr lang="es-PE"/>
+          </a:p>
+        </p:txBody>
       </p:sp>
       <p:sp>
         <p:nvSpPr>
@@ -8224,7 +8546,7 @@
           <a:bodyPr wrap="square" lIns="0" tIns="0" rIns="0" bIns="0" rtlCol="0" anchor="ctr"/>
           <a:lstStyle/>
           <a:p>
-            <a:pPr indent="0" marL="0">
+            <a:pPr marL="0" indent="0">
               <a:buNone/>
             </a:pPr>
             <a:r>
@@ -8263,7 +8585,7 @@
           <a:bodyPr wrap="square" lIns="0" tIns="0" rIns="0" bIns="0" rtlCol="0" anchor="t"/>
           <a:lstStyle/>
           <a:p>
-            <a:pPr indent="0" marL="0">
+            <a:pPr marL="0" indent="0">
               <a:buNone/>
             </a:pPr>
             <a:r>
@@ -8297,6 +8619,7 @@
         <a:solidFill>
           <a:srgbClr val="FFFFFF"/>
         </a:solidFill>
+        <a:effectLst/>
       </p:bgPr>
     </p:bg>
     <p:spTree>
@@ -8334,11 +8657,11 @@
           <a:bodyPr wrap="square" lIns="0" tIns="0" rIns="0" bIns="0" rtlCol="0" anchor="ctr"/>
           <a:lstStyle/>
           <a:p>
-            <a:pPr indent="0" marL="0">
-              <a:buNone/>
-            </a:pPr>
-            <a:r>
-              <a:rPr lang="en-US" sz="1300" b="1" spc="200" kern="0" dirty="0">
+            <a:pPr marL="0" indent="0">
+              <a:buNone/>
+            </a:pPr>
+            <a:r>
+              <a:rPr lang="en-US" sz="1300" b="1" kern="0" spc="200" dirty="0">
                 <a:solidFill>
                   <a:srgbClr val="F5C842"/>
                 </a:solidFill>
@@ -8373,7 +8696,7 @@
           <a:bodyPr wrap="square" lIns="0" tIns="0" rIns="0" bIns="0" rtlCol="0" anchor="ctr"/>
           <a:lstStyle/>
           <a:p>
-            <a:pPr indent="0" marL="0">
+            <a:pPr marL="0" indent="0">
               <a:buNone/>
             </a:pPr>
             <a:r>
@@ -8412,6 +8735,13 @@
           </a:solidFill>
           <a:ln/>
         </p:spPr>
+        <p:txBody>
+          <a:bodyPr/>
+          <a:lstStyle/>
+          <a:p>
+            <a:endParaRPr lang="es-PE"/>
+          </a:p>
+        </p:txBody>
       </p:sp>
       <p:sp>
         <p:nvSpPr>
@@ -8434,7 +8764,7 @@
           <a:bodyPr wrap="square" lIns="0" tIns="0" rIns="0" bIns="0" rtlCol="0" anchor="ctr"/>
           <a:lstStyle/>
           <a:p>
-            <a:pPr algn="ctr" indent="0" marL="0">
+            <a:pPr marL="0" indent="0" algn="ctr">
               <a:buNone/>
             </a:pPr>
             <a:r>
@@ -8473,7 +8803,7 @@
           <a:bodyPr wrap="square" lIns="0" tIns="0" rIns="0" bIns="0" rtlCol="0" anchor="ctr"/>
           <a:lstStyle/>
           <a:p>
-            <a:pPr algn="ctr" indent="0" marL="0">
+            <a:pPr marL="0" indent="0" algn="ctr">
               <a:buNone/>
             </a:pPr>
             <a:r>
@@ -8512,7 +8842,7 @@
           <a:bodyPr wrap="square" lIns="0" tIns="0" rIns="0" bIns="0" rtlCol="0" anchor="t"/>
           <a:lstStyle/>
           <a:p>
-            <a:pPr algn="ctr" indent="0" marL="0">
+            <a:pPr marL="0" indent="0" algn="ctr">
               <a:buNone/>
             </a:pPr>
             <a:r>
@@ -8551,6 +8881,13 @@
           </a:solidFill>
           <a:ln/>
         </p:spPr>
+        <p:txBody>
+          <a:bodyPr/>
+          <a:lstStyle/>
+          <a:p>
+            <a:endParaRPr lang="es-PE"/>
+          </a:p>
+        </p:txBody>
       </p:sp>
       <p:sp>
         <p:nvSpPr>
@@ -8573,7 +8910,7 @@
           <a:bodyPr wrap="square" lIns="0" tIns="0" rIns="0" bIns="0" rtlCol="0" anchor="ctr"/>
           <a:lstStyle/>
           <a:p>
-            <a:pPr algn="ctr" indent="0" marL="0">
+            <a:pPr marL="0" indent="0" algn="ctr">
               <a:buNone/>
             </a:pPr>
             <a:r>
@@ -8612,7 +8949,7 @@
           <a:bodyPr wrap="square" lIns="0" tIns="0" rIns="0" bIns="0" rtlCol="0" anchor="ctr"/>
           <a:lstStyle/>
           <a:p>
-            <a:pPr algn="ctr" indent="0" marL="0">
+            <a:pPr marL="0" indent="0" algn="ctr">
               <a:buNone/>
             </a:pPr>
             <a:r>
@@ -8651,7 +8988,7 @@
           <a:bodyPr wrap="square" lIns="0" tIns="0" rIns="0" bIns="0" rtlCol="0" anchor="t"/>
           <a:lstStyle/>
           <a:p>
-            <a:pPr algn="ctr" indent="0" marL="0">
+            <a:pPr marL="0" indent="0" algn="ctr">
               <a:buNone/>
             </a:pPr>
             <a:r>
@@ -8690,6 +9027,13 @@
           </a:solidFill>
           <a:ln/>
         </p:spPr>
+        <p:txBody>
+          <a:bodyPr/>
+          <a:lstStyle/>
+          <a:p>
+            <a:endParaRPr lang="es-PE"/>
+          </a:p>
+        </p:txBody>
       </p:sp>
       <p:sp>
         <p:nvSpPr>
@@ -8712,7 +9056,7 @@
           <a:bodyPr wrap="square" lIns="0" tIns="0" rIns="0" bIns="0" rtlCol="0" anchor="ctr"/>
           <a:lstStyle/>
           <a:p>
-            <a:pPr algn="ctr" indent="0" marL="0">
+            <a:pPr marL="0" indent="0" algn="ctr">
               <a:buNone/>
             </a:pPr>
             <a:r>
@@ -8751,7 +9095,7 @@
           <a:bodyPr wrap="square" lIns="0" tIns="0" rIns="0" bIns="0" rtlCol="0" anchor="ctr"/>
           <a:lstStyle/>
           <a:p>
-            <a:pPr algn="ctr" indent="0" marL="0">
+            <a:pPr marL="0" indent="0" algn="ctr">
               <a:buNone/>
             </a:pPr>
             <a:r>
@@ -8790,7 +9134,7 @@
           <a:bodyPr wrap="square" lIns="0" tIns="0" rIns="0" bIns="0" rtlCol="0" anchor="t"/>
           <a:lstStyle/>
           <a:p>
-            <a:pPr algn="ctr" indent="0" marL="0">
+            <a:pPr marL="0" indent="0" algn="ctr">
               <a:buNone/>
             </a:pPr>
             <a:r>
@@ -8829,6 +9173,13 @@
           </a:solidFill>
           <a:ln/>
         </p:spPr>
+        <p:txBody>
+          <a:bodyPr/>
+          <a:lstStyle/>
+          <a:p>
+            <a:endParaRPr lang="es-PE"/>
+          </a:p>
+        </p:txBody>
       </p:sp>
       <p:sp>
         <p:nvSpPr>
@@ -8851,7 +9202,7 @@
           <a:bodyPr wrap="square" lIns="0" tIns="0" rIns="0" bIns="0" rtlCol="0" anchor="ctr"/>
           <a:lstStyle/>
           <a:p>
-            <a:pPr algn="ctr" indent="0" marL="0">
+            <a:pPr marL="0" indent="0" algn="ctr">
               <a:buNone/>
             </a:pPr>
             <a:r>
@@ -8890,7 +9241,7 @@
           <a:bodyPr wrap="square" lIns="0" tIns="0" rIns="0" bIns="0" rtlCol="0" anchor="ctr"/>
           <a:lstStyle/>
           <a:p>
-            <a:pPr algn="ctr" indent="0" marL="0">
+            <a:pPr marL="0" indent="0" algn="ctr">
               <a:buNone/>
             </a:pPr>
             <a:r>
@@ -8929,7 +9280,7 @@
           <a:bodyPr wrap="square" lIns="0" tIns="0" rIns="0" bIns="0" rtlCol="0" anchor="t"/>
           <a:lstStyle/>
           <a:p>
-            <a:pPr algn="ctr" indent="0" marL="0">
+            <a:pPr marL="0" indent="0" algn="ctr">
               <a:buNone/>
             </a:pPr>
             <a:r>
@@ -8963,6 +9314,7 @@
         <a:solidFill>
           <a:srgbClr val="FFFFFF"/>
         </a:solidFill>
+        <a:effectLst/>
       </p:bgPr>
     </p:bg>
     <p:spTree>
@@ -9000,11 +9352,11 @@
           <a:bodyPr wrap="square" lIns="0" tIns="0" rIns="0" bIns="0" rtlCol="0" anchor="ctr"/>
           <a:lstStyle/>
           <a:p>
-            <a:pPr indent="0" marL="0">
-              <a:buNone/>
-            </a:pPr>
-            <a:r>
-              <a:rPr lang="en-US" sz="1300" b="1" spc="200" kern="0" dirty="0">
+            <a:pPr marL="0" indent="0">
+              <a:buNone/>
+            </a:pPr>
+            <a:r>
+              <a:rPr lang="en-US" sz="1300" b="1" kern="0" spc="200" dirty="0">
                 <a:solidFill>
                   <a:srgbClr val="F5C842"/>
                 </a:solidFill>
@@ -9039,7 +9391,7 @@
           <a:bodyPr wrap="square" lIns="0" tIns="0" rIns="0" bIns="0" rtlCol="0" anchor="ctr"/>
           <a:lstStyle/>
           <a:p>
-            <a:pPr indent="0" marL="0">
+            <a:pPr marL="0" indent="0">
               <a:buNone/>
             </a:pPr>
             <a:r>
@@ -9078,6 +9430,13 @@
           </a:solidFill>
           <a:ln/>
         </p:spPr>
+        <p:txBody>
+          <a:bodyPr/>
+          <a:lstStyle/>
+          <a:p>
+            <a:endParaRPr lang="es-PE"/>
+          </a:p>
+        </p:txBody>
       </p:sp>
       <p:sp>
         <p:nvSpPr>
@@ -9100,11 +9459,11 @@
           <a:bodyPr wrap="square" lIns="0" tIns="0" rIns="0" bIns="0" rtlCol="0" anchor="ctr"/>
           <a:lstStyle/>
           <a:p>
-            <a:pPr indent="0" marL="0">
-              <a:buNone/>
-            </a:pPr>
-            <a:r>
-              <a:rPr lang="en-US" sz="1100" b="1" spc="150" kern="0" dirty="0">
+            <a:pPr marL="0" indent="0">
+              <a:buNone/>
+            </a:pPr>
+            <a:r>
+              <a:rPr lang="en-US" sz="1100" b="1" kern="0" spc="150" dirty="0">
                 <a:solidFill>
                   <a:srgbClr val="C8434E"/>
                 </a:solidFill>
@@ -9139,7 +9498,7 @@
           <a:bodyPr wrap="square" lIns="0" tIns="0" rIns="0" bIns="0" rtlCol="0" anchor="t"/>
           <a:lstStyle/>
           <a:p>
-            <a:pPr indent="0" marL="0">
+            <a:pPr marL="0" indent="0">
               <a:buNone/>
             </a:pPr>
             <a:r>
@@ -9176,6 +9535,13 @@
           </a:solidFill>
           <a:ln/>
         </p:spPr>
+        <p:txBody>
+          <a:bodyPr/>
+          <a:lstStyle/>
+          <a:p>
+            <a:endParaRPr lang="es-PE"/>
+          </a:p>
+        </p:txBody>
       </p:sp>
       <p:sp>
         <p:nvSpPr>
@@ -9198,7 +9564,7 @@
           <a:bodyPr wrap="square" lIns="0" tIns="0" rIns="0" bIns="0" rtlCol="0" anchor="ctr"/>
           <a:lstStyle/>
           <a:p>
-            <a:pPr algn="ctr" indent="0" marL="0">
+            <a:pPr marL="0" indent="0" algn="ctr">
               <a:buNone/>
             </a:pPr>
             <a:r>
@@ -9237,7 +9603,7 @@
           <a:bodyPr wrap="square" lIns="0" tIns="0" rIns="0" bIns="0" rtlCol="0" anchor="ctr"/>
           <a:lstStyle/>
           <a:p>
-            <a:pPr indent="0" marL="0">
+            <a:pPr marL="0" indent="0">
               <a:buNone/>
             </a:pPr>
             <a:r>
@@ -9276,7 +9642,7 @@
           <a:bodyPr wrap="square" lIns="0" tIns="0" rIns="0" bIns="0" rtlCol="0" anchor="ctr"/>
           <a:lstStyle/>
           <a:p>
-            <a:pPr indent="0" marL="0">
+            <a:pPr marL="0" indent="0">
               <a:buNone/>
             </a:pPr>
             <a:r>
@@ -9313,6 +9679,13 @@
           </a:solidFill>
           <a:ln/>
         </p:spPr>
+        <p:txBody>
+          <a:bodyPr/>
+          <a:lstStyle/>
+          <a:p>
+            <a:endParaRPr lang="es-PE"/>
+          </a:p>
+        </p:txBody>
       </p:sp>
       <p:sp>
         <p:nvSpPr>
@@ -9335,7 +9708,7 @@
           <a:bodyPr wrap="square" lIns="0" tIns="0" rIns="0" bIns="0" rtlCol="0" anchor="ctr"/>
           <a:lstStyle/>
           <a:p>
-            <a:pPr algn="ctr" indent="0" marL="0">
+            <a:pPr marL="0" indent="0" algn="ctr">
               <a:buNone/>
             </a:pPr>
             <a:r>
@@ -9374,7 +9747,7 @@
           <a:bodyPr wrap="square" lIns="0" tIns="0" rIns="0" bIns="0" rtlCol="0" anchor="ctr"/>
           <a:lstStyle/>
           <a:p>
-            <a:pPr indent="0" marL="0">
+            <a:pPr marL="0" indent="0">
               <a:buNone/>
             </a:pPr>
             <a:r>
@@ -9413,7 +9786,7 @@
           <a:bodyPr wrap="square" lIns="0" tIns="0" rIns="0" bIns="0" rtlCol="0" anchor="ctr"/>
           <a:lstStyle/>
           <a:p>
-            <a:pPr indent="0" marL="0">
+            <a:pPr marL="0" indent="0">
               <a:buNone/>
             </a:pPr>
             <a:r>
@@ -9450,6 +9823,13 @@
           </a:solidFill>
           <a:ln/>
         </p:spPr>
+        <p:txBody>
+          <a:bodyPr/>
+          <a:lstStyle/>
+          <a:p>
+            <a:endParaRPr lang="es-PE"/>
+          </a:p>
+        </p:txBody>
       </p:sp>
       <p:sp>
         <p:nvSpPr>
@@ -9472,7 +9852,7 @@
           <a:bodyPr wrap="square" lIns="0" tIns="0" rIns="0" bIns="0" rtlCol="0" anchor="ctr"/>
           <a:lstStyle/>
           <a:p>
-            <a:pPr algn="ctr" indent="0" marL="0">
+            <a:pPr marL="0" indent="0" algn="ctr">
               <a:buNone/>
             </a:pPr>
             <a:r>
@@ -9511,7 +9891,7 @@
           <a:bodyPr wrap="square" lIns="0" tIns="0" rIns="0" bIns="0" rtlCol="0" anchor="ctr"/>
           <a:lstStyle/>
           <a:p>
-            <a:pPr indent="0" marL="0">
+            <a:pPr marL="0" indent="0">
               <a:buNone/>
             </a:pPr>
             <a:r>
@@ -9550,7 +9930,7 @@
           <a:bodyPr wrap="square" lIns="0" tIns="0" rIns="0" bIns="0" rtlCol="0" anchor="ctr"/>
           <a:lstStyle/>
           <a:p>
-            <a:pPr indent="0" marL="0">
+            <a:pPr marL="0" indent="0">
               <a:buNone/>
             </a:pPr>
             <a:r>
@@ -9587,6 +9967,13 @@
           </a:solidFill>
           <a:ln/>
         </p:spPr>
+        <p:txBody>
+          <a:bodyPr/>
+          <a:lstStyle/>
+          <a:p>
+            <a:endParaRPr lang="es-PE"/>
+          </a:p>
+        </p:txBody>
       </p:sp>
       <p:sp>
         <p:nvSpPr>
@@ -9609,7 +9996,7 @@
           <a:bodyPr wrap="square" lIns="0" tIns="0" rIns="0" bIns="0" rtlCol="0" anchor="ctr"/>
           <a:lstStyle/>
           <a:p>
-            <a:pPr algn="ctr" indent="0" marL="0">
+            <a:pPr marL="0" indent="0" algn="ctr">
               <a:buNone/>
             </a:pPr>
             <a:r>
@@ -9648,7 +10035,7 @@
           <a:bodyPr wrap="square" lIns="0" tIns="0" rIns="0" bIns="0" rtlCol="0" anchor="ctr"/>
           <a:lstStyle/>
           <a:p>
-            <a:pPr indent="0" marL="0">
+            <a:pPr marL="0" indent="0">
               <a:buNone/>
             </a:pPr>
             <a:r>
@@ -9687,7 +10074,7 @@
           <a:bodyPr wrap="square" lIns="0" tIns="0" rIns="0" bIns="0" rtlCol="0" anchor="ctr"/>
           <a:lstStyle/>
           <a:p>
-            <a:pPr indent="0" marL="0">
+            <a:pPr marL="0" indent="0">
               <a:buNone/>
             </a:pPr>
             <a:r>
@@ -9726,6 +10113,13 @@
           </a:solidFill>
           <a:ln/>
         </p:spPr>
+        <p:txBody>
+          <a:bodyPr/>
+          <a:lstStyle/>
+          <a:p>
+            <a:endParaRPr lang="es-PE"/>
+          </a:p>
+        </p:txBody>
       </p:sp>
       <p:sp>
         <p:nvSpPr>
@@ -9748,11 +10142,11 @@
           <a:bodyPr wrap="square" lIns="0" tIns="0" rIns="0" bIns="0" rtlCol="0" anchor="ctr"/>
           <a:lstStyle/>
           <a:p>
-            <a:pPr indent="0" marL="0">
-              <a:buNone/>
-            </a:pPr>
-            <a:r>
-              <a:rPr lang="en-US" sz="1100" b="1" spc="150" kern="0" dirty="0">
+            <a:pPr marL="0" indent="0">
+              <a:buNone/>
+            </a:pPr>
+            <a:r>
+              <a:rPr lang="en-US" sz="1100" b="1" kern="0" spc="150" dirty="0">
                 <a:solidFill>
                   <a:srgbClr val="1E7A34"/>
                 </a:solidFill>
@@ -9787,7 +10181,7 @@
           <a:bodyPr wrap="square" lIns="0" tIns="0" rIns="0" bIns="0" rtlCol="0" anchor="t"/>
           <a:lstStyle/>
           <a:p>
-            <a:pPr indent="0" marL="0">
+            <a:pPr marL="0" indent="0">
               <a:buNone/>
             </a:pPr>
             <a:r>
@@ -10106,4 +10500,319 @@
     </a:ext>
   </a:extLst>
 </a:theme>
+</file>
+
+<file path=ppt/theme/theme2.xml><?xml version="1.0" encoding="utf-8"?>
+<a:theme xmlns:a="http://schemas.openxmlformats.org/drawingml/2006/main" name="Tema de Office">
+  <a:themeElements>
+    <a:clrScheme name="Office">
+      <a:dk1>
+        <a:sysClr val="windowText" lastClr="000000"/>
+      </a:dk1>
+      <a:lt1>
+        <a:sysClr val="window" lastClr="FFFFFF"/>
+      </a:lt1>
+      <a:dk2>
+        <a:srgbClr val="0E2841"/>
+      </a:dk2>
+      <a:lt2>
+        <a:srgbClr val="E8E8E8"/>
+      </a:lt2>
+      <a:accent1>
+        <a:srgbClr val="156082"/>
+      </a:accent1>
+      <a:accent2>
+        <a:srgbClr val="E97132"/>
+      </a:accent2>
+      <a:accent3>
+        <a:srgbClr val="196B24"/>
+      </a:accent3>
+      <a:accent4>
+        <a:srgbClr val="0F9ED5"/>
+      </a:accent4>
+      <a:accent5>
+        <a:srgbClr val="A02B93"/>
+      </a:accent5>
+      <a:accent6>
+        <a:srgbClr val="4EA72E"/>
+      </a:accent6>
+      <a:hlink>
+        <a:srgbClr val="467886"/>
+      </a:hlink>
+      <a:folHlink>
+        <a:srgbClr val="96607D"/>
+      </a:folHlink>
+    </a:clrScheme>
+    <a:fontScheme name="Office">
+      <a:majorFont>
+        <a:latin typeface="Aptos Display" panose="02110004020202020204"/>
+        <a:ea typeface=""/>
+        <a:cs typeface=""/>
+        <a:font script="Jpan" typeface="游ゴシック Light"/>
+        <a:font script="Hang" typeface="맑은 고딕"/>
+        <a:font script="Hans" typeface="等线 Light"/>
+        <a:font script="Hant" typeface="新細明體"/>
+        <a:font script="Arab" typeface="Times New Roman"/>
+        <a:font script="Hebr" typeface="Times New Roman"/>
+        <a:font script="Thai" typeface="Angsana New"/>
+        <a:font script="Ethi" typeface="Nyala"/>
+        <a:font script="Beng" typeface="Vrinda"/>
+        <a:font script="Gujr" typeface="Shruti"/>
+        <a:font script="Khmr" typeface="MoolBoran"/>
+        <a:font script="Knda" typeface="Tunga"/>
+        <a:font script="Guru" typeface="Raavi"/>
+        <a:font script="Cans" typeface="Euphemia"/>
+        <a:font script="Cher" typeface="Plantagenet Cherokee"/>
+        <a:font script="Yiii" typeface="Microsoft Yi Baiti"/>
+        <a:font script="Tibt" typeface="Microsoft Himalaya"/>
+        <a:font script="Thaa" typeface="MV Boli"/>
+        <a:font script="Deva" typeface="Mangal"/>
+        <a:font script="Telu" typeface="Gautami"/>
+        <a:font script="Taml" typeface="Latha"/>
+        <a:font script="Syrc" typeface="Estrangelo Edessa"/>
+        <a:font script="Orya" typeface="Kalinga"/>
+        <a:font script="Mlym" typeface="Kartika"/>
+        <a:font script="Laoo" typeface="DokChampa"/>
+        <a:font script="Sinh" typeface="Iskoola Pota"/>
+        <a:font script="Mong" typeface="Mongolian Baiti"/>
+        <a:font script="Viet" typeface="Times New Roman"/>
+        <a:font script="Uigh" typeface="Microsoft Uighur"/>
+        <a:font script="Geor" typeface="Sylfaen"/>
+        <a:font script="Armn" typeface="Arial"/>
+        <a:font script="Bugi" typeface="Leelawadee UI"/>
+        <a:font script="Bopo" typeface="Microsoft JhengHei"/>
+        <a:font script="Java" typeface="Javanese Text"/>
+        <a:font script="Lisu" typeface="Segoe UI"/>
+        <a:font script="Mymr" typeface="Myanmar Text"/>
+        <a:font script="Nkoo" typeface="Ebrima"/>
+        <a:font script="Olck" typeface="Nirmala UI"/>
+        <a:font script="Osma" typeface="Ebrima"/>
+        <a:font script="Phag" typeface="Phagspa"/>
+        <a:font script="Syrn" typeface="Estrangelo Edessa"/>
+        <a:font script="Syrj" typeface="Estrangelo Edessa"/>
+        <a:font script="Syre" typeface="Estrangelo Edessa"/>
+        <a:font script="Sora" typeface="Nirmala UI"/>
+        <a:font script="Tale" typeface="Microsoft Tai Le"/>
+        <a:font script="Talu" typeface="Microsoft New Tai Lue"/>
+        <a:font script="Tfng" typeface="Ebrima"/>
+      </a:majorFont>
+      <a:minorFont>
+        <a:latin typeface="Aptos" panose="02110004020202020204"/>
+        <a:ea typeface=""/>
+        <a:cs typeface=""/>
+        <a:font script="Jpan" typeface="游ゴシック"/>
+        <a:font script="Hang" typeface="맑은 고딕"/>
+        <a:font script="Hans" typeface="等线"/>
+        <a:font script="Hant" typeface="新細明體"/>
+        <a:font script="Arab" typeface="Arial"/>
+        <a:font script="Hebr" typeface="Arial"/>
+        <a:font script="Thai" typeface="Cordia New"/>
+        <a:font script="Ethi" typeface="Nyala"/>
+        <a:font script="Beng" typeface="Vrinda"/>
+        <a:font script="Gujr" typeface="Shruti"/>
+        <a:font script="Khmr" typeface="DaunPenh"/>
+        <a:font script="Knda" typeface="Tunga"/>
+        <a:font script="Guru" typeface="Raavi"/>
+        <a:font script="Cans" typeface="Euphemia"/>
+        <a:font script="Cher" typeface="Plantagenet Cherokee"/>
+        <a:font script="Yiii" typeface="Microsoft Yi Baiti"/>
+        <a:font script="Tibt" typeface="Microsoft Himalaya"/>
+        <a:font script="Thaa" typeface="MV Boli"/>
+        <a:font script="Deva" typeface="Mangal"/>
+        <a:font script="Telu" typeface="Gautami"/>
+        <a:font script="Taml" typeface="Latha"/>
+        <a:font script="Syrc" typeface="Estrangelo Edessa"/>
+        <a:font script="Orya" typeface="Kalinga"/>
+        <a:font script="Mlym" typeface="Kartika"/>
+        <a:font script="Laoo" typeface="DokChampa"/>
+        <a:font script="Sinh" typeface="Iskoola Pota"/>
+        <a:font script="Mong" typeface="Mongolian Baiti"/>
+        <a:font script="Viet" typeface="Arial"/>
+        <a:font script="Uigh" typeface="Microsoft Uighur"/>
+        <a:font script="Geor" typeface="Sylfaen"/>
+        <a:font script="Armn" typeface="Arial"/>
+        <a:font script="Bugi" typeface="Leelawadee UI"/>
+        <a:font script="Bopo" typeface="Microsoft JhengHei"/>
+        <a:font script="Java" typeface="Javanese Text"/>
+        <a:font script="Lisu" typeface="Segoe UI"/>
+        <a:font script="Mymr" typeface="Myanmar Text"/>
+        <a:font script="Nkoo" typeface="Ebrima"/>
+        <a:font script="Olck" typeface="Nirmala UI"/>
+        <a:font script="Osma" typeface="Ebrima"/>
+        <a:font script="Phag" typeface="Phagspa"/>
+        <a:font script="Syrn" typeface="Estrangelo Edessa"/>
+        <a:font script="Syrj" typeface="Estrangelo Edessa"/>
+        <a:font script="Syre" typeface="Estrangelo Edessa"/>
+        <a:font script="Sora" typeface="Nirmala UI"/>
+        <a:font script="Tale" typeface="Microsoft Tai Le"/>
+        <a:font script="Talu" typeface="Microsoft New Tai Lue"/>
+        <a:font script="Tfng" typeface="Ebrima"/>
+      </a:minorFont>
+    </a:fontScheme>
+    <a:fmtScheme name="Office">
+      <a:fillStyleLst>
+        <a:solidFill>
+          <a:schemeClr val="phClr"/>
+        </a:solidFill>
+        <a:gradFill rotWithShape="1">
+          <a:gsLst>
+            <a:gs pos="0">
+              <a:schemeClr val="phClr">
+                <a:lumMod val="110000"/>
+                <a:satMod val="105000"/>
+                <a:tint val="67000"/>
+              </a:schemeClr>
+            </a:gs>
+            <a:gs pos="50000">
+              <a:schemeClr val="phClr">
+                <a:lumMod val="105000"/>
+                <a:satMod val="103000"/>
+                <a:tint val="73000"/>
+              </a:schemeClr>
+            </a:gs>
+            <a:gs pos="100000">
+              <a:schemeClr val="phClr">
+                <a:lumMod val="105000"/>
+                <a:satMod val="109000"/>
+                <a:tint val="81000"/>
+              </a:schemeClr>
+            </a:gs>
+          </a:gsLst>
+          <a:lin ang="5400000" scaled="0"/>
+        </a:gradFill>
+        <a:gradFill rotWithShape="1">
+          <a:gsLst>
+            <a:gs pos="0">
+              <a:schemeClr val="phClr">
+                <a:satMod val="103000"/>
+                <a:lumMod val="102000"/>
+                <a:tint val="94000"/>
+              </a:schemeClr>
+            </a:gs>
+            <a:gs pos="50000">
+              <a:schemeClr val="phClr">
+                <a:satMod val="110000"/>
+                <a:lumMod val="100000"/>
+                <a:shade val="100000"/>
+              </a:schemeClr>
+            </a:gs>
+            <a:gs pos="100000">
+              <a:schemeClr val="phClr">
+                <a:lumMod val="99000"/>
+                <a:satMod val="120000"/>
+                <a:shade val="78000"/>
+              </a:schemeClr>
+            </a:gs>
+          </a:gsLst>
+          <a:lin ang="5400000" scaled="0"/>
+        </a:gradFill>
+      </a:fillStyleLst>
+      <a:lnStyleLst>
+        <a:ln w="12700" cap="flat" cmpd="sng" algn="ctr">
+          <a:solidFill>
+            <a:schemeClr val="phClr"/>
+          </a:solidFill>
+          <a:prstDash val="solid"/>
+          <a:miter lim="800000"/>
+        </a:ln>
+        <a:ln w="19050" cap="flat" cmpd="sng" algn="ctr">
+          <a:solidFill>
+            <a:schemeClr val="phClr"/>
+          </a:solidFill>
+          <a:prstDash val="solid"/>
+          <a:miter lim="800000"/>
+        </a:ln>
+        <a:ln w="25400" cap="flat" cmpd="sng" algn="ctr">
+          <a:solidFill>
+            <a:schemeClr val="phClr"/>
+          </a:solidFill>
+          <a:prstDash val="solid"/>
+          <a:miter lim="800000"/>
+        </a:ln>
+      </a:lnStyleLst>
+      <a:effectStyleLst>
+        <a:effectStyle>
+          <a:effectLst/>
+        </a:effectStyle>
+        <a:effectStyle>
+          <a:effectLst/>
+        </a:effectStyle>
+        <a:effectStyle>
+          <a:effectLst>
+            <a:outerShdw blurRad="57150" dist="19050" dir="5400000" algn="ctr" rotWithShape="0">
+              <a:srgbClr val="000000">
+                <a:alpha val="63000"/>
+              </a:srgbClr>
+            </a:outerShdw>
+          </a:effectLst>
+        </a:effectStyle>
+      </a:effectStyleLst>
+      <a:bgFillStyleLst>
+        <a:solidFill>
+          <a:schemeClr val="phClr"/>
+        </a:solidFill>
+        <a:solidFill>
+          <a:schemeClr val="phClr">
+            <a:tint val="95000"/>
+            <a:satMod val="170000"/>
+          </a:schemeClr>
+        </a:solidFill>
+        <a:gradFill rotWithShape="1">
+          <a:gsLst>
+            <a:gs pos="0">
+              <a:schemeClr val="phClr">
+                <a:tint val="93000"/>
+                <a:satMod val="150000"/>
+                <a:shade val="98000"/>
+                <a:lumMod val="102000"/>
+              </a:schemeClr>
+            </a:gs>
+            <a:gs pos="50000">
+              <a:schemeClr val="phClr">
+                <a:tint val="98000"/>
+                <a:satMod val="130000"/>
+                <a:shade val="90000"/>
+                <a:lumMod val="103000"/>
+              </a:schemeClr>
+            </a:gs>
+            <a:gs pos="100000">
+              <a:schemeClr val="phClr">
+                <a:shade val="63000"/>
+                <a:satMod val="120000"/>
+              </a:schemeClr>
+            </a:gs>
+          </a:gsLst>
+          <a:lin ang="5400000" scaled="0"/>
+        </a:gradFill>
+      </a:bgFillStyleLst>
+    </a:fmtScheme>
+  </a:themeElements>
+  <a:objectDefaults>
+    <a:lnDef>
+      <a:spPr/>
+      <a:bodyPr/>
+      <a:lstStyle/>
+      <a:style>
+        <a:lnRef idx="2">
+          <a:schemeClr val="accent1"/>
+        </a:lnRef>
+        <a:fillRef idx="0">
+          <a:schemeClr val="accent1"/>
+        </a:fillRef>
+        <a:effectRef idx="1">
+          <a:schemeClr val="accent1"/>
+        </a:effectRef>
+        <a:fontRef idx="minor">
+          <a:schemeClr val="tx1"/>
+        </a:fontRef>
+      </a:style>
+    </a:lnDef>
+  </a:objectDefaults>
+  <a:extraClrSchemeLst/>
+  <a:extLst>
+    <a:ext uri="{05A4C25C-085E-4340-85A3-A5531E510DB2}">
+      <thm15:themeFamily xmlns:thm15="http://schemas.microsoft.com/office/thememl/2012/main" name="Office Theme" id="{2E142A2C-CD16-42D6-873A-C26D2A0506FA}" vid="{1BDDFF52-6CD6-40A5-AB3C-68EB2F1E4D0A}"/>
+    </a:ext>
+  </a:extLst>
+</a:theme>
 </file>
--- a/Sesion0_Presentacion.pptx
+++ b/Sesion0_Presentacion.pptx
@@ -5601,7 +5601,7 @@
                 <a:ea typeface="Calibri" pitchFamily="34" charset="-122"/>
                 <a:cs typeface="Calibri" pitchFamily="34" charset="-120"/>
               </a:rPr>
-              <a:t>Ingeniera de Sistemas y Magíster en Gestión de la Información (Universitat Politècnica de València, España — becaria PRONABEC). Docente universitaria en UCV (Algoritmos, Gestión de Proyectos, Metodología de Investigación). Especialista en gestión de calidad e información, con experiencia en ISO 9001, Power BI y SharePoint en proyectos de infraestructura.</a:t>
+              <a:t>Ingeniera de Sistemas y Magíster en Gestión de la Información (Universitat Politècnica de Valencia, España). Docente universitaria en UCV (Algoritmos, Gestión de Proyectos, Metodología de Investigación). Especialista en gestión de calidad e información, con experiencia en ISO 9001, Power BI y SharePoint en proyectos de infraestructura.</a:t>
             </a:r>
             <a:endParaRPr lang="en-US" sz="1400" dirty="0"/>
           </a:p>
@@ -6032,7 +6032,29 @@
                 <a:ea typeface="Cambria" pitchFamily="34" charset="-122"/>
                 <a:cs typeface="Cambria" pitchFamily="34" charset="-120"/>
               </a:rPr>
-              <a:t>A través de Vitaminas Tecnológicas, acompaña a equipos de trabajo en la adopción práctica de IA generativa: sin tecnicismos y con foco en resolver tareas reales del día a día.</a:t>
+              <a:t>A través de Vitaminas Tecnológicas, </a:t>
+            </a:r>
+            <a:r>
+              <a:rPr lang="en-US" sz="1600" i="1" dirty="0" err="1">
+                <a:solidFill>
+                  <a:srgbClr val="FFFFFF"/>
+                </a:solidFill>
+                <a:latin typeface="Cambria" pitchFamily="34" charset="0"/>
+                <a:ea typeface="Cambria" pitchFamily="34" charset="-122"/>
+                <a:cs typeface="Cambria" pitchFamily="34" charset="-120"/>
+              </a:rPr>
+              <a:t>acompaño</a:t>
+            </a:r>
+            <a:r>
+              <a:rPr lang="en-US" sz="1600" i="1" dirty="0">
+                <a:solidFill>
+                  <a:srgbClr val="FFFFFF"/>
+                </a:solidFill>
+                <a:latin typeface="Cambria" pitchFamily="34" charset="0"/>
+                <a:ea typeface="Cambria" pitchFamily="34" charset="-122"/>
+                <a:cs typeface="Cambria" pitchFamily="34" charset="-120"/>
+              </a:rPr>
+              <a:t> a equipos de trabajo en la adopción práctica de IA generativa: sin tecnicismos y con foco en resolver tareas reales del día a día.</a:t>
             </a:r>
             <a:endParaRPr lang="en-US" sz="1600" dirty="0"/>
           </a:p>

--- a/Sesion0_Presentacion.pptx
+++ b/Sesion0_Presentacion.pptx
@@ -500,6 +500,13 @@
           </p:nvPr>
         </p:nvSpPr>
         <p:spPr/>
+        <p:txBody>
+          <a:bodyPr/>
+          <a:lstStyle/>
+          <a:p>
+            <a:endParaRPr lang="es-PE"/>
+          </a:p>
+        </p:txBody>
       </p:sp>
       <p:sp>
         <p:nvSpPr>
@@ -584,6 +591,13 @@
           </p:nvPr>
         </p:nvSpPr>
         <p:spPr/>
+        <p:txBody>
+          <a:bodyPr/>
+          <a:lstStyle/>
+          <a:p>
+            <a:endParaRPr lang="es-PE"/>
+          </a:p>
+        </p:txBody>
       </p:sp>
       <p:sp>
         <p:nvSpPr>
@@ -668,6 +682,13 @@
           </p:nvPr>
         </p:nvSpPr>
         <p:spPr/>
+        <p:txBody>
+          <a:bodyPr/>
+          <a:lstStyle/>
+          <a:p>
+            <a:endParaRPr lang="es-PE"/>
+          </a:p>
+        </p:txBody>
       </p:sp>
       <p:sp>
         <p:nvSpPr>
@@ -752,6 +773,13 @@
           </p:nvPr>
         </p:nvSpPr>
         <p:spPr/>
+        <p:txBody>
+          <a:bodyPr/>
+          <a:lstStyle/>
+          <a:p>
+            <a:endParaRPr lang="es-PE"/>
+          </a:p>
+        </p:txBody>
       </p:sp>
       <p:sp>
         <p:nvSpPr>
@@ -836,6 +864,13 @@
           </p:nvPr>
         </p:nvSpPr>
         <p:spPr/>
+        <p:txBody>
+          <a:bodyPr/>
+          <a:lstStyle/>
+          <a:p>
+            <a:endParaRPr lang="es-PE"/>
+          </a:p>
+        </p:txBody>
       </p:sp>
       <p:sp>
         <p:nvSpPr>
@@ -920,6 +955,13 @@
           </p:nvPr>
         </p:nvSpPr>
         <p:spPr/>
+        <p:txBody>
+          <a:bodyPr/>
+          <a:lstStyle/>
+          <a:p>
+            <a:endParaRPr lang="es-PE"/>
+          </a:p>
+        </p:txBody>
       </p:sp>
       <p:sp>
         <p:nvSpPr>
@@ -1004,6 +1046,13 @@
           </p:nvPr>
         </p:nvSpPr>
         <p:spPr/>
+        <p:txBody>
+          <a:bodyPr/>
+          <a:lstStyle/>
+          <a:p>
+            <a:endParaRPr lang="es-PE"/>
+          </a:p>
+        </p:txBody>
       </p:sp>
       <p:sp>
         <p:nvSpPr>
@@ -1088,6 +1137,13 @@
           </p:nvPr>
         </p:nvSpPr>
         <p:spPr/>
+        <p:txBody>
+          <a:bodyPr/>
+          <a:lstStyle/>
+          <a:p>
+            <a:endParaRPr lang="es-PE"/>
+          </a:p>
+        </p:txBody>
       </p:sp>
       <p:sp>
         <p:nvSpPr>
@@ -1172,6 +1228,13 @@
           </p:nvPr>
         </p:nvSpPr>
         <p:spPr/>
+        <p:txBody>
+          <a:bodyPr/>
+          <a:lstStyle/>
+          <a:p>
+            <a:endParaRPr lang="es-PE"/>
+          </a:p>
+        </p:txBody>
       </p:sp>
       <p:sp>
         <p:nvSpPr>
@@ -1256,6 +1319,13 @@
           </p:nvPr>
         </p:nvSpPr>
         <p:spPr/>
+        <p:txBody>
+          <a:bodyPr/>
+          <a:lstStyle/>
+          <a:p>
+            <a:endParaRPr lang="es-PE"/>
+          </a:p>
+        </p:txBody>
       </p:sp>
       <p:sp>
         <p:nvSpPr>
@@ -1340,6 +1410,13 @@
           </p:nvPr>
         </p:nvSpPr>
         <p:spPr/>
+        <p:txBody>
+          <a:bodyPr/>
+          <a:lstStyle/>
+          <a:p>
+            <a:endParaRPr lang="es-PE"/>
+          </a:p>
+        </p:txBody>
       </p:sp>
       <p:sp>
         <p:nvSpPr>
@@ -1424,6 +1501,13 @@
           </p:nvPr>
         </p:nvSpPr>
         <p:spPr/>
+        <p:txBody>
+          <a:bodyPr/>
+          <a:lstStyle/>
+          <a:p>
+            <a:endParaRPr lang="es-PE"/>
+          </a:p>
+        </p:txBody>
       </p:sp>
       <p:sp>
         <p:nvSpPr>
@@ -2287,7 +2371,7 @@
         </p:nvSpPr>
         <p:spPr>
           <a:xfrm>
-            <a:off x="548640" y="1417320"/>
+            <a:off x="548640" y="1492701"/>
             <a:ext cx="10972800" cy="411480"/>
           </a:xfrm>
           <a:prstGeom prst="rect">
@@ -2300,11 +2384,11 @@
           <a:bodyPr wrap="square" lIns="0" tIns="0" rIns="0" bIns="0" rtlCol="0" anchor="ctr"/>
           <a:lstStyle/>
           <a:p>
-            <a:pPr marL="0" indent="0">
-              <a:buNone/>
-            </a:pPr>
-            <a:r>
-              <a:rPr lang="en-US" sz="1400" dirty="0">
+            <a:pPr marL="0" indent="0" algn="just">
+              <a:buNone/>
+            </a:pPr>
+            <a:r>
+              <a:rPr lang="en-US" dirty="0">
                 <a:solidFill>
                   <a:srgbClr val="5A5F73"/>
                 </a:solidFill>
@@ -2312,9 +2396,9 @@
                 <a:ea typeface="Calibri" pitchFamily="34" charset="-122"/>
                 <a:cs typeface="Calibri" pitchFamily="34" charset="-120"/>
               </a:rPr>
-              <a:t>Cada grupo trabaja sobre un caso propio. Escribe tu prompt en el chat de Zoom/Meet — la instructora ejecutará algunos en vivo.</a:t>
-            </a:r>
-            <a:endParaRPr lang="en-US" sz="1400" dirty="0"/>
+              <a:t>Cada grupo trabaja sobre un caso propio. Escribe tu prompt en el chat de Meet — la instructora ejecutará algunos en vivo.</a:t>
+            </a:r>
+            <a:endParaRPr lang="en-US" dirty="0"/>
           </a:p>
         </p:txBody>
       </p:sp>
@@ -2326,7 +2410,7 @@
         </p:nvSpPr>
         <p:spPr>
           <a:xfrm>
-            <a:off x="548640" y="2103120"/>
+            <a:off x="548640" y="2328748"/>
             <a:ext cx="3611880" cy="3840480"/>
           </a:xfrm>
           <a:prstGeom prst="roundRect">
@@ -2343,7 +2427,7 @@
           <a:bodyPr/>
           <a:lstStyle/>
           <a:p>
-            <a:endParaRPr lang="es-PE"/>
+            <a:endParaRPr lang="es-PE" sz="2400"/>
           </a:p>
         </p:txBody>
       </p:sp>
@@ -2355,7 +2439,7 @@
         </p:nvSpPr>
         <p:spPr>
           <a:xfrm>
-            <a:off x="777240" y="2377440"/>
+            <a:off x="777240" y="2603068"/>
             <a:ext cx="3154680" cy="457200"/>
           </a:xfrm>
           <a:prstGeom prst="rect">
@@ -2372,7 +2456,7 @@
               <a:buNone/>
             </a:pPr>
             <a:r>
-              <a:rPr lang="en-US" sz="2200" b="1" dirty="0">
+              <a:rPr lang="en-US" sz="2800" b="1" dirty="0">
                 <a:solidFill>
                   <a:srgbClr val="F5C842"/>
                 </a:solidFill>
@@ -2382,7 +2466,7 @@
               </a:rPr>
               <a:t>Grupo A</a:t>
             </a:r>
-            <a:endParaRPr lang="en-US" sz="2200" dirty="0"/>
+            <a:endParaRPr lang="en-US" sz="2800" dirty="0"/>
           </a:p>
         </p:txBody>
       </p:sp>
@@ -2394,7 +2478,7 @@
         </p:nvSpPr>
         <p:spPr>
           <a:xfrm>
-            <a:off x="777240" y="2926080"/>
+            <a:off x="777240" y="3151708"/>
             <a:ext cx="3154680" cy="365760"/>
           </a:xfrm>
           <a:prstGeom prst="rect">
@@ -2411,7 +2495,7 @@
               <a:buNone/>
             </a:pPr>
             <a:r>
-              <a:rPr lang="en-US" sz="1200" b="1" kern="0" spc="150" dirty="0">
+              <a:rPr lang="en-US" sz="1600" b="1" kern="0" spc="150" dirty="0">
                 <a:solidFill>
                   <a:srgbClr val="C9CEE8"/>
                 </a:solidFill>
@@ -2421,7 +2505,7 @@
               </a:rPr>
               <a:t>COMERCIAL Y SOPORTE</a:t>
             </a:r>
-            <a:endParaRPr lang="en-US" sz="1200" dirty="0"/>
+            <a:endParaRPr lang="en-US" sz="1600" dirty="0"/>
           </a:p>
         </p:txBody>
       </p:sp>
@@ -2433,7 +2517,7 @@
         </p:nvSpPr>
         <p:spPr>
           <a:xfrm>
-            <a:off x="777240" y="3566160"/>
+            <a:off x="777240" y="3791788"/>
             <a:ext cx="3154680" cy="2194560"/>
           </a:xfrm>
           <a:prstGeom prst="rect">
@@ -2450,7 +2534,7 @@
               <a:buNone/>
             </a:pPr>
             <a:r>
-              <a:rPr lang="en-US" sz="1500" dirty="0">
+              <a:rPr lang="en-US" dirty="0">
                 <a:solidFill>
                   <a:srgbClr val="FFFFFF"/>
                 </a:solidFill>
@@ -2460,7 +2544,7 @@
               </a:rPr>
               <a:t>Redacta un mensaje de reactivación para un lead frío de hace 15 días.</a:t>
             </a:r>
-            <a:endParaRPr lang="en-US" sz="1500" dirty="0"/>
+            <a:endParaRPr lang="en-US" dirty="0"/>
           </a:p>
         </p:txBody>
       </p:sp>
@@ -2472,7 +2556,7 @@
         </p:nvSpPr>
         <p:spPr>
           <a:xfrm>
-            <a:off x="4343400" y="2103120"/>
+            <a:off x="4343400" y="2328748"/>
             <a:ext cx="3611880" cy="3840480"/>
           </a:xfrm>
           <a:prstGeom prst="roundRect">
@@ -2489,7 +2573,7 @@
           <a:bodyPr/>
           <a:lstStyle/>
           <a:p>
-            <a:endParaRPr lang="es-PE"/>
+            <a:endParaRPr lang="es-PE" sz="2400"/>
           </a:p>
         </p:txBody>
       </p:sp>
@@ -2501,7 +2585,7 @@
         </p:nvSpPr>
         <p:spPr>
           <a:xfrm>
-            <a:off x="4572000" y="2377440"/>
+            <a:off x="4572000" y="2603068"/>
             <a:ext cx="3154680" cy="457200"/>
           </a:xfrm>
           <a:prstGeom prst="rect">
@@ -2518,7 +2602,7 @@
               <a:buNone/>
             </a:pPr>
             <a:r>
-              <a:rPr lang="en-US" sz="2200" b="1" dirty="0">
+              <a:rPr lang="en-US" sz="2800" b="1" dirty="0">
                 <a:solidFill>
                   <a:srgbClr val="F5C842"/>
                 </a:solidFill>
@@ -2528,7 +2612,7 @@
               </a:rPr>
               <a:t>Grupo B</a:t>
             </a:r>
-            <a:endParaRPr lang="en-US" sz="2200" dirty="0"/>
+            <a:endParaRPr lang="en-US" sz="2800" dirty="0"/>
           </a:p>
         </p:txBody>
       </p:sp>
@@ -2540,7 +2624,7 @@
         </p:nvSpPr>
         <p:spPr>
           <a:xfrm>
-            <a:off x="4572000" y="2926080"/>
+            <a:off x="4572000" y="3151708"/>
             <a:ext cx="3154680" cy="365760"/>
           </a:xfrm>
           <a:prstGeom prst="rect">
@@ -2557,7 +2641,7 @@
               <a:buNone/>
             </a:pPr>
             <a:r>
-              <a:rPr lang="en-US" sz="1200" b="1" kern="0" spc="150" dirty="0">
+              <a:rPr lang="en-US" sz="1600" b="1" kern="0" spc="150" dirty="0">
                 <a:solidFill>
                   <a:srgbClr val="C9CEE8"/>
                 </a:solidFill>
@@ -2567,7 +2651,7 @@
               </a:rPr>
               <a:t>ACADÉMICO Y ADMINISTRATIVO</a:t>
             </a:r>
-            <a:endParaRPr lang="en-US" sz="1200" dirty="0"/>
+            <a:endParaRPr lang="en-US" sz="1600" dirty="0"/>
           </a:p>
         </p:txBody>
       </p:sp>
@@ -2579,7 +2663,7 @@
         </p:nvSpPr>
         <p:spPr>
           <a:xfrm>
-            <a:off x="4572000" y="3566160"/>
+            <a:off x="4572000" y="3791788"/>
             <a:ext cx="3154680" cy="2194560"/>
           </a:xfrm>
           <a:prstGeom prst="rect">
@@ -2596,7 +2680,7 @@
               <a:buNone/>
             </a:pPr>
             <a:r>
-              <a:rPr lang="en-US" sz="1500" dirty="0">
+              <a:rPr lang="en-US" dirty="0">
                 <a:solidFill>
                   <a:srgbClr val="FFFFFF"/>
                 </a:solidFill>
@@ -2606,7 +2690,7 @@
               </a:rPr>
               <a:t>Redacta una respuesta estándar a una alumna que pregunta por su historial de pagos.</a:t>
             </a:r>
-            <a:endParaRPr lang="en-US" sz="1500" dirty="0"/>
+            <a:endParaRPr lang="en-US" dirty="0"/>
           </a:p>
         </p:txBody>
       </p:sp>
@@ -2618,7 +2702,7 @@
         </p:nvSpPr>
         <p:spPr>
           <a:xfrm>
-            <a:off x="8138160" y="2103120"/>
+            <a:off x="8138160" y="2328748"/>
             <a:ext cx="3611880" cy="3840480"/>
           </a:xfrm>
           <a:prstGeom prst="roundRect">
@@ -2635,7 +2719,7 @@
           <a:bodyPr/>
           <a:lstStyle/>
           <a:p>
-            <a:endParaRPr lang="es-PE"/>
+            <a:endParaRPr lang="es-PE" sz="2400"/>
           </a:p>
         </p:txBody>
       </p:sp>
@@ -2647,7 +2731,7 @@
         </p:nvSpPr>
         <p:spPr>
           <a:xfrm>
-            <a:off x="8366760" y="2377440"/>
+            <a:off x="8366760" y="2603068"/>
             <a:ext cx="3154680" cy="457200"/>
           </a:xfrm>
           <a:prstGeom prst="rect">
@@ -2664,7 +2748,7 @@
               <a:buNone/>
             </a:pPr>
             <a:r>
-              <a:rPr lang="en-US" sz="2200" b="1" dirty="0">
+              <a:rPr lang="en-US" sz="2800" b="1" dirty="0">
                 <a:solidFill>
                   <a:srgbClr val="F5C842"/>
                 </a:solidFill>
@@ -2674,7 +2758,7 @@
               </a:rPr>
               <a:t>Grupo C</a:t>
             </a:r>
-            <a:endParaRPr lang="en-US" sz="2200" dirty="0"/>
+            <a:endParaRPr lang="en-US" sz="2800" dirty="0"/>
           </a:p>
         </p:txBody>
       </p:sp>
@@ -2686,7 +2770,7 @@
         </p:nvSpPr>
         <p:spPr>
           <a:xfrm>
-            <a:off x="8366760" y="2926080"/>
+            <a:off x="8366760" y="3151708"/>
             <a:ext cx="3154680" cy="365760"/>
           </a:xfrm>
           <a:prstGeom prst="rect">
@@ -2703,7 +2787,7 @@
               <a:buNone/>
             </a:pPr>
             <a:r>
-              <a:rPr lang="en-US" sz="1200" b="1" kern="0" spc="150" dirty="0">
+              <a:rPr lang="en-US" sz="1600" b="1" kern="0" spc="150" dirty="0">
                 <a:solidFill>
                   <a:srgbClr val="C9CEE8"/>
                 </a:solidFill>
@@ -2713,7 +2797,7 @@
               </a:rPr>
               <a:t>TRÁFICO Y CREATIVO</a:t>
             </a:r>
-            <a:endParaRPr lang="en-US" sz="1200" dirty="0"/>
+            <a:endParaRPr lang="en-US" sz="1600" dirty="0"/>
           </a:p>
         </p:txBody>
       </p:sp>
@@ -2725,7 +2809,7 @@
         </p:nvSpPr>
         <p:spPr>
           <a:xfrm>
-            <a:off x="8366760" y="3566160"/>
+            <a:off x="8366760" y="3791788"/>
             <a:ext cx="3154680" cy="2194560"/>
           </a:xfrm>
           <a:prstGeom prst="rect">
@@ -2742,7 +2826,7 @@
               <a:buNone/>
             </a:pPr>
             <a:r>
-              <a:rPr lang="en-US" sz="1500" dirty="0">
+              <a:rPr lang="en-US" dirty="0">
                 <a:solidFill>
                   <a:srgbClr val="FFFFFF"/>
                 </a:solidFill>
@@ -2752,7 +2836,7 @@
               </a:rPr>
               <a:t>Redacta 3 variaciones de copy para un anuncio de un webinar gratuito.</a:t>
             </a:r>
-            <a:endParaRPr lang="en-US" sz="1500" dirty="0"/>
+            <a:endParaRPr lang="en-US" dirty="0"/>
           </a:p>
         </p:txBody>
       </p:sp>
@@ -2836,7 +2920,7 @@
         </p:nvSpPr>
         <p:spPr>
           <a:xfrm>
-            <a:off x="548640" y="685800"/>
+            <a:off x="548640" y="780801"/>
             <a:ext cx="10972800" cy="822960"/>
           </a:xfrm>
           <a:prstGeom prst="rect">
@@ -2875,7 +2959,7 @@
         </p:nvSpPr>
         <p:spPr>
           <a:xfrm>
-            <a:off x="548640" y="1737360"/>
+            <a:off x="548640" y="1832360"/>
             <a:ext cx="3657600" cy="4297680"/>
           </a:xfrm>
           <a:prstGeom prst="roundRect">
@@ -2904,7 +2988,7 @@
         </p:nvSpPr>
         <p:spPr>
           <a:xfrm>
-            <a:off x="822960" y="2011680"/>
+            <a:off x="822960" y="2106680"/>
             <a:ext cx="640080" cy="640080"/>
           </a:xfrm>
           <a:prstGeom prst="ellipse">
@@ -2939,7 +3023,7 @@
         </p:blipFill>
         <p:spPr>
           <a:xfrm>
-            <a:off x="987552" y="2176272"/>
+            <a:off x="987552" y="2271272"/>
             <a:ext cx="310896" cy="310896"/>
           </a:xfrm>
           <a:prstGeom prst="rect">
@@ -2955,7 +3039,7 @@
         </p:nvSpPr>
         <p:spPr>
           <a:xfrm>
-            <a:off x="822960" y="2834640"/>
+            <a:off x="822960" y="2929640"/>
             <a:ext cx="3108960" cy="411480"/>
           </a:xfrm>
           <a:prstGeom prst="rect">
@@ -2968,11 +3052,11 @@
           <a:bodyPr wrap="square" lIns="0" tIns="0" rIns="0" bIns="0" rtlCol="0" anchor="ctr"/>
           <a:lstStyle/>
           <a:p>
-            <a:pPr marL="0" indent="0">
-              <a:buNone/>
-            </a:pPr>
-            <a:r>
-              <a:rPr lang="en-US" sz="1800" b="1" dirty="0">
+            <a:pPr marL="0" indent="0" algn="just">
+              <a:buNone/>
+            </a:pPr>
+            <a:r>
+              <a:rPr lang="en-US" sz="2400" b="1" dirty="0">
                 <a:solidFill>
                   <a:srgbClr val="121B3A"/>
                 </a:solidFill>
@@ -2982,7 +3066,7 @@
               </a:rPr>
               <a:t>Alucinaciones</a:t>
             </a:r>
-            <a:endParaRPr lang="en-US" sz="1800" dirty="0"/>
+            <a:endParaRPr lang="en-US" sz="2400" dirty="0"/>
           </a:p>
         </p:txBody>
       </p:sp>
@@ -2994,7 +3078,7 @@
         </p:nvSpPr>
         <p:spPr>
           <a:xfrm>
-            <a:off x="822960" y="3291840"/>
+            <a:off x="822960" y="3386840"/>
             <a:ext cx="3108960" cy="1371600"/>
           </a:xfrm>
           <a:prstGeom prst="rect">
@@ -3007,11 +3091,11 @@
           <a:bodyPr wrap="square" lIns="0" tIns="0" rIns="0" bIns="0" rtlCol="0" anchor="t"/>
           <a:lstStyle/>
           <a:p>
-            <a:pPr marL="0" indent="0">
-              <a:buNone/>
-            </a:pPr>
-            <a:r>
-              <a:rPr lang="en-US" sz="1300" dirty="0">
+            <a:pPr marL="0" indent="0" algn="just">
+              <a:buNone/>
+            </a:pPr>
+            <a:r>
+              <a:rPr lang="en-US" sz="1600" dirty="0">
                 <a:solidFill>
                   <a:srgbClr val="1A1A1A"/>
                 </a:solidFill>
@@ -3021,7 +3105,7 @@
               </a:rPr>
               <a:t>La IA puede inventar datos, nombres, cifras o fuentes con total seguridad, sin avisar que no está segura.</a:t>
             </a:r>
-            <a:endParaRPr lang="en-US" sz="1300" dirty="0"/>
+            <a:endParaRPr lang="en-US" sz="1600" dirty="0"/>
           </a:p>
         </p:txBody>
       </p:sp>
@@ -3033,7 +3117,7 @@
         </p:nvSpPr>
         <p:spPr>
           <a:xfrm>
-            <a:off x="822960" y="4800600"/>
+            <a:off x="822960" y="4895600"/>
             <a:ext cx="3108960" cy="9144"/>
           </a:xfrm>
           <a:prstGeom prst="rect">
@@ -3048,7 +3132,8 @@
           <a:bodyPr/>
           <a:lstStyle/>
           <a:p>
-            <a:endParaRPr lang="es-PE"/>
+            <a:pPr algn="just"/>
+            <a:endParaRPr lang="es-PE" sz="2400"/>
           </a:p>
         </p:txBody>
       </p:sp>
@@ -3060,7 +3145,7 @@
         </p:nvSpPr>
         <p:spPr>
           <a:xfrm>
-            <a:off x="822960" y="4937760"/>
+            <a:off x="822960" y="5032760"/>
             <a:ext cx="3108960" cy="1005840"/>
           </a:xfrm>
           <a:prstGeom prst="rect">
@@ -3073,11 +3158,11 @@
           <a:bodyPr wrap="square" lIns="0" tIns="0" rIns="0" bIns="0" rtlCol="0" anchor="t"/>
           <a:lstStyle/>
           <a:p>
-            <a:pPr marL="0" indent="0">
-              <a:buNone/>
-            </a:pPr>
-            <a:r>
-              <a:rPr lang="en-US" sz="1200" i="1" dirty="0">
+            <a:pPr marL="0" indent="0" algn="just">
+              <a:buNone/>
+            </a:pPr>
+            <a:r>
+              <a:rPr lang="en-US" sz="1600" i="1" dirty="0">
                 <a:solidFill>
                   <a:srgbClr val="1E2D6B"/>
                 </a:solidFill>
@@ -3087,7 +3172,7 @@
               </a:rPr>
               <a:t>Regla: cualquier dato concreto que genere la IA debe verificarse antes de usarse.</a:t>
             </a:r>
-            <a:endParaRPr lang="en-US" sz="1200" dirty="0"/>
+            <a:endParaRPr lang="en-US" sz="1600" dirty="0"/>
           </a:p>
         </p:txBody>
       </p:sp>
@@ -3099,7 +3184,7 @@
         </p:nvSpPr>
         <p:spPr>
           <a:xfrm>
-            <a:off x="4389120" y="1737360"/>
+            <a:off x="4389120" y="1832360"/>
             <a:ext cx="3657600" cy="4297680"/>
           </a:xfrm>
           <a:prstGeom prst="roundRect">
@@ -3128,7 +3213,7 @@
         </p:nvSpPr>
         <p:spPr>
           <a:xfrm>
-            <a:off x="4663440" y="2011680"/>
+            <a:off x="4663440" y="2106680"/>
             <a:ext cx="640080" cy="640080"/>
           </a:xfrm>
           <a:prstGeom prst="ellipse">
@@ -3163,7 +3248,7 @@
         </p:blipFill>
         <p:spPr>
           <a:xfrm>
-            <a:off x="4828032" y="2176272"/>
+            <a:off x="4828032" y="2271272"/>
             <a:ext cx="310896" cy="310896"/>
           </a:xfrm>
           <a:prstGeom prst="rect">
@@ -3179,7 +3264,7 @@
         </p:nvSpPr>
         <p:spPr>
           <a:xfrm>
-            <a:off x="4663440" y="2834640"/>
+            <a:off x="4663440" y="2929640"/>
             <a:ext cx="3108960" cy="411480"/>
           </a:xfrm>
           <a:prstGeom prst="rect">
@@ -3192,11 +3277,11 @@
           <a:bodyPr wrap="square" lIns="0" tIns="0" rIns="0" bIns="0" rtlCol="0" anchor="ctr"/>
           <a:lstStyle/>
           <a:p>
-            <a:pPr marL="0" indent="0">
-              <a:buNone/>
-            </a:pPr>
-            <a:r>
-              <a:rPr lang="en-US" sz="1800" b="1" dirty="0">
+            <a:pPr marL="0" indent="0" algn="just">
+              <a:buNone/>
+            </a:pPr>
+            <a:r>
+              <a:rPr lang="en-US" sz="2400" b="1" dirty="0">
                 <a:solidFill>
                   <a:srgbClr val="121B3A"/>
                 </a:solidFill>
@@ -3206,7 +3291,7 @@
               </a:rPr>
               <a:t>Confidencialidad</a:t>
             </a:r>
-            <a:endParaRPr lang="en-US" sz="1800" dirty="0"/>
+            <a:endParaRPr lang="en-US" sz="2400" dirty="0"/>
           </a:p>
         </p:txBody>
       </p:sp>
@@ -3218,7 +3303,7 @@
         </p:nvSpPr>
         <p:spPr>
           <a:xfrm>
-            <a:off x="4663440" y="3291840"/>
+            <a:off x="4663440" y="3386840"/>
             <a:ext cx="3108960" cy="1371600"/>
           </a:xfrm>
           <a:prstGeom prst="rect">
@@ -3231,11 +3316,11 @@
           <a:bodyPr wrap="square" lIns="0" tIns="0" rIns="0" bIns="0" rtlCol="0" anchor="t"/>
           <a:lstStyle/>
           <a:p>
-            <a:pPr marL="0" indent="0">
-              <a:buNone/>
-            </a:pPr>
-            <a:r>
-              <a:rPr lang="en-US" sz="1300" dirty="0">
+            <a:pPr marL="0" indent="0" algn="just">
+              <a:buNone/>
+            </a:pPr>
+            <a:r>
+              <a:rPr lang="en-US" sz="1600" dirty="0">
                 <a:solidFill>
                   <a:srgbClr val="1A1A1A"/>
                 </a:solidFill>
@@ -3245,7 +3330,7 @@
               </a:rPr>
               <a:t>Lo que escribes en una IA puede no ser privado, según la herramienta y configuración.</a:t>
             </a:r>
-            <a:endParaRPr lang="en-US" sz="1300" dirty="0"/>
+            <a:endParaRPr lang="en-US" sz="1600" dirty="0"/>
           </a:p>
         </p:txBody>
       </p:sp>
@@ -3257,7 +3342,7 @@
         </p:nvSpPr>
         <p:spPr>
           <a:xfrm>
-            <a:off x="4663440" y="4800600"/>
+            <a:off x="4663440" y="4895600"/>
             <a:ext cx="3108960" cy="9144"/>
           </a:xfrm>
           <a:prstGeom prst="rect">
@@ -3272,7 +3357,8 @@
           <a:bodyPr/>
           <a:lstStyle/>
           <a:p>
-            <a:endParaRPr lang="es-PE"/>
+            <a:pPr algn="just"/>
+            <a:endParaRPr lang="es-PE" sz="2400"/>
           </a:p>
         </p:txBody>
       </p:sp>
@@ -3284,7 +3370,7 @@
         </p:nvSpPr>
         <p:spPr>
           <a:xfrm>
-            <a:off x="4663440" y="4937760"/>
+            <a:off x="4663440" y="5032760"/>
             <a:ext cx="3108960" cy="1005840"/>
           </a:xfrm>
           <a:prstGeom prst="rect">
@@ -3297,11 +3383,11 @@
           <a:bodyPr wrap="square" lIns="0" tIns="0" rIns="0" bIns="0" rtlCol="0" anchor="t"/>
           <a:lstStyle/>
           <a:p>
-            <a:pPr marL="0" indent="0">
-              <a:buNone/>
-            </a:pPr>
-            <a:r>
-              <a:rPr lang="en-US" sz="1200" i="1" dirty="0">
+            <a:pPr marL="0" indent="0" algn="just">
+              <a:buNone/>
+            </a:pPr>
+            <a:r>
+              <a:rPr lang="en-US" sz="1600" i="1" dirty="0">
                 <a:solidFill>
                   <a:srgbClr val="1E2D6B"/>
                 </a:solidFill>
@@ -3311,7 +3397,7 @@
               </a:rPr>
               <a:t>Regla EEA: nunca compartir datos personales completos de alumnos, finanzas internas, ni contraseñas.</a:t>
             </a:r>
-            <a:endParaRPr lang="en-US" sz="1200" dirty="0"/>
+            <a:endParaRPr lang="en-US" sz="1600" dirty="0"/>
           </a:p>
         </p:txBody>
       </p:sp>
@@ -3323,7 +3409,7 @@
         </p:nvSpPr>
         <p:spPr>
           <a:xfrm>
-            <a:off x="8229600" y="1737360"/>
+            <a:off x="8229600" y="1832360"/>
             <a:ext cx="3657600" cy="4297680"/>
           </a:xfrm>
           <a:prstGeom prst="roundRect">
@@ -3352,7 +3438,7 @@
         </p:nvSpPr>
         <p:spPr>
           <a:xfrm>
-            <a:off x="8503920" y="2011680"/>
+            <a:off x="8503920" y="2106680"/>
             <a:ext cx="640080" cy="640080"/>
           </a:xfrm>
           <a:prstGeom prst="ellipse">
@@ -3387,7 +3473,7 @@
         </p:blipFill>
         <p:spPr>
           <a:xfrm>
-            <a:off x="8668512" y="2176272"/>
+            <a:off x="8668512" y="2271272"/>
             <a:ext cx="310896" cy="310896"/>
           </a:xfrm>
           <a:prstGeom prst="rect">
@@ -3403,7 +3489,7 @@
         </p:nvSpPr>
         <p:spPr>
           <a:xfrm>
-            <a:off x="8503920" y="2834640"/>
+            <a:off x="8503920" y="2929640"/>
             <a:ext cx="3108960" cy="411480"/>
           </a:xfrm>
           <a:prstGeom prst="rect">
@@ -3416,11 +3502,11 @@
           <a:bodyPr wrap="square" lIns="0" tIns="0" rIns="0" bIns="0" rtlCol="0" anchor="ctr"/>
           <a:lstStyle/>
           <a:p>
-            <a:pPr marL="0" indent="0">
-              <a:buNone/>
-            </a:pPr>
-            <a:r>
-              <a:rPr lang="en-US" sz="1800" b="1" dirty="0">
+            <a:pPr marL="0" indent="0" algn="just">
+              <a:buNone/>
+            </a:pPr>
+            <a:r>
+              <a:rPr lang="en-US" sz="2400" b="1" dirty="0">
                 <a:solidFill>
                   <a:srgbClr val="121B3A"/>
                 </a:solidFill>
@@ -3430,7 +3516,7 @@
               </a:rPr>
               <a:t>Dependencia</a:t>
             </a:r>
-            <a:endParaRPr lang="en-US" sz="1800" dirty="0"/>
+            <a:endParaRPr lang="en-US" sz="2400" dirty="0"/>
           </a:p>
         </p:txBody>
       </p:sp>
@@ -3442,7 +3528,7 @@
         </p:nvSpPr>
         <p:spPr>
           <a:xfrm>
-            <a:off x="8503920" y="3291840"/>
+            <a:off x="8503920" y="3386840"/>
             <a:ext cx="3108960" cy="1371600"/>
           </a:xfrm>
           <a:prstGeom prst="rect">
@@ -3455,11 +3541,11 @@
           <a:bodyPr wrap="square" lIns="0" tIns="0" rIns="0" bIns="0" rtlCol="0" anchor="t"/>
           <a:lstStyle/>
           <a:p>
-            <a:pPr marL="0" indent="0">
-              <a:buNone/>
-            </a:pPr>
-            <a:r>
-              <a:rPr lang="en-US" sz="1300" dirty="0">
+            <a:pPr marL="0" indent="0" algn="just">
+              <a:buNone/>
+            </a:pPr>
+            <a:r>
+              <a:rPr lang="en-US" sz="1600" dirty="0">
                 <a:solidFill>
                   <a:srgbClr val="1A1A1A"/>
                 </a:solidFill>
@@ -3469,7 +3555,7 @@
               </a:rPr>
               <a:t>La IA acelera, no reemplaza el criterio. Si no puedes explicar lo que generó, no lo envíes tal cual.</a:t>
             </a:r>
-            <a:endParaRPr lang="en-US" sz="1300" dirty="0"/>
+            <a:endParaRPr lang="en-US" sz="1600" dirty="0"/>
           </a:p>
         </p:txBody>
       </p:sp>
@@ -3481,7 +3567,7 @@
         </p:nvSpPr>
         <p:spPr>
           <a:xfrm>
-            <a:off x="8503920" y="4800600"/>
+            <a:off x="8503920" y="4895600"/>
             <a:ext cx="3108960" cy="9144"/>
           </a:xfrm>
           <a:prstGeom prst="rect">
@@ -3496,7 +3582,8 @@
           <a:bodyPr/>
           <a:lstStyle/>
           <a:p>
-            <a:endParaRPr lang="es-PE"/>
+            <a:pPr algn="just"/>
+            <a:endParaRPr lang="es-PE" sz="2400"/>
           </a:p>
         </p:txBody>
       </p:sp>
@@ -3508,7 +3595,7 @@
         </p:nvSpPr>
         <p:spPr>
           <a:xfrm>
-            <a:off x="8503920" y="4937760"/>
+            <a:off x="8503920" y="5032760"/>
             <a:ext cx="3108960" cy="1005840"/>
           </a:xfrm>
           <a:prstGeom prst="rect">
@@ -3521,11 +3608,11 @@
           <a:bodyPr wrap="square" lIns="0" tIns="0" rIns="0" bIns="0" rtlCol="0" anchor="t"/>
           <a:lstStyle/>
           <a:p>
-            <a:pPr marL="0" indent="0">
-              <a:buNone/>
-            </a:pPr>
-            <a:r>
-              <a:rPr lang="en-US" sz="1200" i="1" dirty="0">
+            <a:pPr marL="0" indent="0" algn="just">
+              <a:buNone/>
+            </a:pPr>
+            <a:r>
+              <a:rPr lang="en-US" sz="1600" i="1" dirty="0">
                 <a:solidFill>
                   <a:srgbClr val="1E2D6B"/>
                 </a:solidFill>
@@ -3535,7 +3622,7 @@
               </a:rPr>
               <a:t>Regla: revisa, valida y aporta criterio — siempre.</a:t>
             </a:r>
-            <a:endParaRPr lang="en-US" sz="1200" dirty="0"/>
+            <a:endParaRPr lang="en-US" sz="1600" dirty="0"/>
           </a:p>
         </p:txBody>
       </p:sp>
@@ -3675,7 +3762,8 @@
           <a:bodyPr/>
           <a:lstStyle/>
           <a:p>
-            <a:endParaRPr lang="es-PE"/>
+            <a:pPr algn="just"/>
+            <a:endParaRPr lang="es-PE" sz="2400"/>
           </a:p>
         </p:txBody>
       </p:sp>
@@ -3724,11 +3812,11 @@
           <a:bodyPr wrap="square" lIns="0" tIns="0" rIns="0" bIns="0" rtlCol="0" anchor="ctr"/>
           <a:lstStyle/>
           <a:p>
-            <a:pPr marL="0" indent="0">
-              <a:buNone/>
-            </a:pPr>
-            <a:r>
-              <a:rPr lang="en-US" sz="1700" b="1" dirty="0">
+            <a:pPr marL="0" indent="0" algn="just">
+              <a:buNone/>
+            </a:pPr>
+            <a:r>
+              <a:rPr lang="en-US" sz="2000" b="1" dirty="0">
                 <a:solidFill>
                   <a:srgbClr val="121B3A"/>
                 </a:solidFill>
@@ -3738,7 +3826,7 @@
               </a:rPr>
               <a:t>Kahoot — autoevaluación</a:t>
             </a:r>
-            <a:endParaRPr lang="en-US" sz="1700" dirty="0"/>
+            <a:endParaRPr lang="en-US" sz="2000" dirty="0"/>
           </a:p>
         </p:txBody>
       </p:sp>
@@ -3763,11 +3851,11 @@
           <a:bodyPr wrap="square" lIns="0" tIns="0" rIns="0" bIns="0" rtlCol="0" anchor="t"/>
           <a:lstStyle/>
           <a:p>
-            <a:pPr marL="0" indent="0">
-              <a:buNone/>
-            </a:pPr>
-            <a:r>
-              <a:rPr lang="en-US" sz="1300" dirty="0">
+            <a:pPr marL="0" indent="0" algn="just">
+              <a:buNone/>
+            </a:pPr>
+            <a:r>
+              <a:rPr lang="en-US" sz="1600" dirty="0">
                 <a:solidFill>
                   <a:srgbClr val="121B3A"/>
                 </a:solidFill>
@@ -3777,7 +3865,7 @@
               </a:rPr>
               <a:t>8 preguntas sobre lo visto hoy. Disponible también en el Google Site como repaso.</a:t>
             </a:r>
-            <a:endParaRPr lang="en-US" sz="1300" dirty="0"/>
+            <a:endParaRPr lang="en-US" sz="1600" dirty="0"/>
           </a:p>
         </p:txBody>
       </p:sp>
@@ -3806,7 +3894,8 @@
           <a:bodyPr/>
           <a:lstStyle/>
           <a:p>
-            <a:endParaRPr lang="es-PE"/>
+            <a:pPr algn="just"/>
+            <a:endParaRPr lang="es-PE" sz="2400"/>
           </a:p>
         </p:txBody>
       </p:sp>
@@ -3831,11 +3920,11 @@
           <a:bodyPr wrap="square" lIns="0" tIns="0" rIns="0" bIns="0" rtlCol="0" anchor="ctr"/>
           <a:lstStyle/>
           <a:p>
-            <a:pPr marL="0" indent="0">
-              <a:buNone/>
-            </a:pPr>
-            <a:r>
-              <a:rPr lang="en-US" sz="1700" b="1" dirty="0">
+            <a:pPr marL="0" indent="0" algn="just">
+              <a:buNone/>
+            </a:pPr>
+            <a:r>
+              <a:rPr lang="en-US" sz="2000" b="1" dirty="0">
                 <a:solidFill>
                   <a:srgbClr val="FFFFFF"/>
                 </a:solidFill>
@@ -3845,7 +3934,7 @@
               </a:rPr>
               <a:t>Kit de prompts EEA</a:t>
             </a:r>
-            <a:endParaRPr lang="en-US" sz="1700" dirty="0"/>
+            <a:endParaRPr lang="en-US" sz="2000" dirty="0"/>
           </a:p>
         </p:txBody>
       </p:sp>
@@ -3870,11 +3959,11 @@
           <a:bodyPr wrap="square" lIns="0" tIns="0" rIns="0" bIns="0" rtlCol="0" anchor="t"/>
           <a:lstStyle/>
           <a:p>
-            <a:pPr marL="0" indent="0">
-              <a:buNone/>
-            </a:pPr>
-            <a:r>
-              <a:rPr lang="en-US" sz="1300" dirty="0">
+            <a:pPr marL="0" indent="0" algn="just">
+              <a:buNone/>
+            </a:pPr>
+            <a:r>
+              <a:rPr lang="en-US" sz="1600" dirty="0">
                 <a:solidFill>
                   <a:srgbClr val="C9CEE8"/>
                 </a:solidFill>
@@ -3884,7 +3973,7 @@
               </a:rPr>
               <a:t>Documento colaborativo en el Google Site del curso — se construye sesión por sesión con los prompts validados.</a:t>
             </a:r>
-            <a:endParaRPr lang="en-US" sz="1300" dirty="0"/>
+            <a:endParaRPr lang="en-US" sz="1600" dirty="0"/>
           </a:p>
         </p:txBody>
       </p:sp>
@@ -3909,11 +3998,11 @@
           <a:bodyPr wrap="square" lIns="0" tIns="0" rIns="0" bIns="0" rtlCol="0" anchor="ctr"/>
           <a:lstStyle/>
           <a:p>
-            <a:pPr marL="0" indent="0">
-              <a:buNone/>
-            </a:pPr>
-            <a:r>
-              <a:rPr lang="en-US" sz="1600" b="1" kern="0" spc="150" dirty="0">
+            <a:pPr marL="0" indent="0" algn="just">
+              <a:buNone/>
+            </a:pPr>
+            <a:r>
+              <a:rPr lang="en-US" sz="2000" b="1" kern="0" spc="150" dirty="0">
                 <a:solidFill>
                   <a:srgbClr val="F5C842"/>
                 </a:solidFill>
@@ -3923,7 +4012,7 @@
               </a:rPr>
               <a:t>Próximas sesiones</a:t>
             </a:r>
-            <a:endParaRPr lang="en-US" sz="1600" dirty="0"/>
+            <a:endParaRPr lang="en-US" sz="2000" dirty="0"/>
           </a:p>
         </p:txBody>
       </p:sp>
@@ -3952,7 +4041,8 @@
           <a:bodyPr/>
           <a:lstStyle/>
           <a:p>
-            <a:endParaRPr lang="es-PE"/>
+            <a:pPr algn="just"/>
+            <a:endParaRPr lang="es-PE" sz="2400"/>
           </a:p>
         </p:txBody>
       </p:sp>
@@ -3977,11 +4067,11 @@
           <a:bodyPr wrap="square" lIns="0" tIns="0" rIns="0" bIns="0" rtlCol="0" anchor="ctr"/>
           <a:lstStyle/>
           <a:p>
-            <a:pPr marL="0" indent="0">
-              <a:buNone/>
-            </a:pPr>
-            <a:r>
-              <a:rPr lang="en-US" sz="1800" b="1" dirty="0">
+            <a:pPr marL="0" indent="0" algn="just">
+              <a:buNone/>
+            </a:pPr>
+            <a:r>
+              <a:rPr lang="en-US" sz="2400" b="1" dirty="0">
                 <a:solidFill>
                   <a:srgbClr val="F5C842"/>
                 </a:solidFill>
@@ -3991,7 +4081,7 @@
               </a:rPr>
               <a:t>Grupo A</a:t>
             </a:r>
-            <a:endParaRPr lang="en-US" sz="1800" dirty="0"/>
+            <a:endParaRPr lang="en-US" sz="2400" dirty="0"/>
           </a:p>
         </p:txBody>
       </p:sp>
@@ -4016,11 +4106,11 @@
           <a:bodyPr wrap="square" lIns="0" tIns="0" rIns="0" bIns="0" rtlCol="0" anchor="ctr"/>
           <a:lstStyle/>
           <a:p>
-            <a:pPr marL="0" indent="0">
-              <a:buNone/>
-            </a:pPr>
-            <a:r>
-              <a:rPr lang="en-US" sz="1200" b="1" dirty="0">
+            <a:pPr marL="0" indent="0" algn="just">
+              <a:buNone/>
+            </a:pPr>
+            <a:r>
+              <a:rPr lang="en-US" sz="1600" b="1" dirty="0">
                 <a:solidFill>
                   <a:srgbClr val="C9CEE8"/>
                 </a:solidFill>
@@ -4030,7 +4120,7 @@
               </a:rPr>
               <a:t>Comercial y Soporte</a:t>
             </a:r>
-            <a:endParaRPr lang="en-US" sz="1200" dirty="0"/>
+            <a:endParaRPr lang="en-US" sz="1600" dirty="0"/>
           </a:p>
         </p:txBody>
       </p:sp>
@@ -4055,11 +4145,11 @@
           <a:bodyPr wrap="square" lIns="0" tIns="0" rIns="0" bIns="0" rtlCol="0" anchor="t"/>
           <a:lstStyle/>
           <a:p>
-            <a:pPr marL="0" indent="0">
-              <a:buNone/>
-            </a:pPr>
-            <a:r>
-              <a:rPr lang="en-US" sz="1250" dirty="0">
+            <a:pPr marL="0" indent="0" algn="just">
+              <a:buNone/>
+            </a:pPr>
+            <a:r>
+              <a:rPr lang="en-US" sz="1600" dirty="0">
                 <a:solidFill>
                   <a:srgbClr val="FFFFFF"/>
                 </a:solidFill>
@@ -4069,7 +4159,7 @@
               </a:rPr>
               <a:t>A1 · A2 — Ventas, gestión y reportes</a:t>
             </a:r>
-            <a:endParaRPr lang="en-US" sz="1250" dirty="0"/>
+            <a:endParaRPr lang="en-US" sz="1600" dirty="0"/>
           </a:p>
         </p:txBody>
       </p:sp>
@@ -4098,7 +4188,8 @@
           <a:bodyPr/>
           <a:lstStyle/>
           <a:p>
-            <a:endParaRPr lang="es-PE"/>
+            <a:pPr algn="just"/>
+            <a:endParaRPr lang="es-PE" sz="2400"/>
           </a:p>
         </p:txBody>
       </p:sp>
@@ -4123,11 +4214,11 @@
           <a:bodyPr wrap="square" lIns="0" tIns="0" rIns="0" bIns="0" rtlCol="0" anchor="ctr"/>
           <a:lstStyle/>
           <a:p>
-            <a:pPr marL="0" indent="0">
-              <a:buNone/>
-            </a:pPr>
-            <a:r>
-              <a:rPr lang="en-US" sz="1800" b="1" dirty="0">
+            <a:pPr marL="0" indent="0" algn="just">
+              <a:buNone/>
+            </a:pPr>
+            <a:r>
+              <a:rPr lang="en-US" sz="2400" b="1" dirty="0">
                 <a:solidFill>
                   <a:srgbClr val="F5C842"/>
                 </a:solidFill>
@@ -4137,7 +4228,7 @@
               </a:rPr>
               <a:t>Grupo B</a:t>
             </a:r>
-            <a:endParaRPr lang="en-US" sz="1800" dirty="0"/>
+            <a:endParaRPr lang="en-US" sz="2400" dirty="0"/>
           </a:p>
         </p:txBody>
       </p:sp>
@@ -4162,11 +4253,11 @@
           <a:bodyPr wrap="square" lIns="0" tIns="0" rIns="0" bIns="0" rtlCol="0" anchor="ctr"/>
           <a:lstStyle/>
           <a:p>
-            <a:pPr marL="0" indent="0">
-              <a:buNone/>
-            </a:pPr>
-            <a:r>
-              <a:rPr lang="en-US" sz="1200" b="1" dirty="0">
+            <a:pPr marL="0" indent="0" algn="just">
+              <a:buNone/>
+            </a:pPr>
+            <a:r>
+              <a:rPr lang="en-US" sz="1600" b="1" dirty="0">
                 <a:solidFill>
                   <a:srgbClr val="C9CEE8"/>
                 </a:solidFill>
@@ -4176,7 +4267,7 @@
               </a:rPr>
               <a:t>Académico y Administrativo</a:t>
             </a:r>
-            <a:endParaRPr lang="en-US" sz="1200" dirty="0"/>
+            <a:endParaRPr lang="en-US" sz="1600" dirty="0"/>
           </a:p>
         </p:txBody>
       </p:sp>
@@ -4201,11 +4292,11 @@
           <a:bodyPr wrap="square" lIns="0" tIns="0" rIns="0" bIns="0" rtlCol="0" anchor="t"/>
           <a:lstStyle/>
           <a:p>
-            <a:pPr marL="0" indent="0">
-              <a:buNone/>
-            </a:pPr>
-            <a:r>
-              <a:rPr lang="en-US" sz="1250" dirty="0">
+            <a:pPr marL="0" indent="0" algn="just">
+              <a:buNone/>
+            </a:pPr>
+            <a:r>
+              <a:rPr lang="en-US" sz="1600" dirty="0">
                 <a:solidFill>
                   <a:srgbClr val="FFFFFF"/>
                 </a:solidFill>
@@ -4215,7 +4306,7 @@
               </a:rPr>
               <a:t>B1 · B2 — Material didáctico y coordinación</a:t>
             </a:r>
-            <a:endParaRPr lang="en-US" sz="1250" dirty="0"/>
+            <a:endParaRPr lang="en-US" sz="1600" dirty="0"/>
           </a:p>
         </p:txBody>
       </p:sp>
@@ -4244,7 +4335,8 @@
           <a:bodyPr/>
           <a:lstStyle/>
           <a:p>
-            <a:endParaRPr lang="es-PE"/>
+            <a:pPr algn="just"/>
+            <a:endParaRPr lang="es-PE" sz="2400"/>
           </a:p>
         </p:txBody>
       </p:sp>
@@ -4269,11 +4361,11 @@
           <a:bodyPr wrap="square" lIns="0" tIns="0" rIns="0" bIns="0" rtlCol="0" anchor="ctr"/>
           <a:lstStyle/>
           <a:p>
-            <a:pPr marL="0" indent="0">
-              <a:buNone/>
-            </a:pPr>
-            <a:r>
-              <a:rPr lang="en-US" sz="1800" b="1" dirty="0">
+            <a:pPr marL="0" indent="0" algn="just">
+              <a:buNone/>
+            </a:pPr>
+            <a:r>
+              <a:rPr lang="en-US" sz="2400" b="1" dirty="0">
                 <a:solidFill>
                   <a:srgbClr val="F5C842"/>
                 </a:solidFill>
@@ -4283,7 +4375,7 @@
               </a:rPr>
               <a:t>Grupo C</a:t>
             </a:r>
-            <a:endParaRPr lang="en-US" sz="1800" dirty="0"/>
+            <a:endParaRPr lang="en-US" sz="2400" dirty="0"/>
           </a:p>
         </p:txBody>
       </p:sp>
@@ -4308,11 +4400,11 @@
           <a:bodyPr wrap="square" lIns="0" tIns="0" rIns="0" bIns="0" rtlCol="0" anchor="ctr"/>
           <a:lstStyle/>
           <a:p>
-            <a:pPr marL="0" indent="0">
-              <a:buNone/>
-            </a:pPr>
-            <a:r>
-              <a:rPr lang="en-US" sz="1200" b="1" dirty="0">
+            <a:pPr marL="0" indent="0" algn="just">
+              <a:buNone/>
+            </a:pPr>
+            <a:r>
+              <a:rPr lang="en-US" sz="1600" b="1" dirty="0">
                 <a:solidFill>
                   <a:srgbClr val="C9CEE8"/>
                 </a:solidFill>
@@ -4322,7 +4414,7 @@
               </a:rPr>
               <a:t>Tráfico y Creativo</a:t>
             </a:r>
-            <a:endParaRPr lang="en-US" sz="1200" dirty="0"/>
+            <a:endParaRPr lang="en-US" sz="1600" dirty="0"/>
           </a:p>
         </p:txBody>
       </p:sp>
@@ -4347,11 +4439,11 @@
           <a:bodyPr wrap="square" lIns="0" tIns="0" rIns="0" bIns="0" rtlCol="0" anchor="t"/>
           <a:lstStyle/>
           <a:p>
-            <a:pPr marL="0" indent="0">
-              <a:buNone/>
-            </a:pPr>
-            <a:r>
-              <a:rPr lang="en-US" sz="1250" dirty="0">
+            <a:pPr marL="0" indent="0" algn="just">
+              <a:buNone/>
+            </a:pPr>
+            <a:r>
+              <a:rPr lang="en-US" sz="1600" dirty="0">
                 <a:solidFill>
                   <a:srgbClr val="FFFFFF"/>
                 </a:solidFill>
@@ -4361,7 +4453,7 @@
               </a:rPr>
               <a:t>C1 · C2 — Contenido y análisis de métricas</a:t>
             </a:r>
-            <a:endParaRPr lang="en-US" sz="1250" dirty="0"/>
+            <a:endParaRPr lang="en-US" sz="1600" dirty="0"/>
           </a:p>
         </p:txBody>
       </p:sp>
@@ -4630,7 +4722,7 @@
               <a:buNone/>
             </a:pPr>
             <a:r>
-              <a:rPr lang="en-US" sz="1250" dirty="0">
+              <a:rPr lang="en-US" sz="1400" dirty="0">
                 <a:solidFill>
                   <a:srgbClr val="5A5F73"/>
                 </a:solidFill>
@@ -4640,7 +4732,7 @@
               </a:rPr>
               <a:t>Encuesta de encuadre: tu punto de partida con la IA</a:t>
             </a:r>
-            <a:endParaRPr lang="en-US" sz="1250" dirty="0"/>
+            <a:endParaRPr lang="en-US" sz="1400" dirty="0"/>
           </a:p>
         </p:txBody>
       </p:sp>
@@ -4798,7 +4890,7 @@
               <a:buNone/>
             </a:pPr>
             <a:r>
-              <a:rPr lang="en-US" sz="1250" dirty="0">
+              <a:rPr lang="en-US" sz="1400" dirty="0">
                 <a:solidFill>
                   <a:srgbClr val="5A5F73"/>
                 </a:solidFill>
@@ -4808,7 +4900,7 @@
               </a:rPr>
               <a:t>Idea central, analogía y roles que puede cumplir la IA</a:t>
             </a:r>
-            <a:endParaRPr lang="en-US" sz="1250" dirty="0"/>
+            <a:endParaRPr lang="en-US" sz="1400" dirty="0"/>
           </a:p>
         </p:txBody>
       </p:sp>
@@ -4966,7 +5058,7 @@
               <a:buNone/>
             </a:pPr>
             <a:r>
-              <a:rPr lang="en-US" sz="1250" dirty="0">
+              <a:rPr lang="en-US" sz="1400" dirty="0">
                 <a:solidFill>
                   <a:srgbClr val="5A5F73"/>
                 </a:solidFill>
@@ -4976,7 +5068,7 @@
               </a:rPr>
               <a:t>Rol, Interacción, Tarea, Adaptabilidad + ejercicio guiado</a:t>
             </a:r>
-            <a:endParaRPr lang="en-US" sz="1250" dirty="0"/>
+            <a:endParaRPr lang="en-US" sz="1400" dirty="0"/>
           </a:p>
         </p:txBody>
       </p:sp>
@@ -5134,7 +5226,7 @@
               <a:buNone/>
             </a:pPr>
             <a:r>
-              <a:rPr lang="en-US" sz="1250" dirty="0">
+              <a:rPr lang="en-US" sz="1400" dirty="0">
                 <a:solidFill>
                   <a:srgbClr val="5A5F73"/>
                 </a:solidFill>
@@ -5144,7 +5236,7 @@
               </a:rPr>
               <a:t>Alucinaciones, confidencialidad y criterio de uso</a:t>
             </a:r>
-            <a:endParaRPr lang="en-US" sz="1250" dirty="0"/>
+            <a:endParaRPr lang="en-US" sz="1400" dirty="0"/>
           </a:p>
         </p:txBody>
       </p:sp>
@@ -5302,7 +5394,7 @@
               <a:buNone/>
             </a:pPr>
             <a:r>
-              <a:rPr lang="en-US" sz="1250" dirty="0">
+              <a:rPr lang="en-US" sz="1400" dirty="0">
                 <a:solidFill>
                   <a:srgbClr val="5A5F73"/>
                 </a:solidFill>
@@ -5312,7 +5404,7 @@
               </a:rPr>
               <a:t>Autoevaluación de lo aprendido (si el tiempo lo permite)</a:t>
             </a:r>
-            <a:endParaRPr lang="en-US" sz="1250" dirty="0"/>
+            <a:endParaRPr lang="en-US" sz="1400" dirty="0"/>
           </a:p>
         </p:txBody>
       </p:sp>
@@ -5482,8 +5574,8 @@
         </p:blipFill>
         <p:spPr>
           <a:xfrm>
-            <a:off x="324996" y="1312333"/>
-            <a:ext cx="2985347" cy="2985347"/>
+            <a:off x="487680" y="1312333"/>
+            <a:ext cx="2822663" cy="2985347"/>
           </a:xfrm>
           <a:prstGeom prst="ellipse">
             <a:avLst/>
@@ -5498,7 +5590,7 @@
         </p:nvSpPr>
         <p:spPr>
           <a:xfrm>
-            <a:off x="3474720" y="1554480"/>
+            <a:off x="3474720" y="1331459"/>
             <a:ext cx="8229600" cy="548640"/>
           </a:xfrm>
           <a:prstGeom prst="rect">
@@ -5537,7 +5629,7 @@
         </p:nvSpPr>
         <p:spPr>
           <a:xfrm>
-            <a:off x="3474720" y="2103120"/>
+            <a:off x="3474720" y="1880099"/>
             <a:ext cx="8229600" cy="320040"/>
           </a:xfrm>
           <a:prstGeom prst="rect">
@@ -5576,7 +5668,7 @@
         </p:nvSpPr>
         <p:spPr>
           <a:xfrm>
-            <a:off x="3474720" y="2606040"/>
+            <a:off x="3474720" y="2383019"/>
             <a:ext cx="8046720" cy="1554480"/>
           </a:xfrm>
           <a:prstGeom prst="rect">
@@ -5589,7 +5681,7 @@
           <a:bodyPr wrap="square" lIns="0" tIns="0" rIns="0" bIns="0" rtlCol="0" anchor="t"/>
           <a:lstStyle/>
           <a:p>
-            <a:pPr marL="0" indent="0">
+            <a:pPr marL="0" indent="0" algn="just">
               <a:buNone/>
             </a:pPr>
             <a:r>
@@ -6315,7 +6407,7 @@
               <a:buNone/>
             </a:pPr>
             <a:r>
-              <a:rPr lang="en-US" sz="1500" b="1" dirty="0">
+              <a:rPr lang="en-US" b="1" dirty="0">
                 <a:solidFill>
                   <a:srgbClr val="121B3A"/>
                 </a:solidFill>
@@ -6325,7 +6417,7 @@
               </a:rPr>
               <a:t>1.  Nube de palabras</a:t>
             </a:r>
-            <a:endParaRPr lang="en-US" sz="1500" dirty="0"/>
+            <a:endParaRPr lang="en-US" dirty="0"/>
           </a:p>
         </p:txBody>
       </p:sp>
@@ -6354,7 +6446,7 @@
               <a:buNone/>
             </a:pPr>
             <a:r>
-              <a:rPr lang="en-US" sz="1350" i="1" dirty="0">
+              <a:rPr lang="en-US" sz="1600" i="1" dirty="0">
                 <a:solidFill>
                   <a:srgbClr val="5A5F73"/>
                 </a:solidFill>
@@ -6364,7 +6456,7 @@
               </a:rPr>
               <a:t>En una palabra: ¿qué es la IA para ti?</a:t>
             </a:r>
-            <a:endParaRPr lang="en-US" sz="1350" dirty="0"/>
+            <a:endParaRPr lang="en-US" sz="1600" dirty="0"/>
           </a:p>
         </p:txBody>
       </p:sp>
@@ -6473,7 +6565,7 @@
               <a:buNone/>
             </a:pPr>
             <a:r>
-              <a:rPr lang="en-US" sz="1500" b="1" dirty="0">
+              <a:rPr lang="en-US" b="1" dirty="0">
                 <a:solidFill>
                   <a:srgbClr val="121B3A"/>
                 </a:solidFill>
@@ -6483,7 +6575,7 @@
               </a:rPr>
               <a:t>2.  Escala</a:t>
             </a:r>
-            <a:endParaRPr lang="en-US" sz="1500" dirty="0"/>
+            <a:endParaRPr lang="en-US" dirty="0"/>
           </a:p>
         </p:txBody>
       </p:sp>
@@ -6512,7 +6604,7 @@
               <a:buNone/>
             </a:pPr>
             <a:r>
-              <a:rPr lang="en-US" sz="1350" i="1" dirty="0">
+              <a:rPr lang="en-US" sz="1600" i="1" dirty="0">
                 <a:solidFill>
                   <a:srgbClr val="5A5F73"/>
                 </a:solidFill>
@@ -6522,7 +6614,7 @@
               </a:rPr>
               <a:t>¿Usas herramientas de IA en tu trabajo diario? (de acuerdo / en desacuerdo)</a:t>
             </a:r>
-            <a:endParaRPr lang="en-US" sz="1350" dirty="0"/>
+            <a:endParaRPr lang="en-US" sz="1600" dirty="0"/>
           </a:p>
         </p:txBody>
       </p:sp>
@@ -6631,7 +6723,7 @@
               <a:buNone/>
             </a:pPr>
             <a:r>
-              <a:rPr lang="en-US" sz="1500" b="1" dirty="0">
+              <a:rPr lang="en-US" b="1" dirty="0">
                 <a:solidFill>
                   <a:srgbClr val="121B3A"/>
                 </a:solidFill>
@@ -6641,7 +6733,7 @@
               </a:rPr>
               <a:t>3.  Opción múltiple</a:t>
             </a:r>
-            <a:endParaRPr lang="en-US" sz="1500" dirty="0"/>
+            <a:endParaRPr lang="en-US" dirty="0"/>
           </a:p>
         </p:txBody>
       </p:sp>
@@ -6670,7 +6762,7 @@
               <a:buNone/>
             </a:pPr>
             <a:r>
-              <a:rPr lang="en-US" sz="1350" i="1" dirty="0">
+              <a:rPr lang="en-US" sz="1600" i="1" dirty="0">
                 <a:solidFill>
                   <a:srgbClr val="5A5F73"/>
                 </a:solidFill>
@@ -6680,7 +6772,7 @@
               </a:rPr>
               <a:t>¿Cuál de estas herramientas has usado al menos una vez: ChatGPT, Gemini, Claude?</a:t>
             </a:r>
-            <a:endParaRPr lang="en-US" sz="1350" dirty="0"/>
+            <a:endParaRPr lang="en-US" sz="1600" dirty="0"/>
           </a:p>
         </p:txBody>
       </p:sp>
@@ -6789,7 +6881,7 @@
               <a:buNone/>
             </a:pPr>
             <a:r>
-              <a:rPr lang="en-US" sz="1500" b="1" dirty="0">
+              <a:rPr lang="en-US" b="1" dirty="0">
                 <a:solidFill>
                   <a:srgbClr val="121B3A"/>
                 </a:solidFill>
@@ -6799,7 +6891,7 @@
               </a:rPr>
               <a:t>4.  Pregunta abierta</a:t>
             </a:r>
-            <a:endParaRPr lang="en-US" sz="1500" dirty="0"/>
+            <a:endParaRPr lang="en-US" dirty="0"/>
           </a:p>
         </p:txBody>
       </p:sp>
@@ -6828,7 +6920,7 @@
               <a:buNone/>
             </a:pPr>
             <a:r>
-              <a:rPr lang="en-US" sz="1350" i="1" dirty="0">
+              <a:rPr lang="en-US" sz="1600" i="1" dirty="0">
                 <a:solidFill>
                   <a:srgbClr val="5A5F73"/>
                 </a:solidFill>
@@ -6838,7 +6930,7 @@
               </a:rPr>
               <a:t>Piensa en una tarea repetitiva de tu día a día que te quita tiempo. Escríbela.</a:t>
             </a:r>
-            <a:endParaRPr lang="en-US" sz="1350" dirty="0"/>
+            <a:endParaRPr lang="en-US" sz="1600" dirty="0"/>
           </a:p>
         </p:txBody>
       </p:sp>
@@ -7007,7 +7099,7 @@
               <a:buNone/>
             </a:pPr>
             <a:r>
-              <a:rPr lang="en-US" sz="1800" b="1" dirty="0">
+              <a:rPr lang="en-US" sz="2000" b="1" dirty="0">
                 <a:solidFill>
                   <a:srgbClr val="FFFFFF"/>
                 </a:solidFill>
@@ -7017,14 +7109,14 @@
               </a:rPr>
               <a:t>Una IA generativa no “sabe” cosas como una base de datos.</a:t>
             </a:r>
-            <a:endParaRPr lang="en-US" sz="1800" dirty="0"/>
+            <a:endParaRPr lang="en-US" sz="2000" dirty="0"/>
           </a:p>
           <a:p>
             <a:pPr marL="0" indent="0">
               <a:buNone/>
             </a:pPr>
             <a:r>
-              <a:rPr lang="en-US" sz="1800" dirty="0">
+              <a:rPr lang="en-US" sz="2000" dirty="0">
                 <a:solidFill>
                   <a:srgbClr val="FFFFFF"/>
                 </a:solidFill>
@@ -7034,14 +7126,31 @@
               </a:rPr>
               <a:t> </a:t>
             </a:r>
-            <a:endParaRPr lang="en-US" sz="1800" dirty="0"/>
+            <a:endParaRPr lang="en-US" sz="2000" dirty="0"/>
+          </a:p>
+          <a:p>
+            <a:pPr marL="0" indent="0" algn="just">
+              <a:buNone/>
+            </a:pPr>
+            <a:r>
+              <a:rPr lang="en-US" sz="2000" dirty="0">
+                <a:solidFill>
+                  <a:srgbClr val="FFFFFF"/>
+                </a:solidFill>
+                <a:latin typeface="Calibri" pitchFamily="34" charset="0"/>
+                <a:ea typeface="Calibri" pitchFamily="34" charset="-122"/>
+                <a:cs typeface="Calibri" pitchFamily="34" charset="-120"/>
+              </a:rPr>
+              <a:t>Predice la palabra más probable que sigue, según patrones aprendidos de enormes cantidades de texto.</a:t>
+            </a:r>
+            <a:endParaRPr lang="en-US" sz="2000" dirty="0"/>
           </a:p>
           <a:p>
             <a:pPr marL="0" indent="0">
               <a:buNone/>
             </a:pPr>
             <a:r>
-              <a:rPr lang="en-US" sz="1800" dirty="0">
+              <a:rPr lang="en-US" sz="2000" dirty="0">
                 <a:solidFill>
                   <a:srgbClr val="FFFFFF"/>
                 </a:solidFill>
@@ -7049,16 +7158,16 @@
                 <a:ea typeface="Calibri" pitchFamily="34" charset="-122"/>
                 <a:cs typeface="Calibri" pitchFamily="34" charset="-120"/>
               </a:rPr>
-              <a:t>Predice la palabra más probable que sigue, según patrones aprendidos de enormes cantidades de texto.</a:t>
-            </a:r>
-            <a:endParaRPr lang="en-US" sz="1800" dirty="0"/>
+              <a:t> </a:t>
+            </a:r>
+            <a:endParaRPr lang="en-US" sz="2000" dirty="0"/>
           </a:p>
           <a:p>
             <a:pPr marL="0" indent="0">
               <a:buNone/>
             </a:pPr>
             <a:r>
-              <a:rPr lang="en-US" sz="1800" dirty="0">
+              <a:rPr lang="en-US" sz="2000" dirty="0">
                 <a:solidFill>
                   <a:srgbClr val="FFFFFF"/>
                 </a:solidFill>
@@ -7066,26 +7175,9 @@
                 <a:ea typeface="Calibri" pitchFamily="34" charset="-122"/>
                 <a:cs typeface="Calibri" pitchFamily="34" charset="-120"/>
               </a:rPr>
-              <a:t> </a:t>
-            </a:r>
-            <a:endParaRPr lang="en-US" sz="1800" dirty="0"/>
-          </a:p>
-          <a:p>
-            <a:pPr marL="0" indent="0">
-              <a:buNone/>
-            </a:pPr>
-            <a:r>
-              <a:rPr lang="en-US" sz="1800" dirty="0">
-                <a:solidFill>
-                  <a:srgbClr val="FFFFFF"/>
-                </a:solidFill>
-                <a:latin typeface="Calibri" pitchFamily="34" charset="0"/>
-                <a:ea typeface="Calibri" pitchFamily="34" charset="-122"/>
-                <a:cs typeface="Calibri" pitchFamily="34" charset="-120"/>
-              </a:rPr>
               <a:t>Por eso entiende lenguaje natural, contexto y matices — pero también por eso puede inventar con total seguridad (“alucinar”).</a:t>
             </a:r>
-            <a:endParaRPr lang="en-US" sz="1800" dirty="0"/>
+            <a:endParaRPr lang="en-US" sz="2000" dirty="0"/>
           </a:p>
         </p:txBody>
       </p:sp>
@@ -7143,7 +7235,7 @@
               <a:buNone/>
             </a:pPr>
             <a:r>
-              <a:rPr lang="en-US" sz="1400" b="1" kern="0" spc="150" dirty="0">
+              <a:rPr lang="en-US" b="1" kern="0" spc="150" dirty="0">
                 <a:solidFill>
                   <a:srgbClr val="121B3A"/>
                 </a:solidFill>
@@ -7153,7 +7245,7 @@
               </a:rPr>
               <a:t>La analogía</a:t>
             </a:r>
-            <a:endParaRPr lang="en-US" sz="1400" dirty="0"/>
+            <a:endParaRPr lang="en-US" dirty="0"/>
           </a:p>
         </p:txBody>
       </p:sp>
@@ -7182,7 +7274,7 @@
               <a:buNone/>
             </a:pPr>
             <a:r>
-              <a:rPr lang="en-US" sz="1700" dirty="0">
+              <a:rPr lang="en-US" sz="2000" dirty="0">
                 <a:solidFill>
                   <a:srgbClr val="121B3A"/>
                 </a:solidFill>
@@ -7192,7 +7284,7 @@
               </a:rPr>
               <a:t>Es como el autocompletado de tu celular, pero con memoria de todo lo escrito en internet y la capacidad de razonar varios pasos hacia adelante.</a:t>
             </a:r>
-            <a:endParaRPr lang="en-US" sz="1700" dirty="0"/>
+            <a:endParaRPr lang="en-US" sz="2000" dirty="0"/>
           </a:p>
         </p:txBody>
       </p:sp>
@@ -7217,11 +7309,24 @@
           <a:bodyPr wrap="square" lIns="0" tIns="0" rIns="0" bIns="0" rtlCol="0" anchor="t"/>
           <a:lstStyle/>
           <a:p>
-            <a:pPr marL="0" indent="0">
-              <a:buNone/>
-            </a:pPr>
-            <a:r>
-              <a:rPr lang="en-US" sz="1300" i="1" dirty="0">
+            <a:pPr marL="0" indent="0" algn="ctr">
+              <a:buNone/>
+            </a:pPr>
+            <a:endParaRPr lang="en-US" sz="1600" i="1" dirty="0">
+              <a:solidFill>
+                <a:srgbClr val="121B3A"/>
+              </a:solidFill>
+              <a:latin typeface="Calibri" pitchFamily="34" charset="0"/>
+              <a:ea typeface="Calibri" pitchFamily="34" charset="-122"/>
+              <a:cs typeface="Calibri" pitchFamily="34" charset="-120"/>
+            </a:endParaRPr>
+          </a:p>
+          <a:p>
+            <a:pPr marL="0" indent="0" algn="ctr">
+              <a:buNone/>
+            </a:pPr>
+            <a:r>
+              <a:rPr lang="en-US" sz="1700" i="1" dirty="0">
                 <a:solidFill>
                   <a:srgbClr val="121B3A"/>
                 </a:solidFill>
@@ -7231,7 +7336,7 @@
               </a:rPr>
               <a:t>No es magia ni “una persona adentro”: es un sistema de predicción extremadamente sofisticado.</a:t>
             </a:r>
-            <a:endParaRPr lang="en-US" sz="1300" dirty="0"/>
+            <a:endParaRPr lang="en-US" sz="1700" dirty="0"/>
           </a:p>
         </p:txBody>
       </p:sp>
@@ -7354,7 +7459,7 @@
         </p:nvSpPr>
         <p:spPr>
           <a:xfrm>
-            <a:off x="548640" y="1417320"/>
+            <a:off x="548640" y="1606887"/>
             <a:ext cx="10972800" cy="411480"/>
           </a:xfrm>
           <a:prstGeom prst="rect">
@@ -7367,11 +7472,11 @@
           <a:bodyPr wrap="square" lIns="0" tIns="0" rIns="0" bIns="0" rtlCol="0" anchor="ctr"/>
           <a:lstStyle/>
           <a:p>
-            <a:pPr marL="0" indent="0">
-              <a:buNone/>
-            </a:pPr>
-            <a:r>
-              <a:rPr lang="en-US" sz="1400" dirty="0">
+            <a:pPr marL="0" indent="0" algn="just">
+              <a:buNone/>
+            </a:pPr>
+            <a:r>
+              <a:rPr lang="en-US" sz="1600" dirty="0">
                 <a:solidFill>
                   <a:srgbClr val="5A5F73"/>
                 </a:solidFill>
@@ -7381,7 +7486,7 @@
               </a:rPr>
               <a:t>Más útil que comparar herramientas es pensar en el rol que necesitas que cumpla la IA. A mayor rol “creador”, mayor responsabilidad de revisión de tu parte.</a:t>
             </a:r>
-            <a:endParaRPr lang="en-US" sz="1400" dirty="0"/>
+            <a:endParaRPr lang="en-US" sz="1600" dirty="0"/>
           </a:p>
         </p:txBody>
       </p:sp>
@@ -7393,7 +7498,7 @@
         </p:nvSpPr>
         <p:spPr>
           <a:xfrm>
-            <a:off x="548640" y="2057400"/>
+            <a:off x="548640" y="2246967"/>
             <a:ext cx="3657600" cy="1783080"/>
           </a:xfrm>
           <a:prstGeom prst="roundRect">
@@ -7410,7 +7515,7 @@
           <a:bodyPr/>
           <a:lstStyle/>
           <a:p>
-            <a:endParaRPr lang="es-PE"/>
+            <a:endParaRPr lang="es-PE" sz="2400"/>
           </a:p>
         </p:txBody>
       </p:sp>
@@ -7422,7 +7527,7 @@
         </p:nvSpPr>
         <p:spPr>
           <a:xfrm>
-            <a:off x="777240" y="2194560"/>
+            <a:off x="777240" y="2384127"/>
             <a:ext cx="3200400" cy="365760"/>
           </a:xfrm>
           <a:prstGeom prst="rect">
@@ -7439,7 +7544,7 @@
               <a:buNone/>
             </a:pPr>
             <a:r>
-              <a:rPr lang="en-US" sz="1600" b="1" dirty="0">
+              <a:rPr lang="en-US" sz="2000" b="1" dirty="0">
                 <a:solidFill>
                   <a:srgbClr val="1E2D6B"/>
                 </a:solidFill>
@@ -7449,7 +7554,7 @@
               </a:rPr>
               <a:t>Espejo</a:t>
             </a:r>
-            <a:endParaRPr lang="en-US" sz="1600" dirty="0"/>
+            <a:endParaRPr lang="en-US" sz="2000" dirty="0"/>
           </a:p>
         </p:txBody>
       </p:sp>
@@ -7461,7 +7566,7 @@
         </p:nvSpPr>
         <p:spPr>
           <a:xfrm>
-            <a:off x="777240" y="2560320"/>
+            <a:off x="777240" y="2749887"/>
             <a:ext cx="3200400" cy="502920"/>
           </a:xfrm>
           <a:prstGeom prst="rect">
@@ -7478,7 +7583,7 @@
               <a:buNone/>
             </a:pPr>
             <a:r>
-              <a:rPr lang="en-US" sz="1150" dirty="0">
+              <a:rPr lang="en-US" sz="1400" dirty="0">
                 <a:solidFill>
                   <a:srgbClr val="1A1A1A"/>
                 </a:solidFill>
@@ -7488,7 +7593,7 @@
               </a:rPr>
               <a:t>Refleja y analiza lo que tú produces, sin decidir.</a:t>
             </a:r>
-            <a:endParaRPr lang="en-US" sz="1150" dirty="0"/>
+            <a:endParaRPr lang="en-US" sz="1400" dirty="0"/>
           </a:p>
         </p:txBody>
       </p:sp>
@@ -7500,7 +7605,7 @@
         </p:nvSpPr>
         <p:spPr>
           <a:xfrm>
-            <a:off x="777240" y="3108960"/>
+            <a:off x="777240" y="3298527"/>
             <a:ext cx="3200400" cy="640080"/>
           </a:xfrm>
           <a:prstGeom prst="rect">
@@ -7517,7 +7622,7 @@
               <a:buNone/>
             </a:pPr>
             <a:r>
-              <a:rPr lang="en-US" sz="1050" i="1" dirty="0">
+              <a:rPr lang="en-US" sz="1200" i="1" dirty="0">
                 <a:solidFill>
                   <a:srgbClr val="5A5F73"/>
                 </a:solidFill>
@@ -7527,7 +7632,7 @@
               </a:rPr>
               <a:t>EEA: Revisar un correo ya escrito y detectar tono o errores.</a:t>
             </a:r>
-            <a:endParaRPr lang="en-US" sz="1050" dirty="0"/>
+            <a:endParaRPr lang="en-US" sz="1200" dirty="0"/>
           </a:p>
         </p:txBody>
       </p:sp>
@@ -7539,7 +7644,7 @@
         </p:nvSpPr>
         <p:spPr>
           <a:xfrm>
-            <a:off x="4434840" y="2057400"/>
+            <a:off x="4434840" y="2246967"/>
             <a:ext cx="3657600" cy="1783080"/>
           </a:xfrm>
           <a:prstGeom prst="roundRect">
@@ -7556,7 +7661,7 @@
           <a:bodyPr/>
           <a:lstStyle/>
           <a:p>
-            <a:endParaRPr lang="es-PE"/>
+            <a:endParaRPr lang="es-PE" sz="2400"/>
           </a:p>
         </p:txBody>
       </p:sp>
@@ -7568,7 +7673,7 @@
         </p:nvSpPr>
         <p:spPr>
           <a:xfrm>
-            <a:off x="4663440" y="2194560"/>
+            <a:off x="4663440" y="2384127"/>
             <a:ext cx="3200400" cy="365760"/>
           </a:xfrm>
           <a:prstGeom prst="rect">
@@ -7585,7 +7690,7 @@
               <a:buNone/>
             </a:pPr>
             <a:r>
-              <a:rPr lang="en-US" sz="1600" b="1" dirty="0">
+              <a:rPr lang="en-US" sz="2000" b="1" dirty="0">
                 <a:solidFill>
                   <a:srgbClr val="1E2D6B"/>
                 </a:solidFill>
@@ -7595,7 +7700,7 @@
               </a:rPr>
               <a:t>Informador</a:t>
             </a:r>
-            <a:endParaRPr lang="en-US" sz="1600" dirty="0"/>
+            <a:endParaRPr lang="en-US" sz="2000" dirty="0"/>
           </a:p>
         </p:txBody>
       </p:sp>
@@ -7607,7 +7712,7 @@
         </p:nvSpPr>
         <p:spPr>
           <a:xfrm>
-            <a:off x="4663440" y="2560320"/>
+            <a:off x="4663440" y="2749887"/>
             <a:ext cx="3200400" cy="502920"/>
           </a:xfrm>
           <a:prstGeom prst="rect">
@@ -7624,7 +7729,7 @@
               <a:buNone/>
             </a:pPr>
             <a:r>
-              <a:rPr lang="en-US" sz="1150" dirty="0">
+              <a:rPr lang="en-US" sz="1400" dirty="0">
                 <a:solidFill>
                   <a:srgbClr val="1A1A1A"/>
                 </a:solidFill>
@@ -7634,7 +7739,7 @@
               </a:rPr>
               <a:t>Entrega información organizada, sin sugerir acción.</a:t>
             </a:r>
-            <a:endParaRPr lang="en-US" sz="1150" dirty="0"/>
+            <a:endParaRPr lang="en-US" sz="1400" dirty="0"/>
           </a:p>
         </p:txBody>
       </p:sp>
@@ -7646,7 +7751,7 @@
         </p:nvSpPr>
         <p:spPr>
           <a:xfrm>
-            <a:off x="4663440" y="3108960"/>
+            <a:off x="4663440" y="3298527"/>
             <a:ext cx="3200400" cy="640080"/>
           </a:xfrm>
           <a:prstGeom prst="rect">
@@ -7663,7 +7768,7 @@
               <a:buNone/>
             </a:pPr>
             <a:r>
-              <a:rPr lang="en-US" sz="1050" i="1" dirty="0">
+              <a:rPr lang="en-US" sz="1200" i="1" dirty="0">
                 <a:solidFill>
                   <a:srgbClr val="5A5F73"/>
                 </a:solidFill>
@@ -7673,7 +7778,7 @@
               </a:rPr>
               <a:t>EEA: Listar plantillas de mensajes de seguimiento por tipo de lead.</a:t>
             </a:r>
-            <a:endParaRPr lang="en-US" sz="1050" dirty="0"/>
+            <a:endParaRPr lang="en-US" sz="1200" dirty="0"/>
           </a:p>
         </p:txBody>
       </p:sp>
@@ -7685,7 +7790,7 @@
         </p:nvSpPr>
         <p:spPr>
           <a:xfrm>
-            <a:off x="8321040" y="2057400"/>
+            <a:off x="8321040" y="2246967"/>
             <a:ext cx="3657600" cy="1783080"/>
           </a:xfrm>
           <a:prstGeom prst="roundRect">
@@ -7702,7 +7807,7 @@
           <a:bodyPr/>
           <a:lstStyle/>
           <a:p>
-            <a:endParaRPr lang="es-PE"/>
+            <a:endParaRPr lang="es-PE" sz="2400"/>
           </a:p>
         </p:txBody>
       </p:sp>
@@ -7714,7 +7819,7 @@
         </p:nvSpPr>
         <p:spPr>
           <a:xfrm>
-            <a:off x="8549640" y="2194560"/>
+            <a:off x="8549640" y="2384127"/>
             <a:ext cx="3200400" cy="365760"/>
           </a:xfrm>
           <a:prstGeom prst="rect">
@@ -7731,7 +7836,7 @@
               <a:buNone/>
             </a:pPr>
             <a:r>
-              <a:rPr lang="en-US" sz="1600" b="1" dirty="0">
+              <a:rPr lang="en-US" sz="2000" b="1" dirty="0">
                 <a:solidFill>
                   <a:srgbClr val="1E2D6B"/>
                 </a:solidFill>
@@ -7741,7 +7846,7 @@
               </a:rPr>
               <a:t>Interlocutor</a:t>
             </a:r>
-            <a:endParaRPr lang="en-US" sz="1600" dirty="0"/>
+            <a:endParaRPr lang="en-US" sz="2000" dirty="0"/>
           </a:p>
         </p:txBody>
       </p:sp>
@@ -7753,7 +7858,7 @@
         </p:nvSpPr>
         <p:spPr>
           <a:xfrm>
-            <a:off x="8549640" y="2560320"/>
+            <a:off x="8549640" y="2749887"/>
             <a:ext cx="3200400" cy="502920"/>
           </a:xfrm>
           <a:prstGeom prst="rect">
@@ -7770,7 +7875,7 @@
               <a:buNone/>
             </a:pPr>
             <a:r>
-              <a:rPr lang="en-US" sz="1150" dirty="0">
+              <a:rPr lang="en-US" sz="1400" dirty="0">
                 <a:solidFill>
                   <a:srgbClr val="1A1A1A"/>
                 </a:solidFill>
@@ -7780,7 +7885,7 @@
               </a:rPr>
               <a:t>Conversa y responde de forma reactiva.</a:t>
             </a:r>
-            <a:endParaRPr lang="en-US" sz="1150" dirty="0"/>
+            <a:endParaRPr lang="en-US" sz="1400" dirty="0"/>
           </a:p>
         </p:txBody>
       </p:sp>
@@ -7792,7 +7897,7 @@
         </p:nvSpPr>
         <p:spPr>
           <a:xfrm>
-            <a:off x="8549640" y="3108960"/>
+            <a:off x="8549640" y="3298527"/>
             <a:ext cx="3200400" cy="640080"/>
           </a:xfrm>
           <a:prstGeom prst="rect">
@@ -7809,7 +7914,7 @@
               <a:buNone/>
             </a:pPr>
             <a:r>
-              <a:rPr lang="en-US" sz="1050" i="1" dirty="0">
+              <a:rPr lang="en-US" sz="1200" i="1" dirty="0">
                 <a:solidFill>
                   <a:srgbClr val="5A5F73"/>
                 </a:solidFill>
@@ -7819,7 +7924,7 @@
               </a:rPr>
               <a:t>EEA: Simular la respuesta de una alumna para practicar un guión.</a:t>
             </a:r>
-            <a:endParaRPr lang="en-US" sz="1050" dirty="0"/>
+            <a:endParaRPr lang="en-US" sz="1200" dirty="0"/>
           </a:p>
         </p:txBody>
       </p:sp>
@@ -7831,7 +7936,7 @@
         </p:nvSpPr>
         <p:spPr>
           <a:xfrm>
-            <a:off x="548640" y="4069080"/>
+            <a:off x="548640" y="4258647"/>
             <a:ext cx="3657600" cy="1783080"/>
           </a:xfrm>
           <a:prstGeom prst="roundRect">
@@ -7848,7 +7953,7 @@
           <a:bodyPr/>
           <a:lstStyle/>
           <a:p>
-            <a:endParaRPr lang="es-PE"/>
+            <a:endParaRPr lang="es-PE" sz="2400"/>
           </a:p>
         </p:txBody>
       </p:sp>
@@ -7860,7 +7965,7 @@
         </p:nvSpPr>
         <p:spPr>
           <a:xfrm>
-            <a:off x="777240" y="4206240"/>
+            <a:off x="777240" y="4395807"/>
             <a:ext cx="3200400" cy="365760"/>
           </a:xfrm>
           <a:prstGeom prst="rect">
@@ -7877,7 +7982,7 @@
               <a:buNone/>
             </a:pPr>
             <a:r>
-              <a:rPr lang="en-US" sz="1600" b="1" dirty="0">
+              <a:rPr lang="en-US" sz="2000" b="1" dirty="0">
                 <a:solidFill>
                   <a:srgbClr val="1E2D6B"/>
                 </a:solidFill>
@@ -7887,7 +7992,7 @@
               </a:rPr>
               <a:t>Copiloto</a:t>
             </a:r>
-            <a:endParaRPr lang="en-US" sz="1600" dirty="0"/>
+            <a:endParaRPr lang="en-US" sz="2000" dirty="0"/>
           </a:p>
         </p:txBody>
       </p:sp>
@@ -7899,7 +8004,7 @@
         </p:nvSpPr>
         <p:spPr>
           <a:xfrm>
-            <a:off x="777240" y="4572000"/>
+            <a:off x="777240" y="4761567"/>
             <a:ext cx="3200400" cy="502920"/>
           </a:xfrm>
           <a:prstGeom prst="rect">
@@ -7916,7 +8021,7 @@
               <a:buNone/>
             </a:pPr>
             <a:r>
-              <a:rPr lang="en-US" sz="1150" dirty="0">
+              <a:rPr lang="en-US" sz="1400" dirty="0">
                 <a:solidFill>
                   <a:srgbClr val="1A1A1A"/>
                 </a:solidFill>
@@ -7926,7 +8031,7 @@
               </a:rPr>
               <a:t>Asiste en la ejecución, sin tomar el control.</a:t>
             </a:r>
-            <a:endParaRPr lang="en-US" sz="1150" dirty="0"/>
+            <a:endParaRPr lang="en-US" sz="1400" dirty="0"/>
           </a:p>
         </p:txBody>
       </p:sp>
@@ -7938,7 +8043,7 @@
         </p:nvSpPr>
         <p:spPr>
           <a:xfrm>
-            <a:off x="777240" y="5120640"/>
+            <a:off x="777240" y="5310207"/>
             <a:ext cx="3200400" cy="640080"/>
           </a:xfrm>
           <a:prstGeom prst="rect">
@@ -7955,7 +8060,7 @@
               <a:buNone/>
             </a:pPr>
             <a:r>
-              <a:rPr lang="en-US" sz="1050" i="1" dirty="0">
+              <a:rPr lang="en-US" sz="1200" i="1" dirty="0">
                 <a:solidFill>
                   <a:srgbClr val="5A5F73"/>
                 </a:solidFill>
@@ -7965,7 +8070,7 @@
               </a:rPr>
               <a:t>EEA: Resumir el estado semanal de leads o de matrícula.</a:t>
             </a:r>
-            <a:endParaRPr lang="en-US" sz="1050" dirty="0"/>
+            <a:endParaRPr lang="en-US" sz="1200" dirty="0"/>
           </a:p>
         </p:txBody>
       </p:sp>
@@ -7977,7 +8082,7 @@
         </p:nvSpPr>
         <p:spPr>
           <a:xfrm>
-            <a:off x="4434840" y="4069080"/>
+            <a:off x="4434840" y="4258647"/>
             <a:ext cx="3657600" cy="1783080"/>
           </a:xfrm>
           <a:prstGeom prst="roundRect">
@@ -7994,7 +8099,7 @@
           <a:bodyPr/>
           <a:lstStyle/>
           <a:p>
-            <a:endParaRPr lang="es-PE"/>
+            <a:endParaRPr lang="es-PE" sz="2400"/>
           </a:p>
         </p:txBody>
       </p:sp>
@@ -8006,7 +8111,7 @@
         </p:nvSpPr>
         <p:spPr>
           <a:xfrm>
-            <a:off x="4663440" y="4206240"/>
+            <a:off x="4663440" y="4395807"/>
             <a:ext cx="3200400" cy="365760"/>
           </a:xfrm>
           <a:prstGeom prst="rect">
@@ -8023,7 +8128,7 @@
               <a:buNone/>
             </a:pPr>
             <a:r>
-              <a:rPr lang="en-US" sz="1600" b="1" dirty="0">
+              <a:rPr lang="en-US" sz="2000" b="1" dirty="0">
                 <a:solidFill>
                   <a:srgbClr val="1E2D6B"/>
                 </a:solidFill>
@@ -8033,7 +8138,7 @@
               </a:rPr>
               <a:t>Asesor experto</a:t>
             </a:r>
-            <a:endParaRPr lang="en-US" sz="1600" dirty="0"/>
+            <a:endParaRPr lang="en-US" sz="2000" dirty="0"/>
           </a:p>
         </p:txBody>
       </p:sp>
@@ -8045,7 +8150,7 @@
         </p:nvSpPr>
         <p:spPr>
           <a:xfrm>
-            <a:off x="4663440" y="4572000"/>
+            <a:off x="4663440" y="4761567"/>
             <a:ext cx="3200400" cy="502920"/>
           </a:xfrm>
           <a:prstGeom prst="rect">
@@ -8062,7 +8167,7 @@
               <a:buNone/>
             </a:pPr>
             <a:r>
-              <a:rPr lang="en-US" sz="1150" dirty="0">
+              <a:rPr lang="en-US" sz="1400" dirty="0">
                 <a:solidFill>
                   <a:srgbClr val="1A1A1A"/>
                 </a:solidFill>
@@ -8072,7 +8177,7 @@
               </a:rPr>
               <a:t>Orienta con criterio especializado.</a:t>
             </a:r>
-            <a:endParaRPr lang="en-US" sz="1150" dirty="0"/>
+            <a:endParaRPr lang="en-US" sz="1400" dirty="0"/>
           </a:p>
         </p:txBody>
       </p:sp>
@@ -8084,7 +8189,7 @@
         </p:nvSpPr>
         <p:spPr>
           <a:xfrm>
-            <a:off x="4663440" y="5120640"/>
+            <a:off x="4663440" y="5310207"/>
             <a:ext cx="3200400" cy="640080"/>
           </a:xfrm>
           <a:prstGeom prst="rect">
@@ -8101,7 +8206,7 @@
               <a:buNone/>
             </a:pPr>
             <a:r>
-              <a:rPr lang="en-US" sz="1050" i="1" dirty="0">
+              <a:rPr lang="en-US" sz="1200" i="1" dirty="0">
                 <a:solidFill>
                   <a:srgbClr val="5A5F73"/>
                 </a:solidFill>
@@ -8111,7 +8216,7 @@
               </a:rPr>
               <a:t>EEA: Sugerir cómo estructurar una encuesta de nivelación.</a:t>
             </a:r>
-            <a:endParaRPr lang="en-US" sz="1050" dirty="0"/>
+            <a:endParaRPr lang="en-US" sz="1200" dirty="0"/>
           </a:p>
         </p:txBody>
       </p:sp>
@@ -8123,7 +8228,7 @@
         </p:nvSpPr>
         <p:spPr>
           <a:xfrm>
-            <a:off x="8321040" y="4069080"/>
+            <a:off x="8321040" y="4258647"/>
             <a:ext cx="3657600" cy="1783080"/>
           </a:xfrm>
           <a:prstGeom prst="roundRect">
@@ -8140,7 +8245,7 @@
           <a:bodyPr/>
           <a:lstStyle/>
           <a:p>
-            <a:endParaRPr lang="es-PE"/>
+            <a:endParaRPr lang="es-PE" sz="2400"/>
           </a:p>
         </p:txBody>
       </p:sp>
@@ -8152,7 +8257,7 @@
         </p:nvSpPr>
         <p:spPr>
           <a:xfrm>
-            <a:off x="8549640" y="4206240"/>
+            <a:off x="8549640" y="4395807"/>
             <a:ext cx="3200400" cy="365760"/>
           </a:xfrm>
           <a:prstGeom prst="rect">
@@ -8169,7 +8274,7 @@
               <a:buNone/>
             </a:pPr>
             <a:r>
-              <a:rPr lang="en-US" sz="1600" b="1" dirty="0">
+              <a:rPr lang="en-US" sz="2000" b="1" dirty="0">
                 <a:solidFill>
                   <a:srgbClr val="1E2D6B"/>
                 </a:solidFill>
@@ -8179,7 +8284,7 @@
               </a:rPr>
               <a:t>Creador</a:t>
             </a:r>
-            <a:endParaRPr lang="en-US" sz="1600" dirty="0"/>
+            <a:endParaRPr lang="en-US" sz="2000" dirty="0"/>
           </a:p>
         </p:txBody>
       </p:sp>
@@ -8191,7 +8296,7 @@
         </p:nvSpPr>
         <p:spPr>
           <a:xfrm>
-            <a:off x="8549640" y="4572000"/>
+            <a:off x="8549640" y="4761567"/>
             <a:ext cx="3200400" cy="502920"/>
           </a:xfrm>
           <a:prstGeom prst="rect">
@@ -8208,7 +8313,7 @@
               <a:buNone/>
             </a:pPr>
             <a:r>
-              <a:rPr lang="en-US" sz="1150" dirty="0">
+              <a:rPr lang="en-US" sz="1400" dirty="0">
                 <a:solidFill>
                   <a:srgbClr val="1A1A1A"/>
                 </a:solidFill>
@@ -8218,7 +8323,7 @@
               </a:rPr>
               <a:t>Genera contenido o soluciones de forma autónoma.</a:t>
             </a:r>
-            <a:endParaRPr lang="en-US" sz="1150" dirty="0"/>
+            <a:endParaRPr lang="en-US" sz="1400" dirty="0"/>
           </a:p>
         </p:txBody>
       </p:sp>
@@ -8230,7 +8335,7 @@
         </p:nvSpPr>
         <p:spPr>
           <a:xfrm>
-            <a:off x="8549640" y="5120640"/>
+            <a:off x="8549640" y="5310207"/>
             <a:ext cx="3200400" cy="640080"/>
           </a:xfrm>
           <a:prstGeom prst="rect">
@@ -8247,7 +8352,7 @@
               <a:buNone/>
             </a:pPr>
             <a:r>
-              <a:rPr lang="en-US" sz="1050" i="1" dirty="0">
+              <a:rPr lang="en-US" sz="1200" i="1" dirty="0">
                 <a:solidFill>
                   <a:srgbClr val="5A5F73"/>
                 </a:solidFill>
@@ -8257,7 +8362,7 @@
               </a:rPr>
               <a:t>EEA: Redactar variaciones de copy para testeo A/B.</a:t>
             </a:r>
-            <a:endParaRPr lang="en-US" sz="1050" dirty="0"/>
+            <a:endParaRPr lang="en-US" sz="1200" dirty="0"/>
           </a:p>
         </p:txBody>
       </p:sp>
@@ -8341,7 +8446,7 @@
         </p:nvSpPr>
         <p:spPr>
           <a:xfrm>
-            <a:off x="548640" y="1371600"/>
+            <a:off x="548640" y="1005840"/>
             <a:ext cx="10972800" cy="822960"/>
           </a:xfrm>
           <a:prstGeom prst="rect">
@@ -8380,7 +8485,7 @@
         </p:nvSpPr>
         <p:spPr>
           <a:xfrm>
-            <a:off x="548640" y="2057400"/>
+            <a:off x="548640" y="1691640"/>
             <a:ext cx="10972800" cy="1005840"/>
           </a:xfrm>
           <a:prstGeom prst="rect">
@@ -8419,7 +8524,7 @@
         </p:nvSpPr>
         <p:spPr>
           <a:xfrm>
-            <a:off x="548640" y="3657600"/>
+            <a:off x="465515" y="3538850"/>
             <a:ext cx="5394960" cy="2377440"/>
           </a:xfrm>
           <a:prstGeom prst="roundRect">
@@ -8448,7 +8553,7 @@
         </p:nvSpPr>
         <p:spPr>
           <a:xfrm>
-            <a:off x="914400" y="3931920"/>
+            <a:off x="831275" y="3813170"/>
             <a:ext cx="4754880" cy="457200"/>
           </a:xfrm>
           <a:prstGeom prst="rect">
@@ -8461,11 +8566,11 @@
           <a:bodyPr wrap="square" lIns="0" tIns="0" rIns="0" bIns="0" rtlCol="0" anchor="ctr"/>
           <a:lstStyle/>
           <a:p>
-            <a:pPr marL="0" indent="0">
-              <a:buNone/>
-            </a:pPr>
-            <a:r>
-              <a:rPr lang="en-US" sz="1600" b="1" dirty="0">
+            <a:pPr marL="0" indent="0" algn="just">
+              <a:buNone/>
+            </a:pPr>
+            <a:r>
+              <a:rPr lang="en-US" sz="2000" b="1" dirty="0">
                 <a:solidFill>
                   <a:srgbClr val="FFFFFF"/>
                 </a:solidFill>
@@ -8475,7 +8580,7 @@
               </a:rPr>
               <a:t>Si tus hábitos son pereza cognitiva...</a:t>
             </a:r>
-            <a:endParaRPr lang="en-US" sz="1600" dirty="0"/>
+            <a:endParaRPr lang="en-US" sz="2000" dirty="0"/>
           </a:p>
         </p:txBody>
       </p:sp>
@@ -8487,7 +8592,7 @@
         </p:nvSpPr>
         <p:spPr>
           <a:xfrm>
-            <a:off x="914400" y="4480560"/>
+            <a:off x="831275" y="4361810"/>
             <a:ext cx="4754880" cy="1280160"/>
           </a:xfrm>
           <a:prstGeom prst="rect">
@@ -8500,11 +8605,11 @@
           <a:bodyPr wrap="square" lIns="0" tIns="0" rIns="0" bIns="0" rtlCol="0" anchor="t"/>
           <a:lstStyle/>
           <a:p>
-            <a:pPr marL="0" indent="0">
-              <a:buNone/>
-            </a:pPr>
-            <a:r>
-              <a:rPr lang="en-US" sz="1400" dirty="0">
+            <a:pPr marL="0" indent="0" algn="just">
+              <a:buNone/>
+            </a:pPr>
+            <a:r>
+              <a:rPr lang="en-US" dirty="0">
                 <a:solidFill>
                   <a:srgbClr val="C9CEE8"/>
                 </a:solidFill>
@@ -8514,7 +8619,7 @@
               </a:rPr>
               <a:t>...la IA la amplifica: decisiones opacas (“lo dijo la IA”), productos bonitos pero falsos, sesgos amplificados.</a:t>
             </a:r>
-            <a:endParaRPr lang="en-US" sz="1400" dirty="0"/>
+            <a:endParaRPr lang="en-US" dirty="0"/>
           </a:p>
         </p:txBody>
       </p:sp>
@@ -8526,7 +8631,7 @@
         </p:nvSpPr>
         <p:spPr>
           <a:xfrm>
-            <a:off x="6263640" y="3657600"/>
+            <a:off x="6180515" y="3538850"/>
             <a:ext cx="5394960" cy="2377440"/>
           </a:xfrm>
           <a:prstGeom prst="roundRect">
@@ -8555,7 +8660,7 @@
         </p:nvSpPr>
         <p:spPr>
           <a:xfrm>
-            <a:off x="6629400" y="3931920"/>
+            <a:off x="6546275" y="3813170"/>
             <a:ext cx="4754880" cy="457200"/>
           </a:xfrm>
           <a:prstGeom prst="rect">
@@ -8568,11 +8673,11 @@
           <a:bodyPr wrap="square" lIns="0" tIns="0" rIns="0" bIns="0" rtlCol="0" anchor="ctr"/>
           <a:lstStyle/>
           <a:p>
-            <a:pPr marL="0" indent="0">
-              <a:buNone/>
-            </a:pPr>
-            <a:r>
-              <a:rPr lang="en-US" sz="1600" b="1" dirty="0">
+            <a:pPr marL="0" indent="0" algn="just">
+              <a:buNone/>
+            </a:pPr>
+            <a:r>
+              <a:rPr lang="en-US" sz="2000" b="1" dirty="0">
                 <a:solidFill>
                   <a:srgbClr val="121B3A"/>
                 </a:solidFill>
@@ -8582,7 +8687,7 @@
               </a:rPr>
               <a:t>Si tus hábitos son curiosidad y criterio...</a:t>
             </a:r>
-            <a:endParaRPr lang="en-US" sz="1600" dirty="0"/>
+            <a:endParaRPr lang="en-US" sz="2000" dirty="0"/>
           </a:p>
         </p:txBody>
       </p:sp>
@@ -8594,7 +8699,7 @@
         </p:nvSpPr>
         <p:spPr>
           <a:xfrm>
-            <a:off x="6629400" y="4480560"/>
+            <a:off x="6546275" y="4361810"/>
             <a:ext cx="4754880" cy="1280160"/>
           </a:xfrm>
           <a:prstGeom prst="rect">
@@ -8607,11 +8712,11 @@
           <a:bodyPr wrap="square" lIns="0" tIns="0" rIns="0" bIns="0" rtlCol="0" anchor="t"/>
           <a:lstStyle/>
           <a:p>
-            <a:pPr marL="0" indent="0">
-              <a:buNone/>
-            </a:pPr>
-            <a:r>
-              <a:rPr lang="en-US" sz="1400" dirty="0">
+            <a:pPr marL="0" indent="0" algn="just">
+              <a:buNone/>
+            </a:pPr>
+            <a:r>
+              <a:rPr lang="en-US" dirty="0">
                 <a:solidFill>
                   <a:srgbClr val="121B3A"/>
                 </a:solidFill>
@@ -8621,7 +8726,7 @@
               </a:rPr>
               <a:t>...la IA también los amplifica: mejor pensamiento (no menos), más opciones (no decisiones automáticas), más creatividad.</a:t>
             </a:r>
-            <a:endParaRPr lang="en-US" sz="1400" dirty="0"/>
+            <a:endParaRPr lang="en-US" dirty="0"/>
           </a:p>
         </p:txBody>
       </p:sp>
@@ -8829,7 +8934,7 @@
               <a:buNone/>
             </a:pPr>
             <a:r>
-              <a:rPr lang="en-US" sz="1800" b="1" dirty="0">
+              <a:rPr lang="en-US" sz="2800" b="1" dirty="0">
                 <a:solidFill>
                   <a:srgbClr val="FFFFFF"/>
                 </a:solidFill>
@@ -8839,7 +8944,7 @@
               </a:rPr>
               <a:t>Rol</a:t>
             </a:r>
-            <a:endParaRPr lang="en-US" sz="1800" dirty="0"/>
+            <a:endParaRPr lang="en-US" sz="2800" dirty="0"/>
           </a:p>
         </p:txBody>
       </p:sp>
@@ -8868,7 +8973,7 @@
               <a:buNone/>
             </a:pPr>
             <a:r>
-              <a:rPr lang="en-US" sz="1250" dirty="0">
+              <a:rPr lang="en-US" dirty="0">
                 <a:solidFill>
                   <a:srgbClr val="C9CEE8"/>
                 </a:solidFill>
@@ -8878,7 +8983,7 @@
               </a:rPr>
               <a:t>¿Quién debe ser la IA? Define el rol o personaje que debe asumir para esta tarea.</a:t>
             </a:r>
-            <a:endParaRPr lang="en-US" sz="1250" dirty="0"/>
+            <a:endParaRPr lang="en-US" dirty="0"/>
           </a:p>
         </p:txBody>
       </p:sp>
@@ -8975,7 +9080,7 @@
               <a:buNone/>
             </a:pPr>
             <a:r>
-              <a:rPr lang="en-US" sz="1800" b="1" dirty="0">
+              <a:rPr lang="en-US" sz="2800" b="1" dirty="0">
                 <a:solidFill>
                   <a:srgbClr val="FFFFFF"/>
                 </a:solidFill>
@@ -8985,7 +9090,7 @@
               </a:rPr>
               <a:t>Interacción</a:t>
             </a:r>
-            <a:endParaRPr lang="en-US" sz="1800" dirty="0"/>
+            <a:endParaRPr lang="en-US" sz="2800" dirty="0"/>
           </a:p>
         </p:txBody>
       </p:sp>
@@ -9014,7 +9119,7 @@
               <a:buNone/>
             </a:pPr>
             <a:r>
-              <a:rPr lang="en-US" sz="1250" dirty="0">
+              <a:rPr lang="en-US" dirty="0">
                 <a:solidFill>
                   <a:srgbClr val="C9CEE8"/>
                 </a:solidFill>
@@ -9024,7 +9129,7 @@
               </a:rPr>
               <a:t>¿Cómo debe interactuar contigo? Indica si debe preguntar antes de responder.</a:t>
             </a:r>
-            <a:endParaRPr lang="en-US" sz="1250" dirty="0"/>
+            <a:endParaRPr lang="en-US" dirty="0"/>
           </a:p>
         </p:txBody>
       </p:sp>
@@ -9121,7 +9226,7 @@
               <a:buNone/>
             </a:pPr>
             <a:r>
-              <a:rPr lang="en-US" sz="1800" b="1" dirty="0">
+              <a:rPr lang="en-US" sz="2800" b="1" dirty="0">
                 <a:solidFill>
                   <a:srgbClr val="FFFFFF"/>
                 </a:solidFill>
@@ -9131,7 +9236,7 @@
               </a:rPr>
               <a:t>Tarea</a:t>
             </a:r>
-            <a:endParaRPr lang="en-US" sz="1800" dirty="0"/>
+            <a:endParaRPr lang="en-US" sz="2800" dirty="0"/>
           </a:p>
         </p:txBody>
       </p:sp>
@@ -9160,7 +9265,7 @@
               <a:buNone/>
             </a:pPr>
             <a:r>
-              <a:rPr lang="en-US" sz="1250" dirty="0">
+              <a:rPr lang="en-US" dirty="0">
                 <a:solidFill>
                   <a:srgbClr val="C9CEE8"/>
                 </a:solidFill>
@@ -9170,7 +9275,7 @@
               </a:rPr>
               <a:t>¿Qué tiene que hacer, exactamente? Usa verbos de acción y describe el entregable.</a:t>
             </a:r>
-            <a:endParaRPr lang="en-US" sz="1250" dirty="0"/>
+            <a:endParaRPr lang="en-US" dirty="0"/>
           </a:p>
         </p:txBody>
       </p:sp>
@@ -9267,7 +9372,7 @@
               <a:buNone/>
             </a:pPr>
             <a:r>
-              <a:rPr lang="en-US" sz="1800" b="1" dirty="0">
+              <a:rPr lang="en-US" sz="2800" b="1" dirty="0">
                 <a:solidFill>
                   <a:srgbClr val="FFFFFF"/>
                 </a:solidFill>
@@ -9277,7 +9382,7 @@
               </a:rPr>
               <a:t>Adaptabilidad</a:t>
             </a:r>
-            <a:endParaRPr lang="en-US" sz="1800" dirty="0"/>
+            <a:endParaRPr lang="en-US" sz="2800" dirty="0"/>
           </a:p>
         </p:txBody>
       </p:sp>
@@ -9306,7 +9411,7 @@
               <a:buNone/>
             </a:pPr>
             <a:r>
-              <a:rPr lang="en-US" sz="1250" dirty="0">
+              <a:rPr lang="en-US" dirty="0">
                 <a:solidFill>
                   <a:srgbClr val="C9CEE8"/>
                 </a:solidFill>
@@ -9316,7 +9421,7 @@
               </a:rPr>
               <a:t>¿Cómo se adapta a tu contexto? Tono, extensión, idioma, nivel del público.</a:t>
             </a:r>
-            <a:endParaRPr lang="en-US" sz="1250" dirty="0"/>
+            <a:endParaRPr lang="en-US" dirty="0"/>
           </a:p>
         </p:txBody>
       </p:sp>
@@ -9361,7 +9466,7 @@
         </p:nvSpPr>
         <p:spPr>
           <a:xfrm>
-            <a:off x="548640" y="365760"/>
+            <a:off x="548640" y="258885"/>
             <a:ext cx="5486400" cy="365760"/>
           </a:xfrm>
           <a:prstGeom prst="rect">
@@ -9439,8 +9544,8 @@
         </p:nvSpPr>
         <p:spPr>
           <a:xfrm>
-            <a:off x="548640" y="1554480"/>
-            <a:ext cx="5486400" cy="914400"/>
+            <a:off x="548640" y="1715390"/>
+            <a:ext cx="5486400" cy="712038"/>
           </a:xfrm>
           <a:prstGeom prst="roundRect">
             <a:avLst>
@@ -9456,7 +9561,7 @@
           <a:bodyPr/>
           <a:lstStyle/>
           <a:p>
-            <a:endParaRPr lang="es-PE"/>
+            <a:endParaRPr lang="es-PE" sz="2400"/>
           </a:p>
         </p:txBody>
       </p:sp>
@@ -9468,7 +9573,7 @@
         </p:nvSpPr>
         <p:spPr>
           <a:xfrm>
-            <a:off x="777240" y="1664208"/>
+            <a:off x="777240" y="1777618"/>
             <a:ext cx="2743200" cy="274320"/>
           </a:xfrm>
           <a:prstGeom prst="rect">
@@ -9485,7 +9590,7 @@
               <a:buNone/>
             </a:pPr>
             <a:r>
-              <a:rPr lang="en-US" sz="1100" b="1" kern="0" spc="150" dirty="0">
+              <a:rPr lang="en-US" sz="1400" b="1" kern="0" spc="150" dirty="0">
                 <a:solidFill>
                   <a:srgbClr val="C8434E"/>
                 </a:solidFill>
@@ -9495,7 +9600,7 @@
               </a:rPr>
               <a:t>SIN RITA</a:t>
             </a:r>
-            <a:endParaRPr lang="en-US" sz="1100" dirty="0"/>
+            <a:endParaRPr lang="en-US" sz="1400" dirty="0"/>
           </a:p>
         </p:txBody>
       </p:sp>
@@ -9507,7 +9612,7 @@
         </p:nvSpPr>
         <p:spPr>
           <a:xfrm>
-            <a:off x="777240" y="1920240"/>
+            <a:off x="777240" y="2033650"/>
             <a:ext cx="5029200" cy="502920"/>
           </a:xfrm>
           <a:prstGeom prst="rect">
@@ -9524,7 +9629,7 @@
               <a:buNone/>
             </a:pPr>
             <a:r>
-              <a:rPr lang="en-US" sz="1300" i="1" dirty="0">
+              <a:rPr lang="en-US" sz="1600" i="1" dirty="0">
                 <a:solidFill>
                   <a:srgbClr val="1A1A1A"/>
                 </a:solidFill>
@@ -9534,7 +9639,7 @@
               </a:rPr>
               <a:t>“Escribe un correo para pasar un alumno a académico”</a:t>
             </a:r>
-            <a:endParaRPr lang="en-US" sz="1300" dirty="0"/>
+            <a:endParaRPr lang="en-US" sz="1600" dirty="0"/>
           </a:p>
         </p:txBody>
       </p:sp>
@@ -9546,7 +9651,7 @@
         </p:nvSpPr>
         <p:spPr>
           <a:xfrm>
-            <a:off x="548640" y="2697480"/>
+            <a:off x="548640" y="2923106"/>
             <a:ext cx="457200" cy="457200"/>
           </a:xfrm>
           <a:prstGeom prst="ellipse">
@@ -9561,7 +9666,7 @@
           <a:bodyPr/>
           <a:lstStyle/>
           <a:p>
-            <a:endParaRPr lang="es-PE"/>
+            <a:endParaRPr lang="es-PE" sz="2400"/>
           </a:p>
         </p:txBody>
       </p:sp>
@@ -9573,7 +9678,7 @@
         </p:nvSpPr>
         <p:spPr>
           <a:xfrm>
-            <a:off x="548640" y="2697480"/>
+            <a:off x="548640" y="2923106"/>
             <a:ext cx="457200" cy="457200"/>
           </a:xfrm>
           <a:prstGeom prst="rect">
@@ -9590,15 +9695,54 @@
               <a:buNone/>
             </a:pPr>
             <a:r>
+              <a:rPr lang="en-US" sz="2000" b="1" dirty="0">
+                <a:solidFill>
+                  <a:srgbClr val="FFFFFF"/>
+                </a:solidFill>
+                <a:latin typeface="Calibri" pitchFamily="34" charset="0"/>
+                <a:ea typeface="Calibri" pitchFamily="34" charset="-122"/>
+                <a:cs typeface="Calibri" pitchFamily="34" charset="-120"/>
+              </a:rPr>
+              <a:t>R</a:t>
+            </a:r>
+            <a:endParaRPr lang="en-US" sz="2000" dirty="0"/>
+          </a:p>
+        </p:txBody>
+      </p:sp>
+      <p:sp>
+        <p:nvSpPr>
+          <p:cNvPr id="9" name="Text 7"/>
+          <p:cNvSpPr/>
+          <p:nvPr/>
+        </p:nvSpPr>
+        <p:spPr>
+          <a:xfrm>
+            <a:off x="1143000" y="2923106"/>
+            <a:ext cx="1371600" cy="457200"/>
+          </a:xfrm>
+          <a:prstGeom prst="rect">
+            <a:avLst/>
+          </a:prstGeom>
+          <a:noFill/>
+          <a:ln/>
+        </p:spPr>
+        <p:txBody>
+          <a:bodyPr wrap="square" lIns="0" tIns="0" rIns="0" bIns="0" rtlCol="0" anchor="ctr"/>
+          <a:lstStyle/>
+          <a:p>
+            <a:pPr marL="0" indent="0">
+              <a:buNone/>
+            </a:pPr>
+            <a:r>
               <a:rPr lang="en-US" sz="1600" b="1" dirty="0">
                 <a:solidFill>
-                  <a:srgbClr val="FFFFFF"/>
-                </a:solidFill>
-                <a:latin typeface="Calibri" pitchFamily="34" charset="0"/>
-                <a:ea typeface="Calibri" pitchFamily="34" charset="-122"/>
-                <a:cs typeface="Calibri" pitchFamily="34" charset="-120"/>
-              </a:rPr>
-              <a:t>R</a:t>
+                  <a:srgbClr val="121B3A"/>
+                </a:solidFill>
+                <a:latin typeface="Calibri" pitchFamily="34" charset="0"/>
+                <a:ea typeface="Calibri" pitchFamily="34" charset="-122"/>
+                <a:cs typeface="Calibri" pitchFamily="34" charset="-120"/>
+              </a:rPr>
+              <a:t>Rol:</a:t>
             </a:r>
             <a:endParaRPr lang="en-US" sz="1600" dirty="0"/>
           </a:p>
@@ -9606,14 +9750,14 @@
       </p:sp>
       <p:sp>
         <p:nvSpPr>
-          <p:cNvPr id="9" name="Text 7"/>
-          <p:cNvSpPr/>
-          <p:nvPr/>
-        </p:nvSpPr>
-        <p:spPr>
-          <a:xfrm>
-            <a:off x="1143000" y="2697480"/>
-            <a:ext cx="1371600" cy="457200"/>
+          <p:cNvPr id="10" name="Text 8"/>
+          <p:cNvSpPr/>
+          <p:nvPr/>
+        </p:nvSpPr>
+        <p:spPr>
+          <a:xfrm>
+            <a:off x="2514600" y="2923106"/>
+            <a:ext cx="9052560" cy="457200"/>
           </a:xfrm>
           <a:prstGeom prst="rect">
             <a:avLst/>
@@ -9625,50 +9769,11 @@
           <a:bodyPr wrap="square" lIns="0" tIns="0" rIns="0" bIns="0" rtlCol="0" anchor="ctr"/>
           <a:lstStyle/>
           <a:p>
-            <a:pPr marL="0" indent="0">
-              <a:buNone/>
-            </a:pPr>
-            <a:r>
-              <a:rPr lang="en-US" sz="1300" b="1" dirty="0">
-                <a:solidFill>
-                  <a:srgbClr val="121B3A"/>
-                </a:solidFill>
-                <a:latin typeface="Calibri" pitchFamily="34" charset="0"/>
-                <a:ea typeface="Calibri" pitchFamily="34" charset="-122"/>
-                <a:cs typeface="Calibri" pitchFamily="34" charset="-120"/>
-              </a:rPr>
-              <a:t>Rol:</a:t>
-            </a:r>
-            <a:endParaRPr lang="en-US" sz="1300" dirty="0"/>
-          </a:p>
-        </p:txBody>
-      </p:sp>
-      <p:sp>
-        <p:nvSpPr>
-          <p:cNvPr id="10" name="Text 8"/>
-          <p:cNvSpPr/>
-          <p:nvPr/>
-        </p:nvSpPr>
-        <p:spPr>
-          <a:xfrm>
-            <a:off x="2514600" y="2697480"/>
-            <a:ext cx="9052560" cy="457200"/>
-          </a:xfrm>
-          <a:prstGeom prst="rect">
-            <a:avLst/>
-          </a:prstGeom>
-          <a:noFill/>
-          <a:ln/>
-        </p:spPr>
-        <p:txBody>
-          <a:bodyPr wrap="square" lIns="0" tIns="0" rIns="0" bIns="0" rtlCol="0" anchor="ctr"/>
-          <a:lstStyle/>
-          <a:p>
-            <a:pPr marL="0" indent="0">
-              <a:buNone/>
-            </a:pPr>
-            <a:r>
-              <a:rPr lang="en-US" sz="1250" dirty="0">
+            <a:pPr marL="0" indent="0" algn="just">
+              <a:buNone/>
+            </a:pPr>
+            <a:r>
+              <a:rPr lang="en-US" dirty="0">
                 <a:solidFill>
                   <a:srgbClr val="1A1A1A"/>
                 </a:solidFill>
@@ -9678,7 +9783,7 @@
               </a:rPr>
               <a:t>“Eres parte del equipo comercial de Elite Expert Academy, academia online de estética avanzada.”</a:t>
             </a:r>
-            <a:endParaRPr lang="en-US" sz="1250" dirty="0"/>
+            <a:endParaRPr lang="en-US" dirty="0"/>
           </a:p>
         </p:txBody>
       </p:sp>
@@ -9690,7 +9795,7 @@
         </p:nvSpPr>
         <p:spPr>
           <a:xfrm>
-            <a:off x="548640" y="3246120"/>
+            <a:off x="548640" y="3507371"/>
             <a:ext cx="457200" cy="457200"/>
           </a:xfrm>
           <a:prstGeom prst="ellipse">
@@ -9705,7 +9810,7 @@
           <a:bodyPr/>
           <a:lstStyle/>
           <a:p>
-            <a:endParaRPr lang="es-PE"/>
+            <a:endParaRPr lang="es-PE" sz="2400"/>
           </a:p>
         </p:txBody>
       </p:sp>
@@ -9717,7 +9822,7 @@
         </p:nvSpPr>
         <p:spPr>
           <a:xfrm>
-            <a:off x="548640" y="3246120"/>
+            <a:off x="548640" y="3507371"/>
             <a:ext cx="457200" cy="457200"/>
           </a:xfrm>
           <a:prstGeom prst="rect">
@@ -9734,15 +9839,54 @@
               <a:buNone/>
             </a:pPr>
             <a:r>
+              <a:rPr lang="en-US" sz="2000" b="1" dirty="0">
+                <a:solidFill>
+                  <a:srgbClr val="FFFFFF"/>
+                </a:solidFill>
+                <a:latin typeface="Calibri" pitchFamily="34" charset="0"/>
+                <a:ea typeface="Calibri" pitchFamily="34" charset="-122"/>
+                <a:cs typeface="Calibri" pitchFamily="34" charset="-120"/>
+              </a:rPr>
+              <a:t>I</a:t>
+            </a:r>
+            <a:endParaRPr lang="en-US" sz="2000" dirty="0"/>
+          </a:p>
+        </p:txBody>
+      </p:sp>
+      <p:sp>
+        <p:nvSpPr>
+          <p:cNvPr id="13" name="Text 11"/>
+          <p:cNvSpPr/>
+          <p:nvPr/>
+        </p:nvSpPr>
+        <p:spPr>
+          <a:xfrm>
+            <a:off x="1143000" y="3507371"/>
+            <a:ext cx="1371600" cy="457200"/>
+          </a:xfrm>
+          <a:prstGeom prst="rect">
+            <a:avLst/>
+          </a:prstGeom>
+          <a:noFill/>
+          <a:ln/>
+        </p:spPr>
+        <p:txBody>
+          <a:bodyPr wrap="square" lIns="0" tIns="0" rIns="0" bIns="0" rtlCol="0" anchor="ctr"/>
+          <a:lstStyle/>
+          <a:p>
+            <a:pPr marL="0" indent="0">
+              <a:buNone/>
+            </a:pPr>
+            <a:r>
               <a:rPr lang="en-US" sz="1600" b="1" dirty="0">
                 <a:solidFill>
-                  <a:srgbClr val="FFFFFF"/>
-                </a:solidFill>
-                <a:latin typeface="Calibri" pitchFamily="34" charset="0"/>
-                <a:ea typeface="Calibri" pitchFamily="34" charset="-122"/>
-                <a:cs typeface="Calibri" pitchFamily="34" charset="-120"/>
-              </a:rPr>
-              <a:t>I</a:t>
+                  <a:srgbClr val="121B3A"/>
+                </a:solidFill>
+                <a:latin typeface="Calibri" pitchFamily="34" charset="0"/>
+                <a:ea typeface="Calibri" pitchFamily="34" charset="-122"/>
+                <a:cs typeface="Calibri" pitchFamily="34" charset="-120"/>
+              </a:rPr>
+              <a:t>Interacción:</a:t>
             </a:r>
             <a:endParaRPr lang="en-US" sz="1600" dirty="0"/>
           </a:p>
@@ -9750,14 +9894,14 @@
       </p:sp>
       <p:sp>
         <p:nvSpPr>
-          <p:cNvPr id="13" name="Text 11"/>
-          <p:cNvSpPr/>
-          <p:nvPr/>
-        </p:nvSpPr>
-        <p:spPr>
-          <a:xfrm>
-            <a:off x="1143000" y="3246120"/>
-            <a:ext cx="1371600" cy="457200"/>
+          <p:cNvPr id="14" name="Text 12"/>
+          <p:cNvSpPr/>
+          <p:nvPr/>
+        </p:nvSpPr>
+        <p:spPr>
+          <a:xfrm>
+            <a:off x="2514600" y="3507371"/>
+            <a:ext cx="9052560" cy="457200"/>
           </a:xfrm>
           <a:prstGeom prst="rect">
             <a:avLst/>
@@ -9769,50 +9913,11 @@
           <a:bodyPr wrap="square" lIns="0" tIns="0" rIns="0" bIns="0" rtlCol="0" anchor="ctr"/>
           <a:lstStyle/>
           <a:p>
-            <a:pPr marL="0" indent="0">
-              <a:buNone/>
-            </a:pPr>
-            <a:r>
-              <a:rPr lang="en-US" sz="1300" b="1" dirty="0">
-                <a:solidFill>
-                  <a:srgbClr val="121B3A"/>
-                </a:solidFill>
-                <a:latin typeface="Calibri" pitchFamily="34" charset="0"/>
-                <a:ea typeface="Calibri" pitchFamily="34" charset="-122"/>
-                <a:cs typeface="Calibri" pitchFamily="34" charset="-120"/>
-              </a:rPr>
-              <a:t>Interacción:</a:t>
-            </a:r>
-            <a:endParaRPr lang="en-US" sz="1300" dirty="0"/>
-          </a:p>
-        </p:txBody>
-      </p:sp>
-      <p:sp>
-        <p:nvSpPr>
-          <p:cNvPr id="14" name="Text 12"/>
-          <p:cNvSpPr/>
-          <p:nvPr/>
-        </p:nvSpPr>
-        <p:spPr>
-          <a:xfrm>
-            <a:off x="2514600" y="3246120"/>
-            <a:ext cx="9052560" cy="457200"/>
-          </a:xfrm>
-          <a:prstGeom prst="rect">
-            <a:avLst/>
-          </a:prstGeom>
-          <a:noFill/>
-          <a:ln/>
-        </p:spPr>
-        <p:txBody>
-          <a:bodyPr wrap="square" lIns="0" tIns="0" rIns="0" bIns="0" rtlCol="0" anchor="ctr"/>
-          <a:lstStyle/>
-          <a:p>
-            <a:pPr marL="0" indent="0">
-              <a:buNone/>
-            </a:pPr>
-            <a:r>
-              <a:rPr lang="en-US" sz="1250" dirty="0">
+            <a:pPr marL="0" indent="0" algn="just">
+              <a:buNone/>
+            </a:pPr>
+            <a:r>
+              <a:rPr lang="en-US" dirty="0">
                 <a:solidFill>
                   <a:srgbClr val="1A1A1A"/>
                 </a:solidFill>
@@ -9822,7 +9927,7 @@
               </a:rPr>
               <a:t>“Si falta algún dato de la alumna, pregúntamelo antes de redactar el correo.”</a:t>
             </a:r>
-            <a:endParaRPr lang="en-US" sz="1250" dirty="0"/>
+            <a:endParaRPr lang="en-US" dirty="0"/>
           </a:p>
         </p:txBody>
       </p:sp>
@@ -9834,7 +9939,7 @@
         </p:nvSpPr>
         <p:spPr>
           <a:xfrm>
-            <a:off x="548640" y="3794760"/>
+            <a:off x="548640" y="4067886"/>
             <a:ext cx="457200" cy="457200"/>
           </a:xfrm>
           <a:prstGeom prst="ellipse">
@@ -9849,7 +9954,7 @@
           <a:bodyPr/>
           <a:lstStyle/>
           <a:p>
-            <a:endParaRPr lang="es-PE"/>
+            <a:endParaRPr lang="es-PE" sz="2400"/>
           </a:p>
         </p:txBody>
       </p:sp>
@@ -9861,7 +9966,7 @@
         </p:nvSpPr>
         <p:spPr>
           <a:xfrm>
-            <a:off x="548640" y="3794760"/>
+            <a:off x="548640" y="4067886"/>
             <a:ext cx="457200" cy="457200"/>
           </a:xfrm>
           <a:prstGeom prst="rect">
@@ -9878,15 +9983,54 @@
               <a:buNone/>
             </a:pPr>
             <a:r>
+              <a:rPr lang="en-US" sz="2000" b="1" dirty="0">
+                <a:solidFill>
+                  <a:srgbClr val="FFFFFF"/>
+                </a:solidFill>
+                <a:latin typeface="Calibri" pitchFamily="34" charset="0"/>
+                <a:ea typeface="Calibri" pitchFamily="34" charset="-122"/>
+                <a:cs typeface="Calibri" pitchFamily="34" charset="-120"/>
+              </a:rPr>
+              <a:t>T</a:t>
+            </a:r>
+            <a:endParaRPr lang="en-US" sz="2000" dirty="0"/>
+          </a:p>
+        </p:txBody>
+      </p:sp>
+      <p:sp>
+        <p:nvSpPr>
+          <p:cNvPr id="17" name="Text 15"/>
+          <p:cNvSpPr/>
+          <p:nvPr/>
+        </p:nvSpPr>
+        <p:spPr>
+          <a:xfrm>
+            <a:off x="1143000" y="4067886"/>
+            <a:ext cx="1371600" cy="457200"/>
+          </a:xfrm>
+          <a:prstGeom prst="rect">
+            <a:avLst/>
+          </a:prstGeom>
+          <a:noFill/>
+          <a:ln/>
+        </p:spPr>
+        <p:txBody>
+          <a:bodyPr wrap="square" lIns="0" tIns="0" rIns="0" bIns="0" rtlCol="0" anchor="ctr"/>
+          <a:lstStyle/>
+          <a:p>
+            <a:pPr marL="0" indent="0">
+              <a:buNone/>
+            </a:pPr>
+            <a:r>
               <a:rPr lang="en-US" sz="1600" b="1" dirty="0">
                 <a:solidFill>
-                  <a:srgbClr val="FFFFFF"/>
-                </a:solidFill>
-                <a:latin typeface="Calibri" pitchFamily="34" charset="0"/>
-                <a:ea typeface="Calibri" pitchFamily="34" charset="-122"/>
-                <a:cs typeface="Calibri" pitchFamily="34" charset="-120"/>
-              </a:rPr>
-              <a:t>T</a:t>
+                  <a:srgbClr val="121B3A"/>
+                </a:solidFill>
+                <a:latin typeface="Calibri" pitchFamily="34" charset="0"/>
+                <a:ea typeface="Calibri" pitchFamily="34" charset="-122"/>
+                <a:cs typeface="Calibri" pitchFamily="34" charset="-120"/>
+              </a:rPr>
+              <a:t>Tarea:</a:t>
             </a:r>
             <a:endParaRPr lang="en-US" sz="1600" dirty="0"/>
           </a:p>
@@ -9894,14 +10038,14 @@
       </p:sp>
       <p:sp>
         <p:nvSpPr>
-          <p:cNvPr id="17" name="Text 15"/>
-          <p:cNvSpPr/>
-          <p:nvPr/>
-        </p:nvSpPr>
-        <p:spPr>
-          <a:xfrm>
-            <a:off x="1143000" y="3794760"/>
-            <a:ext cx="1371600" cy="457200"/>
+          <p:cNvPr id="18" name="Text 16"/>
+          <p:cNvSpPr/>
+          <p:nvPr/>
+        </p:nvSpPr>
+        <p:spPr>
+          <a:xfrm>
+            <a:off x="2514600" y="4067886"/>
+            <a:ext cx="9052560" cy="457200"/>
           </a:xfrm>
           <a:prstGeom prst="rect">
             <a:avLst/>
@@ -9913,50 +10057,11 @@
           <a:bodyPr wrap="square" lIns="0" tIns="0" rIns="0" bIns="0" rtlCol="0" anchor="ctr"/>
           <a:lstStyle/>
           <a:p>
-            <a:pPr marL="0" indent="0">
-              <a:buNone/>
-            </a:pPr>
-            <a:r>
-              <a:rPr lang="en-US" sz="1300" b="1" dirty="0">
-                <a:solidFill>
-                  <a:srgbClr val="121B3A"/>
-                </a:solidFill>
-                <a:latin typeface="Calibri" pitchFamily="34" charset="0"/>
-                <a:ea typeface="Calibri" pitchFamily="34" charset="-122"/>
-                <a:cs typeface="Calibri" pitchFamily="34" charset="-120"/>
-              </a:rPr>
-              <a:t>Tarea:</a:t>
-            </a:r>
-            <a:endParaRPr lang="en-US" sz="1300" dirty="0"/>
-          </a:p>
-        </p:txBody>
-      </p:sp>
-      <p:sp>
-        <p:nvSpPr>
-          <p:cNvPr id="18" name="Text 16"/>
-          <p:cNvSpPr/>
-          <p:nvPr/>
-        </p:nvSpPr>
-        <p:spPr>
-          <a:xfrm>
-            <a:off x="2514600" y="3794760"/>
-            <a:ext cx="9052560" cy="457200"/>
-          </a:xfrm>
-          <a:prstGeom prst="rect">
-            <a:avLst/>
-          </a:prstGeom>
-          <a:noFill/>
-          <a:ln/>
-        </p:spPr>
-        <p:txBody>
-          <a:bodyPr wrap="square" lIns="0" tIns="0" rIns="0" bIns="0" rtlCol="0" anchor="ctr"/>
-          <a:lstStyle/>
-          <a:p>
-            <a:pPr marL="0" indent="0">
-              <a:buNone/>
-            </a:pPr>
-            <a:r>
-              <a:rPr lang="en-US" sz="1250" dirty="0">
+            <a:pPr marL="0" indent="0" algn="just">
+              <a:buNone/>
+            </a:pPr>
+            <a:r>
+              <a:rPr lang="en-US" dirty="0">
                 <a:solidFill>
                   <a:srgbClr val="1A1A1A"/>
                 </a:solidFill>
@@ -9966,7 +10071,7 @@
               </a:rPr>
               <a:t>“Escribe un correo formal de traspaso al área académica: nombre, curso, fecha de inicio y nivel previo.”</a:t>
             </a:r>
-            <a:endParaRPr lang="en-US" sz="1250" dirty="0"/>
+            <a:endParaRPr lang="en-US" dirty="0"/>
           </a:p>
         </p:txBody>
       </p:sp>
@@ -9978,7 +10083,7 @@
         </p:nvSpPr>
         <p:spPr>
           <a:xfrm>
-            <a:off x="548640" y="4343400"/>
+            <a:off x="548640" y="4616526"/>
             <a:ext cx="457200" cy="457200"/>
           </a:xfrm>
           <a:prstGeom prst="ellipse">
@@ -9993,7 +10098,7 @@
           <a:bodyPr/>
           <a:lstStyle/>
           <a:p>
-            <a:endParaRPr lang="es-PE"/>
+            <a:endParaRPr lang="es-PE" sz="2400"/>
           </a:p>
         </p:txBody>
       </p:sp>
@@ -10005,7 +10110,7 @@
         </p:nvSpPr>
         <p:spPr>
           <a:xfrm>
-            <a:off x="548640" y="4343400"/>
+            <a:off x="548640" y="4616526"/>
             <a:ext cx="457200" cy="457200"/>
           </a:xfrm>
           <a:prstGeom prst="rect">
@@ -10022,15 +10127,54 @@
               <a:buNone/>
             </a:pPr>
             <a:r>
+              <a:rPr lang="en-US" sz="2000" b="1" dirty="0">
+                <a:solidFill>
+                  <a:srgbClr val="FFFFFF"/>
+                </a:solidFill>
+                <a:latin typeface="Calibri" pitchFamily="34" charset="0"/>
+                <a:ea typeface="Calibri" pitchFamily="34" charset="-122"/>
+                <a:cs typeface="Calibri" pitchFamily="34" charset="-120"/>
+              </a:rPr>
+              <a:t>A</a:t>
+            </a:r>
+            <a:endParaRPr lang="en-US" sz="2000" dirty="0"/>
+          </a:p>
+        </p:txBody>
+      </p:sp>
+      <p:sp>
+        <p:nvSpPr>
+          <p:cNvPr id="21" name="Text 19"/>
+          <p:cNvSpPr/>
+          <p:nvPr/>
+        </p:nvSpPr>
+        <p:spPr>
+          <a:xfrm>
+            <a:off x="1143000" y="4616526"/>
+            <a:ext cx="1371600" cy="457200"/>
+          </a:xfrm>
+          <a:prstGeom prst="rect">
+            <a:avLst/>
+          </a:prstGeom>
+          <a:noFill/>
+          <a:ln/>
+        </p:spPr>
+        <p:txBody>
+          <a:bodyPr wrap="square" lIns="0" tIns="0" rIns="0" bIns="0" rtlCol="0" anchor="ctr"/>
+          <a:lstStyle/>
+          <a:p>
+            <a:pPr marL="0" indent="0">
+              <a:buNone/>
+            </a:pPr>
+            <a:r>
               <a:rPr lang="en-US" sz="1600" b="1" dirty="0">
                 <a:solidFill>
-                  <a:srgbClr val="FFFFFF"/>
-                </a:solidFill>
-                <a:latin typeface="Calibri" pitchFamily="34" charset="0"/>
-                <a:ea typeface="Calibri" pitchFamily="34" charset="-122"/>
-                <a:cs typeface="Calibri" pitchFamily="34" charset="-120"/>
-              </a:rPr>
-              <a:t>A</a:t>
+                  <a:srgbClr val="121B3A"/>
+                </a:solidFill>
+                <a:latin typeface="Calibri" pitchFamily="34" charset="0"/>
+                <a:ea typeface="Calibri" pitchFamily="34" charset="-122"/>
+                <a:cs typeface="Calibri" pitchFamily="34" charset="-120"/>
+              </a:rPr>
+              <a:t>Adaptabilidad:</a:t>
             </a:r>
             <a:endParaRPr lang="en-US" sz="1600" dirty="0"/>
           </a:p>
@@ -10038,14 +10182,14 @@
       </p:sp>
       <p:sp>
         <p:nvSpPr>
-          <p:cNvPr id="21" name="Text 19"/>
-          <p:cNvSpPr/>
-          <p:nvPr/>
-        </p:nvSpPr>
-        <p:spPr>
-          <a:xfrm>
-            <a:off x="1143000" y="4343400"/>
-            <a:ext cx="1371600" cy="457200"/>
+          <p:cNvPr id="22" name="Text 20"/>
+          <p:cNvSpPr/>
+          <p:nvPr/>
+        </p:nvSpPr>
+        <p:spPr>
+          <a:xfrm>
+            <a:off x="2514600" y="4616526"/>
+            <a:ext cx="9052560" cy="457200"/>
           </a:xfrm>
           <a:prstGeom prst="rect">
             <a:avLst/>
@@ -10057,50 +10201,11 @@
           <a:bodyPr wrap="square" lIns="0" tIns="0" rIns="0" bIns="0" rtlCol="0" anchor="ctr"/>
           <a:lstStyle/>
           <a:p>
-            <a:pPr marL="0" indent="0">
-              <a:buNone/>
-            </a:pPr>
-            <a:r>
-              <a:rPr lang="en-US" sz="1300" b="1" dirty="0">
-                <a:solidFill>
-                  <a:srgbClr val="121B3A"/>
-                </a:solidFill>
-                <a:latin typeface="Calibri" pitchFamily="34" charset="0"/>
-                <a:ea typeface="Calibri" pitchFamily="34" charset="-122"/>
-                <a:cs typeface="Calibri" pitchFamily="34" charset="-120"/>
-              </a:rPr>
-              <a:t>Adaptabilidad:</a:t>
-            </a:r>
-            <a:endParaRPr lang="en-US" sz="1300" dirty="0"/>
-          </a:p>
-        </p:txBody>
-      </p:sp>
-      <p:sp>
-        <p:nvSpPr>
-          <p:cNvPr id="22" name="Text 20"/>
-          <p:cNvSpPr/>
-          <p:nvPr/>
-        </p:nvSpPr>
-        <p:spPr>
-          <a:xfrm>
-            <a:off x="2514600" y="4343400"/>
-            <a:ext cx="9052560" cy="457200"/>
-          </a:xfrm>
-          <a:prstGeom prst="rect">
-            <a:avLst/>
-          </a:prstGeom>
-          <a:noFill/>
-          <a:ln/>
-        </p:spPr>
-        <p:txBody>
-          <a:bodyPr wrap="square" lIns="0" tIns="0" rIns="0" bIns="0" rtlCol="0" anchor="ctr"/>
-          <a:lstStyle/>
-          <a:p>
-            <a:pPr marL="0" indent="0">
-              <a:buNone/>
-            </a:pPr>
-            <a:r>
-              <a:rPr lang="en-US" sz="1250" dirty="0">
+            <a:pPr marL="0" indent="0" algn="just">
+              <a:buNone/>
+            </a:pPr>
+            <a:r>
+              <a:rPr lang="en-US" dirty="0">
                 <a:solidFill>
                   <a:srgbClr val="1A1A1A"/>
                 </a:solidFill>
@@ -10110,7 +10215,7 @@
               </a:rPr>
               <a:t>“Tono profesional y cálido, máximo 120 palabras, en español.”</a:t>
             </a:r>
-            <a:endParaRPr lang="en-US" sz="1250" dirty="0"/>
+            <a:endParaRPr lang="en-US" dirty="0"/>
           </a:p>
         </p:txBody>
       </p:sp>
@@ -10122,8 +10227,8 @@
         </p:nvSpPr>
         <p:spPr>
           <a:xfrm>
-            <a:off x="548640" y="5029200"/>
-            <a:ext cx="11064240" cy="1417320"/>
+            <a:off x="548640" y="5308270"/>
+            <a:ext cx="11064240" cy="1268876"/>
           </a:xfrm>
           <a:prstGeom prst="roundRect">
             <a:avLst>
@@ -10151,7 +10256,7 @@
         </p:nvSpPr>
         <p:spPr>
           <a:xfrm>
-            <a:off x="777240" y="5148072"/>
+            <a:off x="731520" y="5599927"/>
             <a:ext cx="3657600" cy="274320"/>
           </a:xfrm>
           <a:prstGeom prst="rect">
@@ -10164,11 +10269,11 @@
           <a:bodyPr wrap="square" lIns="0" tIns="0" rIns="0" bIns="0" rtlCol="0" anchor="ctr"/>
           <a:lstStyle/>
           <a:p>
-            <a:pPr marL="0" indent="0">
-              <a:buNone/>
-            </a:pPr>
-            <a:r>
-              <a:rPr lang="en-US" sz="1100" b="1" kern="0" spc="150" dirty="0">
+            <a:pPr marL="0" indent="0" algn="just">
+              <a:buNone/>
+            </a:pPr>
+            <a:r>
+              <a:rPr lang="en-US" sz="1600" b="1" kern="0" spc="150" dirty="0">
                 <a:solidFill>
                   <a:srgbClr val="1E7A34"/>
                 </a:solidFill>
@@ -10178,7 +10283,7 @@
               </a:rPr>
               <a:t>CON RITA — resultado en vivo</a:t>
             </a:r>
-            <a:endParaRPr lang="en-US" sz="1100" dirty="0"/>
+            <a:endParaRPr lang="en-US" sz="1600" dirty="0"/>
           </a:p>
         </p:txBody>
       </p:sp>
@@ -10190,7 +10295,7 @@
         </p:nvSpPr>
         <p:spPr>
           <a:xfrm>
-            <a:off x="777240" y="5440680"/>
+            <a:off x="731520" y="5892535"/>
             <a:ext cx="10607040" cy="822960"/>
           </a:xfrm>
           <a:prstGeom prst="rect">
@@ -10203,11 +10308,11 @@
           <a:bodyPr wrap="square" lIns="0" tIns="0" rIns="0" bIns="0" rtlCol="0" anchor="t"/>
           <a:lstStyle/>
           <a:p>
-            <a:pPr marL="0" indent="0">
-              <a:buNone/>
-            </a:pPr>
-            <a:r>
-              <a:rPr lang="en-US" sz="1300" i="1" dirty="0">
+            <a:pPr marL="0" indent="0" algn="just">
+              <a:buNone/>
+            </a:pPr>
+            <a:r>
+              <a:rPr lang="en-US" i="1" dirty="0">
                 <a:solidFill>
                   <a:srgbClr val="1A1A1A"/>
                 </a:solidFill>
@@ -10217,7 +10322,7 @@
               </a:rPr>
               <a:t>Ejecutamos este prompt en vivo en Claude y comparamos el resultado con el prompt sin RITA.</a:t>
             </a:r>
-            <a:endParaRPr lang="en-US" sz="1300" dirty="0"/>
+            <a:endParaRPr lang="en-US" dirty="0"/>
           </a:p>
         </p:txBody>
       </p:sp>
